--- a/02_Presentacion/Presentación OmniRuta.pptx
+++ b/02_Presentacion/Presentación OmniRuta.pptx
@@ -1,40 +1,40 @@
 
 <file path=ppt/presentation.xml><?xml version="1.0" encoding="utf-8"?>
-<p:presentation xmlns:a="http://schemas.openxmlformats.org/drawingml/2006/main" xmlns:r="http://schemas.openxmlformats.org/officeDocument/2006/relationships" xmlns:p="http://schemas.openxmlformats.org/presentationml/2006/main" saveSubsetFonts="1" embedTrueTypeFonts="true">
+<p:presentation xmlns:a="http://schemas.openxmlformats.org/drawingml/2006/main" xmlns:r="http://schemas.openxmlformats.org/officeDocument/2006/relationships" xmlns:p="http://schemas.openxmlformats.org/presentationml/2006/main" embedTrueTypeFonts="1" saveSubsetFonts="1">
   <p:sldMasterIdLst>
     <p:sldMasterId id="2147483648" r:id="rId1"/>
   </p:sldMasterIdLst>
   <p:sldIdLst>
-    <p:sldId id="256" r:id="rId6"/>
-    <p:sldId id="257" r:id="rId7"/>
-    <p:sldId id="258" r:id="rId8"/>
-    <p:sldId id="259" r:id="rId9"/>
-    <p:sldId id="260" r:id="rId10"/>
-    <p:sldId id="261" r:id="rId11"/>
-    <p:sldId id="262" r:id="rId12"/>
-    <p:sldId id="263" r:id="rId13"/>
-    <p:sldId id="264" r:id="rId14"/>
-    <p:sldId id="265" r:id="rId15"/>
-    <p:sldId id="266" r:id="rId16"/>
-    <p:sldId id="267" r:id="rId17"/>
-    <p:sldId id="268" r:id="rId18"/>
-    <p:sldId id="269" r:id="rId19"/>
-    <p:sldId id="270" r:id="rId20"/>
+    <p:sldId id="256" r:id="rId2"/>
+    <p:sldId id="257" r:id="rId3"/>
+    <p:sldId id="258" r:id="rId4"/>
+    <p:sldId id="259" r:id="rId5"/>
+    <p:sldId id="260" r:id="rId6"/>
+    <p:sldId id="261" r:id="rId7"/>
+    <p:sldId id="262" r:id="rId8"/>
+    <p:sldId id="263" r:id="rId9"/>
+    <p:sldId id="264" r:id="rId10"/>
+    <p:sldId id="265" r:id="rId11"/>
+    <p:sldId id="266" r:id="rId12"/>
+    <p:sldId id="267" r:id="rId13"/>
+    <p:sldId id="268" r:id="rId14"/>
+    <p:sldId id="269" r:id="rId15"/>
+    <p:sldId id="270" r:id="rId16"/>
   </p:sldIdLst>
   <p:sldSz cx="18288000" cy="10287000"/>
   <p:notesSz cx="6858000" cy="9144000"/>
   <p:embeddedFontLst>
     <p:embeddedFont>
-      <p:font typeface="29LT Bukra Semi-Bold" charset="1" panose="020B0704040000000004"/>
-      <p:regular r:id="rId21"/>
+      <p:font typeface="29LT Bukra" panose="020B0604020202020204" charset="-78"/>
+      <p:regular r:id="rId17"/>
     </p:embeddedFont>
     <p:embeddedFont>
-      <p:font typeface="29LT Bukra" charset="1" panose="020B0504040000000004"/>
-      <p:regular r:id="rId22"/>
+      <p:font typeface="29LT Bukra Bold" panose="020B0604020202020204" charset="-78"/>
+      <p:regular r:id="rId18"/>
     </p:embeddedFont>
     <p:embeddedFont>
-      <p:font typeface="29LT Bukra Bold" charset="1" panose="020B0804040000000004"/>
-      <p:regular r:id="rId23"/>
+      <p:font typeface="29LT Bukra Semi-Bold" panose="020B0604020202020204" charset="-78"/>
+      <p:regular r:id="rId19"/>
     </p:embeddedFont>
   </p:embeddedFontLst>
   <p:defaultTextStyle>
@@ -132,6 +132,22 @@
       </a:defRPr>
     </a:lvl9pPr>
   </p:defaultTextStyle>
+  <p:extLst>
+    <p:ext uri="{EFAFB233-063F-42B5-8137-9DF3F51BA10A}">
+      <p15:sldGuideLst xmlns:p15="http://schemas.microsoft.com/office/powerpoint/2012/main">
+        <p15:guide id="1" orient="horz" pos="2160">
+          <p15:clr>
+            <a:srgbClr val="A4A3A4"/>
+          </p15:clr>
+        </p15:guide>
+        <p15:guide id="2" pos="2880">
+          <p15:clr>
+            <a:srgbClr val="A4A3A4"/>
+          </p15:clr>
+        </p15:guide>
+      </p15:sldGuideLst>
+    </p:ext>
+  </p:extLst>
 </p:presentation>
 </file>
 
@@ -173,10 +189,9 @@
           <a:lstStyle/>
           <a:p>
             <a:r>
-              <a:rPr lang="en-US" smtClean="0"/>
+              <a:rPr lang="en-US"/>
               <a:t>Click to edit Master title style</a:t>
             </a:r>
-            <a:endParaRPr lang="en-US"/>
           </a:p>
         </p:txBody>
       </p:sp>
@@ -292,10 +307,9 @@
           </a:lstStyle>
           <a:p>
             <a:r>
-              <a:rPr lang="en-US" smtClean="0"/>
+              <a:rPr lang="en-US"/>
               <a:t>Click to edit Master subtitle style</a:t>
             </a:r>
-            <a:endParaRPr lang="en-US"/>
           </a:p>
         </p:txBody>
       </p:sp>
@@ -317,7 +331,7 @@
             <a:fld id="{1D8BD707-D9CF-40AE-B4C6-C98DA3205C09}" type="datetimeFigureOut">
               <a:rPr lang="en-US" smtClean="0"/>
               <a:pPr/>
-              <a:t>8/1/2011</a:t>
+              <a:t>6/5/2026</a:t>
             </a:fld>
             <a:endParaRPr lang="en-US"/>
           </a:p>
@@ -360,7 +374,7 @@
             <a:fld id="{B6F15528-21DE-4FAA-801E-634DDDAF4B2B}" type="slidenum">
               <a:rPr lang="en-US" smtClean="0"/>
               <a:pPr/>
-              <a:t>‹#›</a:t>
+              <a:t>‹Nº›</a:t>
             </a:fld>
             <a:endParaRPr lang="en-US"/>
           </a:p>
@@ -407,10 +421,9 @@
           <a:lstStyle/>
           <a:p>
             <a:r>
-              <a:rPr lang="en-US" smtClean="0"/>
+              <a:rPr lang="en-US"/>
               <a:t>Click to edit Master title style</a:t>
             </a:r>
-            <a:endParaRPr lang="en-US"/>
           </a:p>
         </p:txBody>
       </p:sp>
@@ -431,38 +444,37 @@
           <a:p>
             <a:pPr lvl="0"/>
             <a:r>
-              <a:rPr lang="en-US" smtClean="0"/>
+              <a:rPr lang="en-US"/>
               <a:t>Click to edit Master text styles</a:t>
             </a:r>
           </a:p>
           <a:p>
             <a:pPr lvl="1"/>
             <a:r>
-              <a:rPr lang="en-US" smtClean="0"/>
+              <a:rPr lang="en-US"/>
               <a:t>Second level</a:t>
             </a:r>
           </a:p>
           <a:p>
             <a:pPr lvl="2"/>
             <a:r>
-              <a:rPr lang="en-US" smtClean="0"/>
+              <a:rPr lang="en-US"/>
               <a:t>Third level</a:t>
             </a:r>
           </a:p>
           <a:p>
             <a:pPr lvl="3"/>
             <a:r>
-              <a:rPr lang="en-US" smtClean="0"/>
+              <a:rPr lang="en-US"/>
               <a:t>Fourth level</a:t>
             </a:r>
           </a:p>
           <a:p>
             <a:pPr lvl="4"/>
             <a:r>
-              <a:rPr lang="en-US" smtClean="0"/>
+              <a:rPr lang="en-US"/>
               <a:t>Fifth level</a:t>
             </a:r>
-            <a:endParaRPr lang="en-US"/>
           </a:p>
         </p:txBody>
       </p:sp>
@@ -484,7 +496,7 @@
             <a:fld id="{1D8BD707-D9CF-40AE-B4C6-C98DA3205C09}" type="datetimeFigureOut">
               <a:rPr lang="en-US" smtClean="0"/>
               <a:pPr/>
-              <a:t>8/1/2011</a:t>
+              <a:t>6/5/2026</a:t>
             </a:fld>
             <a:endParaRPr lang="en-US"/>
           </a:p>
@@ -527,7 +539,7 @@
             <a:fld id="{B6F15528-21DE-4FAA-801E-634DDDAF4B2B}" type="slidenum">
               <a:rPr lang="en-US" smtClean="0"/>
               <a:pPr/>
-              <a:t>‹#›</a:t>
+              <a:t>‹Nº›</a:t>
             </a:fld>
             <a:endParaRPr lang="en-US"/>
           </a:p>
@@ -579,10 +591,9 @@
           <a:lstStyle/>
           <a:p>
             <a:r>
-              <a:rPr lang="en-US" smtClean="0"/>
+              <a:rPr lang="en-US"/>
               <a:t>Click to edit Master title style</a:t>
             </a:r>
-            <a:endParaRPr lang="en-US"/>
           </a:p>
         </p:txBody>
       </p:sp>
@@ -608,38 +619,37 @@
           <a:p>
             <a:pPr lvl="0"/>
             <a:r>
-              <a:rPr lang="en-US" smtClean="0"/>
+              <a:rPr lang="en-US"/>
               <a:t>Click to edit Master text styles</a:t>
             </a:r>
           </a:p>
           <a:p>
             <a:pPr lvl="1"/>
             <a:r>
-              <a:rPr lang="en-US" smtClean="0"/>
+              <a:rPr lang="en-US"/>
               <a:t>Second level</a:t>
             </a:r>
           </a:p>
           <a:p>
             <a:pPr lvl="2"/>
             <a:r>
-              <a:rPr lang="en-US" smtClean="0"/>
+              <a:rPr lang="en-US"/>
               <a:t>Third level</a:t>
             </a:r>
           </a:p>
           <a:p>
             <a:pPr lvl="3"/>
             <a:r>
-              <a:rPr lang="en-US" smtClean="0"/>
+              <a:rPr lang="en-US"/>
               <a:t>Fourth level</a:t>
             </a:r>
           </a:p>
           <a:p>
             <a:pPr lvl="4"/>
             <a:r>
-              <a:rPr lang="en-US" smtClean="0"/>
+              <a:rPr lang="en-US"/>
               <a:t>Fifth level</a:t>
             </a:r>
-            <a:endParaRPr lang="en-US"/>
           </a:p>
         </p:txBody>
       </p:sp>
@@ -661,7 +671,7 @@
             <a:fld id="{1D8BD707-D9CF-40AE-B4C6-C98DA3205C09}" type="datetimeFigureOut">
               <a:rPr lang="en-US" smtClean="0"/>
               <a:pPr/>
-              <a:t>8/1/2011</a:t>
+              <a:t>6/5/2026</a:t>
             </a:fld>
             <a:endParaRPr lang="en-US"/>
           </a:p>
@@ -704,7 +714,7 @@
             <a:fld id="{B6F15528-21DE-4FAA-801E-634DDDAF4B2B}" type="slidenum">
               <a:rPr lang="en-US" smtClean="0"/>
               <a:pPr/>
-              <a:t>‹#›</a:t>
+              <a:t>‹Nº›</a:t>
             </a:fld>
             <a:endParaRPr lang="en-US"/>
           </a:p>
@@ -751,10 +761,9 @@
           <a:lstStyle/>
           <a:p>
             <a:r>
-              <a:rPr lang="en-US" smtClean="0"/>
+              <a:rPr lang="en-US"/>
               <a:t>Click to edit Master title style</a:t>
             </a:r>
-            <a:endParaRPr lang="en-US"/>
           </a:p>
         </p:txBody>
       </p:sp>
@@ -775,38 +784,37 @@
           <a:p>
             <a:pPr lvl="0"/>
             <a:r>
-              <a:rPr lang="en-US" smtClean="0"/>
+              <a:rPr lang="en-US"/>
               <a:t>Click to edit Master text styles</a:t>
             </a:r>
           </a:p>
           <a:p>
             <a:pPr lvl="1"/>
             <a:r>
-              <a:rPr lang="en-US" smtClean="0"/>
+              <a:rPr lang="en-US"/>
               <a:t>Second level</a:t>
             </a:r>
           </a:p>
           <a:p>
             <a:pPr lvl="2"/>
             <a:r>
-              <a:rPr lang="en-US" smtClean="0"/>
+              <a:rPr lang="en-US"/>
               <a:t>Third level</a:t>
             </a:r>
           </a:p>
           <a:p>
             <a:pPr lvl="3"/>
             <a:r>
-              <a:rPr lang="en-US" smtClean="0"/>
+              <a:rPr lang="en-US"/>
               <a:t>Fourth level</a:t>
             </a:r>
           </a:p>
           <a:p>
             <a:pPr lvl="4"/>
             <a:r>
-              <a:rPr lang="en-US" smtClean="0"/>
+              <a:rPr lang="en-US"/>
               <a:t>Fifth level</a:t>
             </a:r>
-            <a:endParaRPr lang="en-US"/>
           </a:p>
         </p:txBody>
       </p:sp>
@@ -828,7 +836,7 @@
             <a:fld id="{1D8BD707-D9CF-40AE-B4C6-C98DA3205C09}" type="datetimeFigureOut">
               <a:rPr lang="en-US" smtClean="0"/>
               <a:pPr/>
-              <a:t>8/1/2011</a:t>
+              <a:t>6/5/2026</a:t>
             </a:fld>
             <a:endParaRPr lang="en-US"/>
           </a:p>
@@ -871,7 +879,7 @@
             <a:fld id="{B6F15528-21DE-4FAA-801E-634DDDAF4B2B}" type="slidenum">
               <a:rPr lang="en-US" smtClean="0"/>
               <a:pPr/>
-              <a:t>‹#›</a:t>
+              <a:t>‹Nº›</a:t>
             </a:fld>
             <a:endParaRPr lang="en-US"/>
           </a:p>
@@ -927,10 +935,9 @@
           </a:lstStyle>
           <a:p>
             <a:r>
-              <a:rPr lang="en-US" smtClean="0"/>
+              <a:rPr lang="en-US"/>
               <a:t>Click to edit Master title style</a:t>
             </a:r>
-            <a:endParaRPr lang="en-US"/>
           </a:p>
         </p:txBody>
       </p:sp>
@@ -1047,7 +1054,7 @@
           <a:p>
             <a:pPr lvl="0"/>
             <a:r>
-              <a:rPr lang="en-US" smtClean="0"/>
+              <a:rPr lang="en-US"/>
               <a:t>Click to edit Master text styles</a:t>
             </a:r>
           </a:p>
@@ -1071,7 +1078,7 @@
             <a:fld id="{1D8BD707-D9CF-40AE-B4C6-C98DA3205C09}" type="datetimeFigureOut">
               <a:rPr lang="en-US" smtClean="0"/>
               <a:pPr/>
-              <a:t>8/1/2011</a:t>
+              <a:t>6/5/2026</a:t>
             </a:fld>
             <a:endParaRPr lang="en-US"/>
           </a:p>
@@ -1114,7 +1121,7 @@
             <a:fld id="{B6F15528-21DE-4FAA-801E-634DDDAF4B2B}" type="slidenum">
               <a:rPr lang="en-US" smtClean="0"/>
               <a:pPr/>
-              <a:t>‹#›</a:t>
+              <a:t>‹Nº›</a:t>
             </a:fld>
             <a:endParaRPr lang="en-US"/>
           </a:p>
@@ -1161,10 +1168,9 @@
           <a:lstStyle/>
           <a:p>
             <a:r>
-              <a:rPr lang="en-US" smtClean="0"/>
+              <a:rPr lang="en-US"/>
               <a:t>Click to edit Master title style</a:t>
             </a:r>
-            <a:endParaRPr lang="en-US"/>
           </a:p>
         </p:txBody>
       </p:sp>
@@ -1218,38 +1224,37 @@
           <a:p>
             <a:pPr lvl="0"/>
             <a:r>
-              <a:rPr lang="en-US" smtClean="0"/>
+              <a:rPr lang="en-US"/>
               <a:t>Click to edit Master text styles</a:t>
             </a:r>
           </a:p>
           <a:p>
             <a:pPr lvl="1"/>
             <a:r>
-              <a:rPr lang="en-US" smtClean="0"/>
+              <a:rPr lang="en-US"/>
               <a:t>Second level</a:t>
             </a:r>
           </a:p>
           <a:p>
             <a:pPr lvl="2"/>
             <a:r>
-              <a:rPr lang="en-US" smtClean="0"/>
+              <a:rPr lang="en-US"/>
               <a:t>Third level</a:t>
             </a:r>
           </a:p>
           <a:p>
             <a:pPr lvl="3"/>
             <a:r>
-              <a:rPr lang="en-US" smtClean="0"/>
+              <a:rPr lang="en-US"/>
               <a:t>Fourth level</a:t>
             </a:r>
           </a:p>
           <a:p>
             <a:pPr lvl="4"/>
             <a:r>
-              <a:rPr lang="en-US" smtClean="0"/>
+              <a:rPr lang="en-US"/>
               <a:t>Fifth level</a:t>
             </a:r>
-            <a:endParaRPr lang="en-US"/>
           </a:p>
         </p:txBody>
       </p:sp>
@@ -1303,38 +1308,37 @@
           <a:p>
             <a:pPr lvl="0"/>
             <a:r>
-              <a:rPr lang="en-US" smtClean="0"/>
+              <a:rPr lang="en-US"/>
               <a:t>Click to edit Master text styles</a:t>
             </a:r>
           </a:p>
           <a:p>
             <a:pPr lvl="1"/>
             <a:r>
-              <a:rPr lang="en-US" smtClean="0"/>
+              <a:rPr lang="en-US"/>
               <a:t>Second level</a:t>
             </a:r>
           </a:p>
           <a:p>
             <a:pPr lvl="2"/>
             <a:r>
-              <a:rPr lang="en-US" smtClean="0"/>
+              <a:rPr lang="en-US"/>
               <a:t>Third level</a:t>
             </a:r>
           </a:p>
           <a:p>
             <a:pPr lvl="3"/>
             <a:r>
-              <a:rPr lang="en-US" smtClean="0"/>
+              <a:rPr lang="en-US"/>
               <a:t>Fourth level</a:t>
             </a:r>
           </a:p>
           <a:p>
             <a:pPr lvl="4"/>
             <a:r>
-              <a:rPr lang="en-US" smtClean="0"/>
+              <a:rPr lang="en-US"/>
               <a:t>Fifth level</a:t>
             </a:r>
-            <a:endParaRPr lang="en-US"/>
           </a:p>
         </p:txBody>
       </p:sp>
@@ -1356,7 +1360,7 @@
             <a:fld id="{1D8BD707-D9CF-40AE-B4C6-C98DA3205C09}" type="datetimeFigureOut">
               <a:rPr lang="en-US" smtClean="0"/>
               <a:pPr/>
-              <a:t>8/1/2011</a:t>
+              <a:t>6/5/2026</a:t>
             </a:fld>
             <a:endParaRPr lang="en-US"/>
           </a:p>
@@ -1399,7 +1403,7 @@
             <a:fld id="{B6F15528-21DE-4FAA-801E-634DDDAF4B2B}" type="slidenum">
               <a:rPr lang="en-US" smtClean="0"/>
               <a:pPr/>
-              <a:t>‹#›</a:t>
+              <a:t>‹Nº›</a:t>
             </a:fld>
             <a:endParaRPr lang="en-US"/>
           </a:p>
@@ -1450,10 +1454,9 @@
           </a:lstStyle>
           <a:p>
             <a:r>
-              <a:rPr lang="en-US" smtClean="0"/>
+              <a:rPr lang="en-US"/>
               <a:t>Click to edit Master title style</a:t>
             </a:r>
-            <a:endParaRPr lang="en-US"/>
           </a:p>
         </p:txBody>
       </p:sp>
@@ -1516,7 +1519,7 @@
           <a:p>
             <a:pPr lvl="0"/>
             <a:r>
-              <a:rPr lang="en-US" smtClean="0"/>
+              <a:rPr lang="en-US"/>
               <a:t>Click to edit Master text styles</a:t>
             </a:r>
           </a:p>
@@ -1572,38 +1575,37 @@
           <a:p>
             <a:pPr lvl="0"/>
             <a:r>
-              <a:rPr lang="en-US" smtClean="0"/>
+              <a:rPr lang="en-US"/>
               <a:t>Click to edit Master text styles</a:t>
             </a:r>
           </a:p>
           <a:p>
             <a:pPr lvl="1"/>
             <a:r>
-              <a:rPr lang="en-US" smtClean="0"/>
+              <a:rPr lang="en-US"/>
               <a:t>Second level</a:t>
             </a:r>
           </a:p>
           <a:p>
             <a:pPr lvl="2"/>
             <a:r>
-              <a:rPr lang="en-US" smtClean="0"/>
+              <a:rPr lang="en-US"/>
               <a:t>Third level</a:t>
             </a:r>
           </a:p>
           <a:p>
             <a:pPr lvl="3"/>
             <a:r>
-              <a:rPr lang="en-US" smtClean="0"/>
+              <a:rPr lang="en-US"/>
               <a:t>Fourth level</a:t>
             </a:r>
           </a:p>
           <a:p>
             <a:pPr lvl="4"/>
             <a:r>
-              <a:rPr lang="en-US" smtClean="0"/>
+              <a:rPr lang="en-US"/>
               <a:t>Fifth level</a:t>
             </a:r>
-            <a:endParaRPr lang="en-US"/>
           </a:p>
         </p:txBody>
       </p:sp>
@@ -1666,7 +1668,7 @@
           <a:p>
             <a:pPr lvl="0"/>
             <a:r>
-              <a:rPr lang="en-US" smtClean="0"/>
+              <a:rPr lang="en-US"/>
               <a:t>Click to edit Master text styles</a:t>
             </a:r>
           </a:p>
@@ -1722,38 +1724,37 @@
           <a:p>
             <a:pPr lvl="0"/>
             <a:r>
-              <a:rPr lang="en-US" smtClean="0"/>
+              <a:rPr lang="en-US"/>
               <a:t>Click to edit Master text styles</a:t>
             </a:r>
           </a:p>
           <a:p>
             <a:pPr lvl="1"/>
             <a:r>
-              <a:rPr lang="en-US" smtClean="0"/>
+              <a:rPr lang="en-US"/>
               <a:t>Second level</a:t>
             </a:r>
           </a:p>
           <a:p>
             <a:pPr lvl="2"/>
             <a:r>
-              <a:rPr lang="en-US" smtClean="0"/>
+              <a:rPr lang="en-US"/>
               <a:t>Third level</a:t>
             </a:r>
           </a:p>
           <a:p>
             <a:pPr lvl="3"/>
             <a:r>
-              <a:rPr lang="en-US" smtClean="0"/>
+              <a:rPr lang="en-US"/>
               <a:t>Fourth level</a:t>
             </a:r>
           </a:p>
           <a:p>
             <a:pPr lvl="4"/>
             <a:r>
-              <a:rPr lang="en-US" smtClean="0"/>
+              <a:rPr lang="en-US"/>
               <a:t>Fifth level</a:t>
             </a:r>
-            <a:endParaRPr lang="en-US"/>
           </a:p>
         </p:txBody>
       </p:sp>
@@ -1775,7 +1776,7 @@
             <a:fld id="{1D8BD707-D9CF-40AE-B4C6-C98DA3205C09}" type="datetimeFigureOut">
               <a:rPr lang="en-US" smtClean="0"/>
               <a:pPr/>
-              <a:t>8/1/2011</a:t>
+              <a:t>6/5/2026</a:t>
             </a:fld>
             <a:endParaRPr lang="en-US"/>
           </a:p>
@@ -1818,7 +1819,7 @@
             <a:fld id="{B6F15528-21DE-4FAA-801E-634DDDAF4B2B}" type="slidenum">
               <a:rPr lang="en-US" smtClean="0"/>
               <a:pPr/>
-              <a:t>‹#›</a:t>
+              <a:t>‹Nº›</a:t>
             </a:fld>
             <a:endParaRPr lang="en-US"/>
           </a:p>
@@ -1865,10 +1866,9 @@
           <a:lstStyle/>
           <a:p>
             <a:r>
-              <a:rPr lang="en-US" smtClean="0"/>
+              <a:rPr lang="en-US"/>
               <a:t>Click to edit Master title style</a:t>
             </a:r>
-            <a:endParaRPr lang="en-US"/>
           </a:p>
         </p:txBody>
       </p:sp>
@@ -1890,7 +1890,7 @@
             <a:fld id="{1D8BD707-D9CF-40AE-B4C6-C98DA3205C09}" type="datetimeFigureOut">
               <a:rPr lang="en-US" smtClean="0"/>
               <a:pPr/>
-              <a:t>8/1/2011</a:t>
+              <a:t>6/5/2026</a:t>
             </a:fld>
             <a:endParaRPr lang="en-US"/>
           </a:p>
@@ -1933,7 +1933,7 @@
             <a:fld id="{B6F15528-21DE-4FAA-801E-634DDDAF4B2B}" type="slidenum">
               <a:rPr lang="en-US" smtClean="0"/>
               <a:pPr/>
-              <a:t>‹#›</a:t>
+              <a:t>‹Nº›</a:t>
             </a:fld>
             <a:endParaRPr lang="en-US"/>
           </a:p>
@@ -1982,7 +1982,7 @@
             <a:fld id="{1D8BD707-D9CF-40AE-B4C6-C98DA3205C09}" type="datetimeFigureOut">
               <a:rPr lang="en-US" smtClean="0"/>
               <a:pPr/>
-              <a:t>8/1/2011</a:t>
+              <a:t>6/5/2026</a:t>
             </a:fld>
             <a:endParaRPr lang="en-US"/>
           </a:p>
@@ -2025,7 +2025,7 @@
             <a:fld id="{B6F15528-21DE-4FAA-801E-634DDDAF4B2B}" type="slidenum">
               <a:rPr lang="en-US" smtClean="0"/>
               <a:pPr/>
-              <a:t>‹#›</a:t>
+              <a:t>‹Nº›</a:t>
             </a:fld>
             <a:endParaRPr lang="en-US"/>
           </a:p>
@@ -2081,10 +2081,9 @@
           </a:lstStyle>
           <a:p>
             <a:r>
-              <a:rPr lang="en-US" smtClean="0"/>
+              <a:rPr lang="en-US"/>
               <a:t>Click to edit Master title style</a:t>
             </a:r>
-            <a:endParaRPr lang="en-US"/>
           </a:p>
         </p:txBody>
       </p:sp>
@@ -2138,38 +2137,37 @@
           <a:p>
             <a:pPr lvl="0"/>
             <a:r>
-              <a:rPr lang="en-US" smtClean="0"/>
+              <a:rPr lang="en-US"/>
               <a:t>Click to edit Master text styles</a:t>
             </a:r>
           </a:p>
           <a:p>
             <a:pPr lvl="1"/>
             <a:r>
-              <a:rPr lang="en-US" smtClean="0"/>
+              <a:rPr lang="en-US"/>
               <a:t>Second level</a:t>
             </a:r>
           </a:p>
           <a:p>
             <a:pPr lvl="2"/>
             <a:r>
-              <a:rPr lang="en-US" smtClean="0"/>
+              <a:rPr lang="en-US"/>
               <a:t>Third level</a:t>
             </a:r>
           </a:p>
           <a:p>
             <a:pPr lvl="3"/>
             <a:r>
-              <a:rPr lang="en-US" smtClean="0"/>
+              <a:rPr lang="en-US"/>
               <a:t>Fourth level</a:t>
             </a:r>
           </a:p>
           <a:p>
             <a:pPr lvl="4"/>
             <a:r>
-              <a:rPr lang="en-US" smtClean="0"/>
+              <a:rPr lang="en-US"/>
               <a:t>Fifth level</a:t>
             </a:r>
-            <a:endParaRPr lang="en-US"/>
           </a:p>
         </p:txBody>
       </p:sp>
@@ -2232,7 +2230,7 @@
           <a:p>
             <a:pPr lvl="0"/>
             <a:r>
-              <a:rPr lang="en-US" smtClean="0"/>
+              <a:rPr lang="en-US"/>
               <a:t>Click to edit Master text styles</a:t>
             </a:r>
           </a:p>
@@ -2256,7 +2254,7 @@
             <a:fld id="{1D8BD707-D9CF-40AE-B4C6-C98DA3205C09}" type="datetimeFigureOut">
               <a:rPr lang="en-US" smtClean="0"/>
               <a:pPr/>
-              <a:t>8/1/2011</a:t>
+              <a:t>6/5/2026</a:t>
             </a:fld>
             <a:endParaRPr lang="en-US"/>
           </a:p>
@@ -2299,7 +2297,7 @@
             <a:fld id="{B6F15528-21DE-4FAA-801E-634DDDAF4B2B}" type="slidenum">
               <a:rPr lang="en-US" smtClean="0"/>
               <a:pPr/>
-              <a:t>‹#›</a:t>
+              <a:t>‹Nº›</a:t>
             </a:fld>
             <a:endParaRPr lang="en-US"/>
           </a:p>
@@ -2355,10 +2353,9 @@
           </a:lstStyle>
           <a:p>
             <a:r>
-              <a:rPr lang="en-US" smtClean="0"/>
+              <a:rPr lang="en-US"/>
               <a:t>Click to edit Master title style</a:t>
             </a:r>
-            <a:endParaRPr lang="en-US"/>
           </a:p>
         </p:txBody>
       </p:sp>
@@ -2482,7 +2479,7 @@
           <a:p>
             <a:pPr lvl="0"/>
             <a:r>
-              <a:rPr lang="en-US" smtClean="0"/>
+              <a:rPr lang="en-US"/>
               <a:t>Click to edit Master text styles</a:t>
             </a:r>
           </a:p>
@@ -2506,7 +2503,7 @@
             <a:fld id="{1D8BD707-D9CF-40AE-B4C6-C98DA3205C09}" type="datetimeFigureOut">
               <a:rPr lang="en-US" smtClean="0"/>
               <a:pPr/>
-              <a:t>8/1/2011</a:t>
+              <a:t>6/5/2026</a:t>
             </a:fld>
             <a:endParaRPr lang="en-US"/>
           </a:p>
@@ -2549,7 +2546,7 @@
             <a:fld id="{B6F15528-21DE-4FAA-801E-634DDDAF4B2B}" type="slidenum">
               <a:rPr lang="en-US" smtClean="0"/>
               <a:pPr/>
-              <a:t>‹#›</a:t>
+              <a:t>‹Nº›</a:t>
             </a:fld>
             <a:endParaRPr lang="en-US"/>
           </a:p>
@@ -2611,10 +2608,9 @@
           <a:lstStyle/>
           <a:p>
             <a:r>
-              <a:rPr lang="en-US" smtClean="0"/>
+              <a:rPr lang="en-US"/>
               <a:t>Click to edit Master title style</a:t>
             </a:r>
-            <a:endParaRPr lang="en-US"/>
           </a:p>
         </p:txBody>
       </p:sp>
@@ -2645,38 +2641,37 @@
           <a:p>
             <a:pPr lvl="0"/>
             <a:r>
-              <a:rPr lang="en-US" smtClean="0"/>
+              <a:rPr lang="en-US"/>
               <a:t>Click to edit Master text styles</a:t>
             </a:r>
           </a:p>
           <a:p>
             <a:pPr lvl="1"/>
             <a:r>
-              <a:rPr lang="en-US" smtClean="0"/>
+              <a:rPr lang="en-US"/>
               <a:t>Second level</a:t>
             </a:r>
           </a:p>
           <a:p>
             <a:pPr lvl="2"/>
             <a:r>
-              <a:rPr lang="en-US" smtClean="0"/>
+              <a:rPr lang="en-US"/>
               <a:t>Third level</a:t>
             </a:r>
           </a:p>
           <a:p>
             <a:pPr lvl="3"/>
             <a:r>
-              <a:rPr lang="en-US" smtClean="0"/>
+              <a:rPr lang="en-US"/>
               <a:t>Fourth level</a:t>
             </a:r>
           </a:p>
           <a:p>
             <a:pPr lvl="4"/>
             <a:r>
-              <a:rPr lang="en-US" smtClean="0"/>
+              <a:rPr lang="en-US"/>
               <a:t>Fifth level</a:t>
             </a:r>
-            <a:endParaRPr lang="en-US"/>
           </a:p>
         </p:txBody>
       </p:sp>
@@ -2716,7 +2711,7 @@
             <a:fld id="{1D8BD707-D9CF-40AE-B4C6-C98DA3205C09}" type="datetimeFigureOut">
               <a:rPr lang="en-US" smtClean="0"/>
               <a:pPr/>
-              <a:t>8/1/2011</a:t>
+              <a:t>6/5/2026</a:t>
             </a:fld>
             <a:endParaRPr lang="en-US"/>
           </a:p>
@@ -2795,7 +2790,7 @@
             <a:fld id="{B6F15528-21DE-4FAA-801E-634DDDAF4B2B}" type="slidenum">
               <a:rPr lang="en-US" smtClean="0"/>
               <a:pPr/>
-              <a:t>‹#›</a:t>
+              <a:t>‹Nº›</a:t>
             </a:fld>
             <a:endParaRPr lang="en-US"/>
           </a:p>
@@ -3071,7 +3066,7 @@
 </file>
 
 <file path=ppt/slides/slide1.xml><?xml version="1.0" encoding="utf-8"?>
-<p:sld xmlns:p="http://schemas.openxmlformats.org/presentationml/2006/main" xmlns:a="http://schemas.openxmlformats.org/drawingml/2006/main" xmlns:r="http://schemas.openxmlformats.org/officeDocument/2006/relationships">
+<p:sld xmlns:a="http://schemas.openxmlformats.org/drawingml/2006/main" xmlns:r="http://schemas.openxmlformats.org/officeDocument/2006/relationships" xmlns:p="http://schemas.openxmlformats.org/presentationml/2006/main">
   <p:cSld>
     <p:spTree>
       <p:nvGrpSpPr>
@@ -3089,12 +3084,12 @@
       </p:grpSpPr>
       <p:sp>
         <p:nvSpPr>
-          <p:cNvPr name="Freeform 2" id="2"/>
+          <p:cNvPr id="2" name="Freeform 2"/>
           <p:cNvSpPr/>
           <p:nvPr/>
         </p:nvSpPr>
         <p:spPr>
-          <a:xfrm flipH="false" flipV="false" rot="0">
+          <a:xfrm>
             <a:off x="0" y="0"/>
             <a:ext cx="18288000" cy="10287000"/>
           </a:xfrm>
@@ -3103,9 +3098,9 @@
             <a:gdLst/>
             <a:ahLst/>
             <a:cxnLst/>
-            <a:rect r="r" b="b" t="t" l="l"/>
+            <a:rect l="l" t="t" r="r" b="b"/>
             <a:pathLst>
-              <a:path h="10287000" w="18288000">
+              <a:path w="18288000" h="10287000">
                 <a:moveTo>
                   <a:pt x="0" y="0"/>
                 </a:moveTo>
@@ -3128,19 +3123,19 @@
           <a:blipFill>
             <a:blip r:embed="rId2"/>
             <a:stretch>
-              <a:fillRect l="0" t="0" r="0" b="0"/>
+              <a:fillRect/>
             </a:stretch>
           </a:blipFill>
         </p:spPr>
       </p:sp>
       <p:sp>
         <p:nvSpPr>
-          <p:cNvPr name="Freeform 3" id="3"/>
+          <p:cNvPr id="3" name="Freeform 3"/>
           <p:cNvSpPr/>
           <p:nvPr/>
         </p:nvSpPr>
         <p:spPr>
-          <a:xfrm flipH="false" flipV="false" rot="0">
+          <a:xfrm>
             <a:off x="12492872" y="591028"/>
             <a:ext cx="4552472" cy="4552472"/>
           </a:xfrm>
@@ -3149,9 +3144,9 @@
             <a:gdLst/>
             <a:ahLst/>
             <a:cxnLst/>
-            <a:rect r="r" b="b" t="t" l="l"/>
+            <a:rect l="l" t="t" r="r" b="b"/>
             <a:pathLst>
-              <a:path h="4552472" w="4552472">
+              <a:path w="4552472" h="4552472">
                 <a:moveTo>
                   <a:pt x="0" y="0"/>
                 </a:moveTo>
@@ -3174,19 +3169,19 @@
           <a:blipFill>
             <a:blip r:embed="rId3"/>
             <a:stretch>
-              <a:fillRect l="0" t="0" r="0" b="0"/>
+              <a:fillRect/>
             </a:stretch>
           </a:blipFill>
         </p:spPr>
       </p:sp>
       <p:sp>
         <p:nvSpPr>
-          <p:cNvPr name="Freeform 4" id="4"/>
+          <p:cNvPr id="4" name="Freeform 4"/>
           <p:cNvSpPr/>
           <p:nvPr/>
         </p:nvSpPr>
         <p:spPr>
-          <a:xfrm flipH="false" flipV="false" rot="0">
+          <a:xfrm>
             <a:off x="10698210" y="5625938"/>
             <a:ext cx="4453876" cy="4453876"/>
           </a:xfrm>
@@ -3195,9 +3190,9 @@
             <a:gdLst/>
             <a:ahLst/>
             <a:cxnLst/>
-            <a:rect r="r" b="b" t="t" l="l"/>
+            <a:rect l="l" t="t" r="r" b="b"/>
             <a:pathLst>
-              <a:path h="4453876" w="4453876">
+              <a:path w="4453876" h="4453876">
                 <a:moveTo>
                   <a:pt x="0" y="0"/>
                 </a:moveTo>
@@ -3220,19 +3215,19 @@
           <a:blipFill>
             <a:blip r:embed="rId4"/>
             <a:stretch>
-              <a:fillRect l="0" t="0" r="0" b="0"/>
+              <a:fillRect/>
             </a:stretch>
           </a:blipFill>
         </p:spPr>
       </p:sp>
       <p:sp>
         <p:nvSpPr>
-          <p:cNvPr name="TextBox 5" id="5"/>
-          <p:cNvSpPr txBox="true"/>
+          <p:cNvPr id="5" name="TextBox 5"/>
+          <p:cNvSpPr txBox="1"/>
           <p:nvPr/>
         </p:nvSpPr>
         <p:spPr>
-          <a:xfrm rot="0">
+          <a:xfrm>
             <a:off x="897376" y="469470"/>
             <a:ext cx="10436845" cy="3951719"/>
           </a:xfrm>
@@ -3241,7 +3236,7 @@
           </a:prstGeom>
         </p:spPr>
         <p:txBody>
-          <a:bodyPr anchor="t" rtlCol="false" tIns="0" lIns="0" bIns="0" rIns="0">
+          <a:bodyPr lIns="0" tIns="0" rIns="0" bIns="0" rtlCol="0" anchor="t">
             <a:spAutoFit/>
           </a:bodyPr>
           <a:lstStyle/>
@@ -3252,7 +3247,7 @@
               </a:lnSpc>
             </a:pPr>
             <a:r>
-              <a:rPr lang="en-US" sz="7601" b="true">
+              <a:rPr lang="en-US" sz="7601" b="1">
                 <a:solidFill>
                   <a:srgbClr val="38B6FF"/>
                 </a:solidFill>
@@ -3268,12 +3263,12 @@
       </p:sp>
       <p:sp>
         <p:nvSpPr>
-          <p:cNvPr name="TextBox 6" id="6"/>
-          <p:cNvSpPr txBox="true"/>
+          <p:cNvPr id="6" name="TextBox 6"/>
+          <p:cNvSpPr txBox="1"/>
           <p:nvPr/>
         </p:nvSpPr>
         <p:spPr>
-          <a:xfrm rot="0">
+          <a:xfrm>
             <a:off x="897376" y="4458613"/>
             <a:ext cx="9648899" cy="2851772"/>
           </a:xfrm>
@@ -3282,7 +3277,7 @@
           </a:prstGeom>
         </p:spPr>
         <p:txBody>
-          <a:bodyPr anchor="t" rtlCol="false" tIns="0" lIns="0" bIns="0" rIns="0">
+          <a:bodyPr lIns="0" tIns="0" rIns="0" bIns="0" rtlCol="0" anchor="t">
             <a:spAutoFit/>
           </a:bodyPr>
           <a:lstStyle/>
@@ -3309,12 +3304,12 @@
       </p:sp>
       <p:sp>
         <p:nvSpPr>
-          <p:cNvPr name="TextBox 7" id="7"/>
-          <p:cNvSpPr txBox="true"/>
+          <p:cNvPr id="7" name="TextBox 7"/>
+          <p:cNvSpPr txBox="1"/>
           <p:nvPr/>
         </p:nvSpPr>
         <p:spPr>
-          <a:xfrm rot="0">
+          <a:xfrm>
             <a:off x="897376" y="7700476"/>
             <a:ext cx="9977210" cy="1273288"/>
           </a:xfrm>
@@ -3323,7 +3318,7 @@
           </a:prstGeom>
         </p:spPr>
         <p:txBody>
-          <a:bodyPr anchor="t" rtlCol="false" tIns="0" lIns="0" bIns="0" rIns="0">
+          <a:bodyPr lIns="0" tIns="0" rIns="0" bIns="0" rtlCol="0" anchor="t">
             <a:spAutoFit/>
           </a:bodyPr>
           <a:lstStyle/>
@@ -3334,7 +3329,7 @@
               </a:lnSpc>
             </a:pPr>
             <a:r>
-              <a:rPr lang="en-US" sz="3601" b="true">
+              <a:rPr lang="en-US" sz="3601" b="1">
                 <a:solidFill>
                   <a:srgbClr val="90C4D9"/>
                 </a:solidFill>
@@ -3350,12 +3345,12 @@
       </p:sp>
       <p:sp>
         <p:nvSpPr>
-          <p:cNvPr name="TextBox 8" id="8"/>
-          <p:cNvSpPr txBox="true"/>
+          <p:cNvPr id="8" name="TextBox 8"/>
+          <p:cNvSpPr txBox="1"/>
           <p:nvPr/>
         </p:nvSpPr>
         <p:spPr>
-          <a:xfrm rot="0">
+          <a:xfrm>
             <a:off x="897376" y="9192839"/>
             <a:ext cx="6276760" cy="485761"/>
           </a:xfrm>
@@ -3364,7 +3359,7 @@
           </a:prstGeom>
         </p:spPr>
         <p:txBody>
-          <a:bodyPr anchor="t" rtlCol="false" tIns="0" lIns="0" bIns="0" rIns="0">
+          <a:bodyPr lIns="0" tIns="0" rIns="0" bIns="0" rtlCol="0" anchor="t">
             <a:spAutoFit/>
           </a:bodyPr>
           <a:lstStyle/>
@@ -3375,7 +3370,7 @@
               </a:lnSpc>
             </a:pPr>
             <a:r>
-              <a:rPr lang="en-US" sz="2501" b="true">
+              <a:rPr lang="en-US" sz="2501" b="1">
                 <a:solidFill>
                   <a:srgbClr val="D7BE28"/>
                 </a:solidFill>
@@ -3398,7 +3393,7 @@
 </file>
 
 <file path=ppt/slides/slide10.xml><?xml version="1.0" encoding="utf-8"?>
-<p:sld xmlns:p="http://schemas.openxmlformats.org/presentationml/2006/main" xmlns:a="http://schemas.openxmlformats.org/drawingml/2006/main" xmlns:r="http://schemas.openxmlformats.org/officeDocument/2006/relationships">
+<p:sld xmlns:a="http://schemas.openxmlformats.org/drawingml/2006/main" xmlns:r="http://schemas.openxmlformats.org/officeDocument/2006/relationships" xmlns:p="http://schemas.openxmlformats.org/presentationml/2006/main">
   <p:cSld>
     <p:spTree>
       <p:nvGrpSpPr>
@@ -3416,12 +3411,12 @@
       </p:grpSpPr>
       <p:sp>
         <p:nvSpPr>
-          <p:cNvPr name="Freeform 2" id="2"/>
+          <p:cNvPr id="2" name="Freeform 2"/>
           <p:cNvSpPr/>
           <p:nvPr/>
         </p:nvSpPr>
         <p:spPr>
-          <a:xfrm flipH="false" flipV="false" rot="0">
+          <a:xfrm>
             <a:off x="0" y="0"/>
             <a:ext cx="18288000" cy="10287000"/>
           </a:xfrm>
@@ -3430,9 +3425,9 @@
             <a:gdLst/>
             <a:ahLst/>
             <a:cxnLst/>
-            <a:rect r="r" b="b" t="t" l="l"/>
+            <a:rect l="l" t="t" r="r" b="b"/>
             <a:pathLst>
-              <a:path h="10287000" w="18288000">
+              <a:path w="18288000" h="10287000">
                 <a:moveTo>
                   <a:pt x="0" y="0"/>
                 </a:moveTo>
@@ -3455,19 +3450,19 @@
           <a:blipFill>
             <a:blip r:embed="rId2"/>
             <a:stretch>
-              <a:fillRect l="0" t="0" r="0" b="0"/>
+              <a:fillRect/>
             </a:stretch>
           </a:blipFill>
         </p:spPr>
       </p:sp>
       <p:sp>
         <p:nvSpPr>
-          <p:cNvPr name="Freeform 3" id="3"/>
+          <p:cNvPr id="3" name="Freeform 3"/>
           <p:cNvSpPr/>
           <p:nvPr/>
         </p:nvSpPr>
         <p:spPr>
-          <a:xfrm flipH="false" flipV="false" rot="0">
+          <a:xfrm>
             <a:off x="3208835" y="3579417"/>
             <a:ext cx="11301259" cy="5678883"/>
           </a:xfrm>
@@ -3476,9 +3471,9 @@
             <a:gdLst/>
             <a:ahLst/>
             <a:cxnLst/>
-            <a:rect r="r" b="b" t="t" l="l"/>
+            <a:rect l="l" t="t" r="r" b="b"/>
             <a:pathLst>
-              <a:path h="5678883" w="11301259">
+              <a:path w="11301259" h="5678883">
                 <a:moveTo>
                   <a:pt x="0" y="0"/>
                 </a:moveTo>
@@ -3501,19 +3496,19 @@
           <a:blipFill>
             <a:blip r:embed="rId3"/>
             <a:stretch>
-              <a:fillRect l="0" t="0" r="0" b="0"/>
+              <a:fillRect/>
             </a:stretch>
           </a:blipFill>
         </p:spPr>
       </p:sp>
       <p:sp>
         <p:nvSpPr>
-          <p:cNvPr name="TextBox 4" id="4"/>
-          <p:cNvSpPr txBox="true"/>
+          <p:cNvPr id="4" name="TextBox 4"/>
+          <p:cNvSpPr txBox="1"/>
           <p:nvPr/>
         </p:nvSpPr>
         <p:spPr>
-          <a:xfrm rot="0">
+          <a:xfrm>
             <a:off x="1028700" y="170844"/>
             <a:ext cx="16230600" cy="2787393"/>
           </a:xfrm>
@@ -3522,7 +3517,7 @@
           </a:prstGeom>
         </p:spPr>
         <p:txBody>
-          <a:bodyPr anchor="t" rtlCol="false" tIns="0" lIns="0" bIns="0" rIns="0">
+          <a:bodyPr lIns="0" tIns="0" rIns="0" bIns="0" rtlCol="0" anchor="t">
             <a:spAutoFit/>
           </a:bodyPr>
           <a:lstStyle/>
@@ -3533,7 +3528,7 @@
               </a:lnSpc>
             </a:pPr>
             <a:r>
-              <a:rPr lang="en-US" b="true" sz="7800">
+              <a:rPr lang="en-US" sz="7800" b="1">
                 <a:solidFill>
                   <a:srgbClr val="38B6FF"/>
                 </a:solidFill>
@@ -3556,7 +3551,7 @@
 </file>
 
 <file path=ppt/slides/slide11.xml><?xml version="1.0" encoding="utf-8"?>
-<p:sld xmlns:p="http://schemas.openxmlformats.org/presentationml/2006/main" xmlns:a="http://schemas.openxmlformats.org/drawingml/2006/main" xmlns:r="http://schemas.openxmlformats.org/officeDocument/2006/relationships">
+<p:sld xmlns:a="http://schemas.openxmlformats.org/drawingml/2006/main" xmlns:r="http://schemas.openxmlformats.org/officeDocument/2006/relationships" xmlns:p="http://schemas.openxmlformats.org/presentationml/2006/main">
   <p:cSld>
     <p:spTree>
       <p:nvGrpSpPr>
@@ -3574,12 +3569,12 @@
       </p:grpSpPr>
       <p:sp>
         <p:nvSpPr>
-          <p:cNvPr name="Freeform 2" id="2"/>
+          <p:cNvPr id="2" name="Freeform 2"/>
           <p:cNvSpPr/>
           <p:nvPr/>
         </p:nvSpPr>
         <p:spPr>
-          <a:xfrm flipH="false" flipV="false" rot="0">
+          <a:xfrm>
             <a:off x="0" y="0"/>
             <a:ext cx="18288000" cy="10287000"/>
           </a:xfrm>
@@ -3588,9 +3583,9 @@
             <a:gdLst/>
             <a:ahLst/>
             <a:cxnLst/>
-            <a:rect r="r" b="b" t="t" l="l"/>
+            <a:rect l="l" t="t" r="r" b="b"/>
             <a:pathLst>
-              <a:path h="10287000" w="18288000">
+              <a:path w="18288000" h="10287000">
                 <a:moveTo>
                   <a:pt x="0" y="0"/>
                 </a:moveTo>
@@ -3613,19 +3608,19 @@
           <a:blipFill>
             <a:blip r:embed="rId2"/>
             <a:stretch>
-              <a:fillRect l="0" t="0" r="0" b="0"/>
+              <a:fillRect/>
             </a:stretch>
           </a:blipFill>
         </p:spPr>
       </p:sp>
       <p:sp>
         <p:nvSpPr>
-          <p:cNvPr name="Freeform 3" id="3"/>
+          <p:cNvPr id="3" name="Freeform 3"/>
           <p:cNvSpPr/>
           <p:nvPr/>
         </p:nvSpPr>
         <p:spPr>
-          <a:xfrm flipH="false" flipV="false" rot="0">
+          <a:xfrm>
             <a:off x="1028700" y="7718996"/>
             <a:ext cx="16230600" cy="1521619"/>
           </a:xfrm>
@@ -3634,9 +3629,9 @@
             <a:gdLst/>
             <a:ahLst/>
             <a:cxnLst/>
-            <a:rect r="r" b="b" t="t" l="l"/>
+            <a:rect l="l" t="t" r="r" b="b"/>
             <a:pathLst>
-              <a:path h="1521619" w="16230600">
+              <a:path w="16230600" h="1521619">
                 <a:moveTo>
                   <a:pt x="0" y="0"/>
                 </a:moveTo>
@@ -3659,19 +3654,19 @@
           <a:blipFill>
             <a:blip r:embed="rId3"/>
             <a:stretch>
-              <a:fillRect l="0" t="0" r="0" b="0"/>
+              <a:fillRect/>
             </a:stretch>
           </a:blipFill>
         </p:spPr>
       </p:sp>
       <p:sp>
         <p:nvSpPr>
-          <p:cNvPr name="Freeform 4" id="4"/>
+          <p:cNvPr id="4" name="Freeform 4"/>
           <p:cNvSpPr/>
           <p:nvPr/>
         </p:nvSpPr>
         <p:spPr>
-          <a:xfrm flipH="false" flipV="false" rot="0">
+          <a:xfrm>
             <a:off x="1188642" y="2308267"/>
             <a:ext cx="2068152" cy="2068152"/>
           </a:xfrm>
@@ -3680,9 +3675,9 @@
             <a:gdLst/>
             <a:ahLst/>
             <a:cxnLst/>
-            <a:rect r="r" b="b" t="t" l="l"/>
+            <a:rect l="l" t="t" r="r" b="b"/>
             <a:pathLst>
-              <a:path h="2068152" w="2068152">
+              <a:path w="2068152" h="2068152">
                 <a:moveTo>
                   <a:pt x="0" y="0"/>
                 </a:moveTo>
@@ -3705,19 +3700,19 @@
           <a:blipFill>
             <a:blip r:embed="rId4"/>
             <a:stretch>
-              <a:fillRect l="0" t="0" r="0" b="0"/>
+              <a:fillRect/>
             </a:stretch>
           </a:blipFill>
         </p:spPr>
       </p:sp>
       <p:sp>
         <p:nvSpPr>
-          <p:cNvPr name="Freeform 5" id="5"/>
+          <p:cNvPr id="5" name="Freeform 5"/>
           <p:cNvSpPr/>
           <p:nvPr/>
         </p:nvSpPr>
         <p:spPr>
-          <a:xfrm flipH="false" flipV="false" rot="0">
+          <a:xfrm>
             <a:off x="11895564" y="2522698"/>
             <a:ext cx="5203794" cy="1639290"/>
           </a:xfrm>
@@ -3726,9 +3721,9 @@
             <a:gdLst/>
             <a:ahLst/>
             <a:cxnLst/>
-            <a:rect r="r" b="b" t="t" l="l"/>
+            <a:rect l="l" t="t" r="r" b="b"/>
             <a:pathLst>
-              <a:path h="1639290" w="5203794">
+              <a:path w="5203794" h="1639290">
                 <a:moveTo>
                   <a:pt x="0" y="0"/>
                 </a:moveTo>
@@ -3751,19 +3746,19 @@
           <a:blipFill>
             <a:blip r:embed="rId5"/>
             <a:stretch>
-              <a:fillRect l="0" t="0" r="0" b="0"/>
+              <a:fillRect/>
             </a:stretch>
           </a:blipFill>
         </p:spPr>
       </p:sp>
       <p:grpSp>
         <p:nvGrpSpPr>
-          <p:cNvPr name="Group 6" id="6"/>
+          <p:cNvPr id="6" name="Group 6"/>
           <p:cNvGrpSpPr/>
           <p:nvPr/>
         </p:nvGrpSpPr>
         <p:grpSpPr>
-          <a:xfrm rot="0">
+          <a:xfrm>
             <a:off x="4068918" y="2330296"/>
             <a:ext cx="2046123" cy="2046123"/>
             <a:chOff x="0" y="0"/>
@@ -3772,12 +3767,12 @@
         </p:grpSpPr>
         <p:sp>
           <p:nvSpPr>
-            <p:cNvPr name="Freeform 7" id="7"/>
+            <p:cNvPr id="7" name="Freeform 7"/>
             <p:cNvSpPr/>
             <p:nvPr/>
           </p:nvSpPr>
           <p:spPr>
-            <a:xfrm flipH="false" flipV="false" rot="0">
+            <a:xfrm>
               <a:off x="0" y="0"/>
               <a:ext cx="812800" cy="812800"/>
             </a:xfrm>
@@ -3786,9 +3781,9 @@
               <a:gdLst/>
               <a:ahLst/>
               <a:cxnLst/>
-              <a:rect r="r" b="b" t="t" l="l"/>
+              <a:rect l="l" t="t" r="r" b="b"/>
               <a:pathLst>
-                <a:path h="812800" w="812800">
+                <a:path w="812800" h="812800">
                   <a:moveTo>
                     <a:pt x="812800" y="406400"/>
                   </a:moveTo>
@@ -3824,8 +3819,8 @@
         </p:sp>
         <p:sp>
           <p:nvSpPr>
-            <p:cNvPr name="TextBox 8" id="8"/>
-            <p:cNvSpPr txBox="true"/>
+            <p:cNvPr id="8" name="TextBox 8"/>
+            <p:cNvSpPr txBox="1"/>
             <p:nvPr/>
           </p:nvSpPr>
           <p:spPr>
@@ -3838,7 +3833,7 @@
             </a:prstGeom>
           </p:spPr>
           <p:txBody>
-            <a:bodyPr anchor="ctr" rtlCol="false" tIns="50800" lIns="50800" bIns="50800" rIns="50800"/>
+            <a:bodyPr lIns="50800" tIns="50800" rIns="50800" bIns="50800" rtlCol="0" anchor="ctr"/>
             <a:lstStyle/>
             <a:p>
               <a:pPr algn="ctr">
@@ -3846,18 +3841,19 @@
                   <a:spcPts val="2659"/>
                 </a:lnSpc>
               </a:pPr>
+              <a:endParaRPr/>
             </a:p>
           </p:txBody>
         </p:sp>
       </p:grpSp>
       <p:grpSp>
         <p:nvGrpSpPr>
-          <p:cNvPr name="Group 9" id="9"/>
+          <p:cNvPr id="9" name="Group 9"/>
           <p:cNvGrpSpPr/>
           <p:nvPr/>
         </p:nvGrpSpPr>
         <p:grpSpPr>
-          <a:xfrm rot="0">
+          <a:xfrm>
             <a:off x="9466689" y="2308267"/>
             <a:ext cx="2046123" cy="2046123"/>
             <a:chOff x="0" y="0"/>
@@ -3866,12 +3862,12 @@
         </p:grpSpPr>
         <p:sp>
           <p:nvSpPr>
-            <p:cNvPr name="Freeform 10" id="10"/>
+            <p:cNvPr id="10" name="Freeform 10"/>
             <p:cNvSpPr/>
             <p:nvPr/>
           </p:nvSpPr>
           <p:spPr>
-            <a:xfrm flipH="false" flipV="false" rot="0">
+            <a:xfrm>
               <a:off x="0" y="0"/>
               <a:ext cx="812800" cy="812800"/>
             </a:xfrm>
@@ -3880,9 +3876,9 @@
               <a:gdLst/>
               <a:ahLst/>
               <a:cxnLst/>
-              <a:rect r="r" b="b" t="t" l="l"/>
+              <a:rect l="l" t="t" r="r" b="b"/>
               <a:pathLst>
-                <a:path h="812800" w="812800">
+                <a:path w="812800" h="812800">
                   <a:moveTo>
                     <a:pt x="812800" y="406400"/>
                   </a:moveTo>
@@ -3918,8 +3914,8 @@
         </p:sp>
         <p:sp>
           <p:nvSpPr>
-            <p:cNvPr name="TextBox 11" id="11"/>
-            <p:cNvSpPr txBox="true"/>
+            <p:cNvPr id="11" name="TextBox 11"/>
+            <p:cNvSpPr txBox="1"/>
             <p:nvPr/>
           </p:nvSpPr>
           <p:spPr>
@@ -3932,7 +3928,7 @@
             </a:prstGeom>
           </p:spPr>
           <p:txBody>
-            <a:bodyPr anchor="ctr" rtlCol="false" tIns="50800" lIns="50800" bIns="50800" rIns="50800"/>
+            <a:bodyPr lIns="50800" tIns="50800" rIns="50800" bIns="50800" rtlCol="0" anchor="ctr"/>
             <a:lstStyle/>
             <a:p>
               <a:pPr algn="ctr">
@@ -3940,18 +3936,19 @@
                   <a:spcPts val="2659"/>
                 </a:lnSpc>
               </a:pPr>
+              <a:endParaRPr/>
             </a:p>
           </p:txBody>
         </p:sp>
       </p:grpSp>
       <p:sp>
         <p:nvSpPr>
-          <p:cNvPr name="Freeform 12" id="12"/>
+          <p:cNvPr id="12" name="Freeform 12"/>
           <p:cNvSpPr/>
           <p:nvPr/>
         </p:nvSpPr>
         <p:spPr>
-          <a:xfrm flipH="false" flipV="false" rot="0">
+          <a:xfrm>
             <a:off x="6764851" y="2407251"/>
             <a:ext cx="1892213" cy="1892213"/>
           </a:xfrm>
@@ -3960,9 +3957,9 @@
             <a:gdLst/>
             <a:ahLst/>
             <a:cxnLst/>
-            <a:rect r="r" b="b" t="t" l="l"/>
+            <a:rect l="l" t="t" r="r" b="b"/>
             <a:pathLst>
-              <a:path h="1892213" w="1892213">
+              <a:path w="1892213" h="1892213">
                 <a:moveTo>
                   <a:pt x="0" y="0"/>
                 </a:moveTo>
@@ -3985,19 +3982,19 @@
           <a:blipFill>
             <a:blip r:embed="rId6"/>
             <a:stretch>
-              <a:fillRect l="0" t="0" r="0" b="0"/>
+              <a:fillRect/>
             </a:stretch>
           </a:blipFill>
         </p:spPr>
       </p:sp>
       <p:sp>
         <p:nvSpPr>
-          <p:cNvPr name="TextBox 13" id="13"/>
-          <p:cNvSpPr txBox="true"/>
+          <p:cNvPr id="13" name="TextBox 13"/>
+          <p:cNvSpPr txBox="1"/>
           <p:nvPr/>
         </p:nvSpPr>
         <p:spPr>
-          <a:xfrm rot="0">
+          <a:xfrm>
             <a:off x="1028700" y="462262"/>
             <a:ext cx="16230600" cy="1511043"/>
           </a:xfrm>
@@ -4006,7 +4003,7 @@
           </a:prstGeom>
         </p:spPr>
         <p:txBody>
-          <a:bodyPr anchor="t" rtlCol="false" tIns="0" lIns="0" bIns="0" rIns="0">
+          <a:bodyPr lIns="0" tIns="0" rIns="0" bIns="0" rtlCol="0" anchor="t">
             <a:spAutoFit/>
           </a:bodyPr>
           <a:lstStyle/>
@@ -4017,7 +4014,7 @@
               </a:lnSpc>
             </a:pPr>
             <a:r>
-              <a:rPr lang="en-US" b="true" sz="7800">
+              <a:rPr lang="en-US" sz="7800" b="1">
                 <a:solidFill>
                   <a:srgbClr val="38B6FF"/>
                 </a:solidFill>
@@ -4033,12 +4030,12 @@
       </p:sp>
       <p:sp>
         <p:nvSpPr>
-          <p:cNvPr name="TextBox 14" id="14"/>
-          <p:cNvSpPr txBox="true"/>
+          <p:cNvPr id="14" name="TextBox 14"/>
+          <p:cNvSpPr txBox="1"/>
           <p:nvPr/>
         </p:nvSpPr>
         <p:spPr>
-          <a:xfrm rot="0">
+          <a:xfrm>
             <a:off x="871563" y="4606607"/>
             <a:ext cx="16160760" cy="2702814"/>
           </a:xfrm>
@@ -4047,12 +4044,12 @@
           </a:prstGeom>
         </p:spPr>
         <p:txBody>
-          <a:bodyPr anchor="t" rtlCol="false" tIns="0" lIns="0" bIns="0" rIns="0">
+          <a:bodyPr lIns="0" tIns="0" rIns="0" bIns="0" rtlCol="0" anchor="t">
             <a:spAutoFit/>
           </a:bodyPr>
           <a:lstStyle/>
           <a:p>
-            <a:pPr algn="l" marL="582927" indent="-291463" lvl="1">
+            <a:pPr marL="582927" lvl="1" indent="-291463" algn="l">
               <a:lnSpc>
                 <a:spcPts val="3482"/>
               </a:lnSpc>
@@ -4060,7 +4057,7 @@
               <a:buChar char="•"/>
             </a:pPr>
             <a:r>
-              <a:rPr lang="en-US" b="true" sz="2699">
+              <a:rPr lang="en-US" sz="2699" b="1">
                 <a:solidFill>
                   <a:srgbClr val="FFFFFF"/>
                 </a:solidFill>
@@ -4069,23 +4066,11 @@
                 <a:cs typeface="29LT Bukra Semi-Bold"/>
                 <a:sym typeface="29LT Bukra Semi-Bold"/>
               </a:rPr>
-              <a:t>Í</a:t>
-            </a:r>
-            <a:r>
-              <a:rPr lang="en-US" b="true" sz="2699">
-                <a:solidFill>
-                  <a:srgbClr val="FFFFFF"/>
-                </a:solidFill>
-                <a:latin typeface="29LT Bukra Semi-Bold"/>
-                <a:ea typeface="29LT Bukra Semi-Bold"/>
-                <a:cs typeface="29LT Bukra Semi-Bold"/>
-                <a:sym typeface="29LT Bukra Semi-Bold"/>
-              </a:rPr>
-              <a:t>ndices Non-Clustered: Aplicados en columnas de alta demanda para acelerar búsquedas. </a:t>
-            </a:r>
-          </a:p>
-          <a:p>
-            <a:pPr algn="l" marL="582927" indent="-291463" lvl="1">
+              <a:t>Índices Non-Clustered: Aplicados en columnas de alta demanda para acelerar búsquedas. </a:t>
+            </a:r>
+          </a:p>
+          <a:p>
+            <a:pPr marL="582927" lvl="1" indent="-291463" algn="l">
               <a:lnSpc>
                 <a:spcPts val="3482"/>
               </a:lnSpc>
@@ -4093,7 +4078,7 @@
               <a:buChar char="•"/>
             </a:pPr>
             <a:r>
-              <a:rPr lang="en-US" b="true" sz="2699">
+              <a:rPr lang="en-US" sz="2699" b="1">
                 <a:solidFill>
                   <a:srgbClr val="FFFFFF"/>
                 </a:solidFill>
@@ -4106,7 +4091,7 @@
             </a:r>
           </a:p>
           <a:p>
-            <a:pPr algn="l" marL="582927" indent="-291463" lvl="1">
+            <a:pPr marL="582927" lvl="1" indent="-291463" algn="l">
               <a:lnSpc>
                 <a:spcPts val="3482"/>
               </a:lnSpc>
@@ -4114,7 +4099,7 @@
               <a:buChar char="•"/>
             </a:pPr>
             <a:r>
-              <a:rPr lang="en-US" b="true" sz="2699">
+              <a:rPr lang="en-US" sz="2699" b="1">
                 <a:solidFill>
                   <a:srgbClr val="FFFFFF"/>
                 </a:solidFill>
@@ -4137,7 +4122,7 @@
 </file>
 
 <file path=ppt/slides/slide12.xml><?xml version="1.0" encoding="utf-8"?>
-<p:sld xmlns:p="http://schemas.openxmlformats.org/presentationml/2006/main" xmlns:a="http://schemas.openxmlformats.org/drawingml/2006/main" xmlns:r="http://schemas.openxmlformats.org/officeDocument/2006/relationships">
+<p:sld xmlns:a="http://schemas.openxmlformats.org/drawingml/2006/main" xmlns:r="http://schemas.openxmlformats.org/officeDocument/2006/relationships" xmlns:p="http://schemas.openxmlformats.org/presentationml/2006/main">
   <p:cSld>
     <p:spTree>
       <p:nvGrpSpPr>
@@ -4155,12 +4140,12 @@
       </p:grpSpPr>
       <p:sp>
         <p:nvSpPr>
-          <p:cNvPr name="Freeform 2" id="2"/>
+          <p:cNvPr id="2" name="Freeform 2"/>
           <p:cNvSpPr/>
           <p:nvPr/>
         </p:nvSpPr>
         <p:spPr>
-          <a:xfrm flipH="false" flipV="false" rot="0">
+          <a:xfrm>
             <a:off x="0" y="0"/>
             <a:ext cx="18288000" cy="10287000"/>
           </a:xfrm>
@@ -4169,9 +4154,9 @@
             <a:gdLst/>
             <a:ahLst/>
             <a:cxnLst/>
-            <a:rect r="r" b="b" t="t" l="l"/>
+            <a:rect l="l" t="t" r="r" b="b"/>
             <a:pathLst>
-              <a:path h="10287000" w="18288000">
+              <a:path w="18288000" h="10287000">
                 <a:moveTo>
                   <a:pt x="0" y="0"/>
                 </a:moveTo>
@@ -4194,19 +4179,19 @@
           <a:blipFill>
             <a:blip r:embed="rId2"/>
             <a:stretch>
-              <a:fillRect l="0" t="0" r="0" b="0"/>
+              <a:fillRect/>
             </a:stretch>
           </a:blipFill>
         </p:spPr>
       </p:sp>
       <p:sp>
         <p:nvSpPr>
-          <p:cNvPr name="Freeform 3" id="3"/>
+          <p:cNvPr id="3" name="Freeform 3"/>
           <p:cNvSpPr/>
           <p:nvPr/>
         </p:nvSpPr>
         <p:spPr>
-          <a:xfrm flipH="false" flipV="false" rot="0">
+          <a:xfrm>
             <a:off x="1319837" y="4371421"/>
             <a:ext cx="15648327" cy="2562413"/>
           </a:xfrm>
@@ -4215,9 +4200,9 @@
             <a:gdLst/>
             <a:ahLst/>
             <a:cxnLst/>
-            <a:rect r="r" b="b" t="t" l="l"/>
+            <a:rect l="l" t="t" r="r" b="b"/>
             <a:pathLst>
-              <a:path h="2562413" w="15648327">
+              <a:path w="15648327" h="2562413">
                 <a:moveTo>
                   <a:pt x="0" y="0"/>
                 </a:moveTo>
@@ -4240,19 +4225,19 @@
           <a:blipFill>
             <a:blip r:embed="rId3"/>
             <a:stretch>
-              <a:fillRect l="0" t="0" r="0" b="0"/>
+              <a:fillRect/>
             </a:stretch>
           </a:blipFill>
         </p:spPr>
       </p:sp>
       <p:sp>
         <p:nvSpPr>
-          <p:cNvPr name="Freeform 4" id="4"/>
+          <p:cNvPr id="4" name="Freeform 4"/>
           <p:cNvSpPr/>
           <p:nvPr/>
         </p:nvSpPr>
         <p:spPr>
-          <a:xfrm flipH="false" flipV="false" rot="0">
+          <a:xfrm>
             <a:off x="1319837" y="7376013"/>
             <a:ext cx="15648327" cy="2034282"/>
           </a:xfrm>
@@ -4261,9 +4246,9 @@
             <a:gdLst/>
             <a:ahLst/>
             <a:cxnLst/>
-            <a:rect r="r" b="b" t="t" l="l"/>
+            <a:rect l="l" t="t" r="r" b="b"/>
             <a:pathLst>
-              <a:path h="2034282" w="15648327">
+              <a:path w="15648327" h="2034282">
                 <a:moveTo>
                   <a:pt x="0" y="0"/>
                 </a:moveTo>
@@ -4286,19 +4271,19 @@
           <a:blipFill>
             <a:blip r:embed="rId4"/>
             <a:stretch>
-              <a:fillRect l="0" t="0" r="0" b="0"/>
+              <a:fillRect/>
             </a:stretch>
           </a:blipFill>
         </p:spPr>
       </p:sp>
       <p:sp>
         <p:nvSpPr>
-          <p:cNvPr name="Freeform 5" id="5"/>
+          <p:cNvPr id="5" name="Freeform 5"/>
           <p:cNvSpPr/>
           <p:nvPr/>
         </p:nvSpPr>
         <p:spPr>
-          <a:xfrm flipH="false" flipV="false" rot="0">
+          <a:xfrm>
             <a:off x="12619284" y="615307"/>
             <a:ext cx="3178479" cy="3178479"/>
           </a:xfrm>
@@ -4307,9 +4292,9 @@
             <a:gdLst/>
             <a:ahLst/>
             <a:cxnLst/>
-            <a:rect r="r" b="b" t="t" l="l"/>
+            <a:rect l="l" t="t" r="r" b="b"/>
             <a:pathLst>
-              <a:path h="3178479" w="3178479">
+              <a:path w="3178479" h="3178479">
                 <a:moveTo>
                   <a:pt x="0" y="0"/>
                 </a:moveTo>
@@ -4332,19 +4317,19 @@
           <a:blipFill>
             <a:blip r:embed="rId5"/>
             <a:stretch>
-              <a:fillRect l="0" t="0" r="0" b="0"/>
+              <a:fillRect/>
             </a:stretch>
           </a:blipFill>
         </p:spPr>
       </p:sp>
       <p:sp>
         <p:nvSpPr>
-          <p:cNvPr name="TextBox 6" id="6"/>
-          <p:cNvSpPr txBox="true"/>
+          <p:cNvPr id="6" name="TextBox 6"/>
+          <p:cNvSpPr txBox="1"/>
           <p:nvPr/>
         </p:nvSpPr>
         <p:spPr>
-          <a:xfrm rot="0">
+          <a:xfrm>
             <a:off x="1028700" y="10750"/>
             <a:ext cx="10933854" cy="4063743"/>
           </a:xfrm>
@@ -4353,7 +4338,7 @@
           </a:prstGeom>
         </p:spPr>
         <p:txBody>
-          <a:bodyPr anchor="t" rtlCol="false" tIns="0" lIns="0" bIns="0" rIns="0">
+          <a:bodyPr lIns="0" tIns="0" rIns="0" bIns="0" rtlCol="0" anchor="t">
             <a:spAutoFit/>
           </a:bodyPr>
           <a:lstStyle/>
@@ -4364,7 +4349,7 @@
               </a:lnSpc>
             </a:pPr>
             <a:r>
-              <a:rPr lang="en-US" sz="7800" b="true">
+              <a:rPr lang="en-US" sz="7800" b="1">
                 <a:solidFill>
                   <a:srgbClr val="38B6FF"/>
                 </a:solidFill>
@@ -4387,13 +4372,14 @@
 </file>
 
 <file path=ppt/slides/slide13.xml><?xml version="1.0" encoding="utf-8"?>
-<p:sld xmlns:p="http://schemas.openxmlformats.org/presentationml/2006/main" xmlns:a="http://schemas.openxmlformats.org/drawingml/2006/main" xmlns:r="http://schemas.openxmlformats.org/officeDocument/2006/relationships">
+<p:sld xmlns:a="http://schemas.openxmlformats.org/drawingml/2006/main" xmlns:r="http://schemas.openxmlformats.org/officeDocument/2006/relationships" xmlns:p="http://schemas.openxmlformats.org/presentationml/2006/main">
   <p:cSld>
     <p:bg>
       <p:bgPr>
         <a:solidFill>
           <a:srgbClr val="08283F"/>
         </a:solidFill>
+        <a:effectLst/>
       </p:bgPr>
     </p:bg>
     <p:spTree>
@@ -4412,58 +4398,12 @@
       </p:grpSpPr>
       <p:sp>
         <p:nvSpPr>
-          <p:cNvPr name="Freeform 2" id="2"/>
-          <p:cNvSpPr/>
+          <p:cNvPr id="3" name="TextBox 3"/>
+          <p:cNvSpPr txBox="1"/>
           <p:nvPr/>
         </p:nvSpPr>
         <p:spPr>
-          <a:xfrm flipH="false" flipV="false" rot="0">
-            <a:off x="3542136" y="1279140"/>
-            <a:ext cx="11203729" cy="8402797"/>
-          </a:xfrm>
-          <a:custGeom>
-            <a:avLst/>
-            <a:gdLst/>
-            <a:ahLst/>
-            <a:cxnLst/>
-            <a:rect r="r" b="b" t="t" l="l"/>
-            <a:pathLst>
-              <a:path h="8402797" w="11203729">
-                <a:moveTo>
-                  <a:pt x="0" y="0"/>
-                </a:moveTo>
-                <a:lnTo>
-                  <a:pt x="11203728" y="0"/>
-                </a:lnTo>
-                <a:lnTo>
-                  <a:pt x="11203728" y="8402797"/>
-                </a:lnTo>
-                <a:lnTo>
-                  <a:pt x="0" y="8402797"/>
-                </a:lnTo>
-                <a:lnTo>
-                  <a:pt x="0" y="0"/>
-                </a:lnTo>
-                <a:close/>
-              </a:path>
-            </a:pathLst>
-          </a:custGeom>
-          <a:blipFill>
-            <a:blip r:embed="rId2"/>
-            <a:stretch>
-              <a:fillRect l="0" t="0" r="0" b="0"/>
-            </a:stretch>
-          </a:blipFill>
-        </p:spPr>
-      </p:sp>
-      <p:sp>
-        <p:nvSpPr>
-          <p:cNvPr name="TextBox 3" id="3"/>
-          <p:cNvSpPr txBox="true"/>
-          <p:nvPr/>
-        </p:nvSpPr>
-        <p:spPr>
-          <a:xfrm rot="0">
+          <a:xfrm>
             <a:off x="1028700" y="37844"/>
             <a:ext cx="16230600" cy="1241296"/>
           </a:xfrm>
@@ -4472,7 +4412,7 @@
           </a:prstGeom>
         </p:spPr>
         <p:txBody>
-          <a:bodyPr anchor="t" rtlCol="false" tIns="0" lIns="0" bIns="0" rIns="0">
+          <a:bodyPr lIns="0" tIns="0" rIns="0" bIns="0" rtlCol="0" anchor="t">
             <a:spAutoFit/>
           </a:bodyPr>
           <a:lstStyle/>
@@ -4483,7 +4423,7 @@
               </a:lnSpc>
             </a:pPr>
             <a:r>
-              <a:rPr lang="en-US" b="true" sz="6400">
+              <a:rPr lang="en-US" sz="6400" b="1">
                 <a:solidFill>
                   <a:srgbClr val="38B6FF"/>
                 </a:solidFill>
@@ -4497,6 +4437,36 @@
           </a:p>
         </p:txBody>
       </p:sp>
+      <p:pic>
+        <p:nvPicPr>
+          <p:cNvPr id="5" name="Imagen 4">
+            <a:extLst>
+              <a:ext uri="{FF2B5EF4-FFF2-40B4-BE49-F238E27FC236}">
+                <a16:creationId xmlns:a16="http://schemas.microsoft.com/office/drawing/2014/main" id="{9A95D4A1-434E-0F89-CFC8-16ED2968D4E1}"/>
+              </a:ext>
+            </a:extLst>
+          </p:cNvPr>
+          <p:cNvPicPr>
+            <a:picLocks noChangeAspect="1"/>
+          </p:cNvPicPr>
+          <p:nvPr/>
+        </p:nvPicPr>
+        <p:blipFill>
+          <a:blip r:embed="rId2"/>
+          <a:stretch>
+            <a:fillRect/>
+          </a:stretch>
+        </p:blipFill>
+        <p:spPr>
+          <a:xfrm>
+            <a:off x="3771900" y="1279140"/>
+            <a:ext cx="10744200" cy="8085064"/>
+          </a:xfrm>
+          <a:prstGeom prst="rect">
+            <a:avLst/>
+          </a:prstGeom>
+        </p:spPr>
+      </p:pic>
     </p:spTree>
   </p:cSld>
   <p:clrMapOvr>
@@ -4506,7 +4476,7 @@
 </file>
 
 <file path=ppt/slides/slide14.xml><?xml version="1.0" encoding="utf-8"?>
-<p:sld xmlns:p="http://schemas.openxmlformats.org/presentationml/2006/main" xmlns:a="http://schemas.openxmlformats.org/drawingml/2006/main" xmlns:r="http://schemas.openxmlformats.org/officeDocument/2006/relationships">
+<p:sld xmlns:a="http://schemas.openxmlformats.org/drawingml/2006/main" xmlns:r="http://schemas.openxmlformats.org/officeDocument/2006/relationships" xmlns:p="http://schemas.openxmlformats.org/presentationml/2006/main">
   <p:cSld>
     <p:spTree>
       <p:nvGrpSpPr>
@@ -4524,12 +4494,12 @@
       </p:grpSpPr>
       <p:sp>
         <p:nvSpPr>
-          <p:cNvPr name="Freeform 2" id="2"/>
+          <p:cNvPr id="2" name="Freeform 2"/>
           <p:cNvSpPr/>
           <p:nvPr/>
         </p:nvSpPr>
         <p:spPr>
-          <a:xfrm flipH="false" flipV="false" rot="0">
+          <a:xfrm>
             <a:off x="0" y="0"/>
             <a:ext cx="18288000" cy="10287000"/>
           </a:xfrm>
@@ -4538,9 +4508,9 @@
             <a:gdLst/>
             <a:ahLst/>
             <a:cxnLst/>
-            <a:rect r="r" b="b" t="t" l="l"/>
+            <a:rect l="l" t="t" r="r" b="b"/>
             <a:pathLst>
-              <a:path h="10287000" w="18288000">
+              <a:path w="18288000" h="10287000">
                 <a:moveTo>
                   <a:pt x="0" y="0"/>
                 </a:moveTo>
@@ -4563,19 +4533,19 @@
           <a:blipFill>
             <a:blip r:embed="rId2"/>
             <a:stretch>
-              <a:fillRect l="0" t="0" r="0" b="0"/>
+              <a:fillRect/>
             </a:stretch>
           </a:blipFill>
         </p:spPr>
       </p:sp>
       <p:sp>
         <p:nvSpPr>
-          <p:cNvPr name="TextBox 3" id="3"/>
-          <p:cNvSpPr txBox="true"/>
+          <p:cNvPr id="3" name="TextBox 3"/>
+          <p:cNvSpPr txBox="1"/>
           <p:nvPr/>
         </p:nvSpPr>
         <p:spPr>
-          <a:xfrm rot="0">
+          <a:xfrm>
             <a:off x="1063163" y="1903856"/>
             <a:ext cx="12676478" cy="7354444"/>
           </a:xfrm>
@@ -4584,12 +4554,12 @@
           </a:prstGeom>
         </p:spPr>
         <p:txBody>
-          <a:bodyPr anchor="t" rtlCol="false" tIns="0" lIns="0" bIns="0" rIns="0">
+          <a:bodyPr lIns="0" tIns="0" rIns="0" bIns="0" rtlCol="0" anchor="t">
             <a:spAutoFit/>
           </a:bodyPr>
           <a:lstStyle/>
           <a:p>
-            <a:pPr algn="l" marL="1057895" indent="-528947" lvl="1">
+            <a:pPr marL="1057895" lvl="1" indent="-528947" algn="l">
               <a:lnSpc>
                 <a:spcPts val="6320"/>
               </a:lnSpc>
@@ -4597,7 +4567,7 @@
               <a:buChar char="•"/>
             </a:pPr>
             <a:r>
-              <a:rPr lang="en-US" b="true" sz="4899">
+              <a:rPr lang="en-US" sz="4899" b="1">
                 <a:solidFill>
                   <a:srgbClr val="FFFFFF"/>
                 </a:solidFill>
@@ -4606,23 +4576,11 @@
                 <a:cs typeface="29LT Bukra Semi-Bold"/>
                 <a:sym typeface="29LT Bukra Semi-Bold"/>
               </a:rPr>
-              <a:t>L</a:t>
-            </a:r>
-            <a:r>
-              <a:rPr lang="en-US" b="true" sz="4899">
-                <a:solidFill>
-                  <a:srgbClr val="FFFFFF"/>
-                </a:solidFill>
-                <a:latin typeface="29LT Bukra Semi-Bold"/>
-                <a:ea typeface="29LT Bukra Semi-Bold"/>
-                <a:cs typeface="29LT Bukra Semi-Bold"/>
-                <a:sym typeface="29LT Bukra Semi-Bold"/>
-              </a:rPr>
-              <a:t>a distribución física en filegroups garantiza la escalabilidad del sistema.</a:t>
-            </a:r>
-          </a:p>
-          <a:p>
-            <a:pPr algn="l" marL="1057895" indent="-528947" lvl="1">
+              <a:t>La distribución física en filegroups garantiza la escalabilidad del sistema.</a:t>
+            </a:r>
+          </a:p>
+          <a:p>
+            <a:pPr marL="1057895" lvl="1" indent="-528947" algn="l">
               <a:lnSpc>
                 <a:spcPts val="6320"/>
               </a:lnSpc>
@@ -4630,7 +4588,7 @@
               <a:buChar char="•"/>
             </a:pPr>
             <a:r>
-              <a:rPr lang="en-US" b="true" sz="4899">
+              <a:rPr lang="en-US" sz="4899" b="1">
                 <a:solidFill>
                   <a:srgbClr val="FFFFFF"/>
                 </a:solidFill>
@@ -4643,7 +4601,7 @@
             </a:r>
           </a:p>
           <a:p>
-            <a:pPr algn="l" marL="1057895" indent="-528947" lvl="1">
+            <a:pPr marL="1057895" lvl="1" indent="-528947" algn="l">
               <a:lnSpc>
                 <a:spcPts val="6320"/>
               </a:lnSpc>
@@ -4651,7 +4609,7 @@
               <a:buChar char="•"/>
             </a:pPr>
             <a:r>
-              <a:rPr lang="en-US" b="true" sz="4899">
+              <a:rPr lang="en-US" sz="4899" b="1">
                 <a:solidFill>
                   <a:srgbClr val="FFFFFF"/>
                 </a:solidFill>
@@ -4667,12 +4625,12 @@
       </p:sp>
       <p:sp>
         <p:nvSpPr>
-          <p:cNvPr name="Freeform 4" id="4"/>
+          <p:cNvPr id="4" name="Freeform 4"/>
           <p:cNvSpPr/>
           <p:nvPr/>
         </p:nvSpPr>
         <p:spPr>
-          <a:xfrm flipH="false" flipV="false" rot="0">
+          <a:xfrm>
             <a:off x="13739641" y="2911015"/>
             <a:ext cx="3983297" cy="3983297"/>
           </a:xfrm>
@@ -4681,9 +4639,9 @@
             <a:gdLst/>
             <a:ahLst/>
             <a:cxnLst/>
-            <a:rect r="r" b="b" t="t" l="l"/>
+            <a:rect l="l" t="t" r="r" b="b"/>
             <a:pathLst>
-              <a:path h="3983297" w="3983297">
+              <a:path w="3983297" h="3983297">
                 <a:moveTo>
                   <a:pt x="0" y="0"/>
                 </a:moveTo>
@@ -4706,19 +4664,19 @@
           <a:blipFill>
             <a:blip r:embed="rId3"/>
             <a:stretch>
-              <a:fillRect l="0" t="0" r="0" b="0"/>
+              <a:fillRect/>
             </a:stretch>
           </a:blipFill>
         </p:spPr>
       </p:sp>
       <p:sp>
         <p:nvSpPr>
-          <p:cNvPr name="TextBox 5" id="5"/>
-          <p:cNvSpPr txBox="true"/>
+          <p:cNvPr id="5" name="TextBox 5"/>
+          <p:cNvSpPr txBox="1"/>
           <p:nvPr/>
         </p:nvSpPr>
         <p:spPr>
-          <a:xfrm rot="0">
+          <a:xfrm>
             <a:off x="1063163" y="243869"/>
             <a:ext cx="16230600" cy="1556385"/>
           </a:xfrm>
@@ -4727,7 +4685,7 @@
           </a:prstGeom>
         </p:spPr>
         <p:txBody>
-          <a:bodyPr anchor="t" rtlCol="false" tIns="0" lIns="0" bIns="0" rIns="0">
+          <a:bodyPr lIns="0" tIns="0" rIns="0" bIns="0" rtlCol="0" anchor="t">
             <a:spAutoFit/>
           </a:bodyPr>
           <a:lstStyle/>
@@ -4738,7 +4696,7 @@
               </a:lnSpc>
             </a:pPr>
             <a:r>
-              <a:rPr lang="en-US" b="true" sz="8000">
+              <a:rPr lang="en-US" sz="8000" b="1">
                 <a:solidFill>
                   <a:srgbClr val="38B6FF"/>
                 </a:solidFill>
@@ -4761,7 +4719,7 @@
 </file>
 
 <file path=ppt/slides/slide15.xml><?xml version="1.0" encoding="utf-8"?>
-<p:sld xmlns:p="http://schemas.openxmlformats.org/presentationml/2006/main" xmlns:a="http://schemas.openxmlformats.org/drawingml/2006/main" xmlns:r="http://schemas.openxmlformats.org/officeDocument/2006/relationships">
+<p:sld xmlns:a="http://schemas.openxmlformats.org/drawingml/2006/main" xmlns:r="http://schemas.openxmlformats.org/officeDocument/2006/relationships" xmlns:p="http://schemas.openxmlformats.org/presentationml/2006/main">
   <p:cSld>
     <p:spTree>
       <p:nvGrpSpPr>
@@ -4779,12 +4737,12 @@
       </p:grpSpPr>
       <p:sp>
         <p:nvSpPr>
-          <p:cNvPr name="Freeform 2" id="2"/>
+          <p:cNvPr id="2" name="Freeform 2"/>
           <p:cNvSpPr/>
           <p:nvPr/>
         </p:nvSpPr>
         <p:spPr>
-          <a:xfrm flipH="false" flipV="false" rot="0">
+          <a:xfrm>
             <a:off x="0" y="0"/>
             <a:ext cx="18288000" cy="10287000"/>
           </a:xfrm>
@@ -4793,9 +4751,9 @@
             <a:gdLst/>
             <a:ahLst/>
             <a:cxnLst/>
-            <a:rect r="r" b="b" t="t" l="l"/>
+            <a:rect l="l" t="t" r="r" b="b"/>
             <a:pathLst>
-              <a:path h="10287000" w="18288000">
+              <a:path w="18288000" h="10287000">
                 <a:moveTo>
                   <a:pt x="0" y="0"/>
                 </a:moveTo>
@@ -4818,19 +4776,19 @@
           <a:blipFill>
             <a:blip r:embed="rId2"/>
             <a:stretch>
-              <a:fillRect l="0" t="0" r="0" b="0"/>
+              <a:fillRect/>
             </a:stretch>
           </a:blipFill>
         </p:spPr>
       </p:sp>
       <p:sp>
         <p:nvSpPr>
-          <p:cNvPr name="Freeform 3" id="3"/>
+          <p:cNvPr id="3" name="Freeform 3"/>
           <p:cNvSpPr/>
           <p:nvPr/>
         </p:nvSpPr>
         <p:spPr>
-          <a:xfrm flipH="false" flipV="false" rot="0">
+          <a:xfrm>
             <a:off x="7158383" y="3857518"/>
             <a:ext cx="5634675" cy="5634675"/>
           </a:xfrm>
@@ -4839,9 +4797,9 @@
             <a:gdLst/>
             <a:ahLst/>
             <a:cxnLst/>
-            <a:rect r="r" b="b" t="t" l="l"/>
+            <a:rect l="l" t="t" r="r" b="b"/>
             <a:pathLst>
-              <a:path h="5634675" w="5634675">
+              <a:path w="5634675" h="5634675">
                 <a:moveTo>
                   <a:pt x="0" y="0"/>
                 </a:moveTo>
@@ -4864,19 +4822,19 @@
           <a:blipFill>
             <a:blip r:embed="rId3"/>
             <a:stretch>
-              <a:fillRect l="0" t="0" r="0" b="0"/>
+              <a:fillRect/>
             </a:stretch>
           </a:blipFill>
         </p:spPr>
       </p:sp>
       <p:sp>
         <p:nvSpPr>
-          <p:cNvPr name="TextBox 4" id="4"/>
-          <p:cNvSpPr txBox="true"/>
+          <p:cNvPr id="4" name="TextBox 4"/>
+          <p:cNvSpPr txBox="1"/>
           <p:nvPr/>
         </p:nvSpPr>
         <p:spPr>
-          <a:xfrm rot="0">
+          <a:xfrm>
             <a:off x="1594578" y="1654728"/>
             <a:ext cx="15664722" cy="1830705"/>
           </a:xfrm>
@@ -4885,7 +4843,7 @@
           </a:prstGeom>
         </p:spPr>
         <p:txBody>
-          <a:bodyPr anchor="t" rtlCol="false" tIns="0" lIns="0" bIns="0" rIns="0">
+          <a:bodyPr lIns="0" tIns="0" rIns="0" bIns="0" rtlCol="0" anchor="t">
             <a:spAutoFit/>
           </a:bodyPr>
           <a:lstStyle/>
@@ -4934,12 +4892,12 @@
       </p:sp>
       <p:sp>
         <p:nvSpPr>
-          <p:cNvPr name="TextBox 5" id="5"/>
-          <p:cNvSpPr txBox="true"/>
+          <p:cNvPr id="5" name="TextBox 5"/>
+          <p:cNvSpPr txBox="1"/>
           <p:nvPr/>
         </p:nvSpPr>
         <p:spPr>
-          <a:xfrm rot="0">
+          <a:xfrm>
             <a:off x="1223519" y="336139"/>
             <a:ext cx="15840962" cy="1744980"/>
           </a:xfrm>
@@ -4948,7 +4906,7 @@
           </a:prstGeom>
         </p:spPr>
         <p:txBody>
-          <a:bodyPr anchor="t" rtlCol="false" tIns="0" lIns="0" bIns="0" rIns="0">
+          <a:bodyPr lIns="0" tIns="0" rIns="0" bIns="0" rtlCol="0" anchor="t">
             <a:spAutoFit/>
           </a:bodyPr>
           <a:lstStyle/>
@@ -4959,7 +4917,7 @@
               </a:lnSpc>
             </a:pPr>
             <a:r>
-              <a:rPr lang="en-US" b="true" sz="9000">
+              <a:rPr lang="en-US" sz="9000" b="1">
                 <a:solidFill>
                   <a:srgbClr val="38B6FF"/>
                 </a:solidFill>
@@ -4982,7 +4940,7 @@
 </file>
 
 <file path=ppt/slides/slide2.xml><?xml version="1.0" encoding="utf-8"?>
-<p:sld xmlns:p="http://schemas.openxmlformats.org/presentationml/2006/main" xmlns:a="http://schemas.openxmlformats.org/drawingml/2006/main" xmlns:r="http://schemas.openxmlformats.org/officeDocument/2006/relationships">
+<p:sld xmlns:a="http://schemas.openxmlformats.org/drawingml/2006/main" xmlns:r="http://schemas.openxmlformats.org/officeDocument/2006/relationships" xmlns:p="http://schemas.openxmlformats.org/presentationml/2006/main">
   <p:cSld>
     <p:spTree>
       <p:nvGrpSpPr>
@@ -5000,12 +4958,12 @@
       </p:grpSpPr>
       <p:sp>
         <p:nvSpPr>
-          <p:cNvPr name="Freeform 2" id="2"/>
+          <p:cNvPr id="2" name="Freeform 2"/>
           <p:cNvSpPr/>
           <p:nvPr/>
         </p:nvSpPr>
         <p:spPr>
-          <a:xfrm flipH="false" flipV="false" rot="0">
+          <a:xfrm>
             <a:off x="0" y="0"/>
             <a:ext cx="18288000" cy="10287000"/>
           </a:xfrm>
@@ -5014,9 +4972,9 @@
             <a:gdLst/>
             <a:ahLst/>
             <a:cxnLst/>
-            <a:rect r="r" b="b" t="t" l="l"/>
+            <a:rect l="l" t="t" r="r" b="b"/>
             <a:pathLst>
-              <a:path h="10287000" w="18288000">
+              <a:path w="18288000" h="10287000">
                 <a:moveTo>
                   <a:pt x="0" y="0"/>
                 </a:moveTo>
@@ -5039,19 +4997,19 @@
           <a:blipFill>
             <a:blip r:embed="rId2"/>
             <a:stretch>
-              <a:fillRect l="0" t="0" r="0" b="0"/>
+              <a:fillRect/>
             </a:stretch>
           </a:blipFill>
         </p:spPr>
       </p:sp>
       <p:sp>
         <p:nvSpPr>
-          <p:cNvPr name="Freeform 3" id="3"/>
+          <p:cNvPr id="3" name="Freeform 3"/>
           <p:cNvSpPr/>
           <p:nvPr/>
         </p:nvSpPr>
         <p:spPr>
-          <a:xfrm flipH="false" flipV="false" rot="0">
+          <a:xfrm>
             <a:off x="13915552" y="261145"/>
             <a:ext cx="2798544" cy="2798544"/>
           </a:xfrm>
@@ -5060,9 +5018,9 @@
             <a:gdLst/>
             <a:ahLst/>
             <a:cxnLst/>
-            <a:rect r="r" b="b" t="t" l="l"/>
+            <a:rect l="l" t="t" r="r" b="b"/>
             <a:pathLst>
-              <a:path h="2798544" w="2798544">
+              <a:path w="2798544" h="2798544">
                 <a:moveTo>
                   <a:pt x="0" y="0"/>
                 </a:moveTo>
@@ -5085,19 +5043,19 @@
           <a:blipFill>
             <a:blip r:embed="rId3"/>
             <a:stretch>
-              <a:fillRect l="0" t="0" r="0" b="0"/>
+              <a:fillRect/>
             </a:stretch>
           </a:blipFill>
         </p:spPr>
       </p:sp>
       <p:grpSp>
         <p:nvGrpSpPr>
-          <p:cNvPr name="Group 4" id="4"/>
+          <p:cNvPr id="4" name="Group 4"/>
           <p:cNvGrpSpPr/>
           <p:nvPr/>
         </p:nvGrpSpPr>
         <p:grpSpPr>
-          <a:xfrm rot="0">
+          <a:xfrm>
             <a:off x="1028700" y="3316885"/>
             <a:ext cx="3544015" cy="5941415"/>
             <a:chOff x="0" y="0"/>
@@ -5106,12 +5064,12 @@
         </p:grpSpPr>
         <p:sp>
           <p:nvSpPr>
-            <p:cNvPr name="TextBox 5" id="5"/>
-            <p:cNvSpPr txBox="true"/>
+            <p:cNvPr id="5" name="TextBox 5"/>
+            <p:cNvSpPr txBox="1"/>
             <p:nvPr/>
           </p:nvSpPr>
           <p:spPr>
-            <a:xfrm rot="0">
+            <a:xfrm>
               <a:off x="0" y="-142875"/>
               <a:ext cx="4725353" cy="1883622"/>
             </a:xfrm>
@@ -5120,12 +5078,12 @@
             </a:prstGeom>
           </p:spPr>
           <p:txBody>
-            <a:bodyPr anchor="t" rtlCol="false" tIns="0" lIns="0" bIns="0" rIns="0">
+            <a:bodyPr lIns="0" tIns="0" rIns="0" bIns="0" rtlCol="0" anchor="t">
               <a:spAutoFit/>
             </a:bodyPr>
             <a:lstStyle/>
             <a:p>
-              <a:pPr algn="ctr" marL="0" indent="0" lvl="0">
+              <a:pPr marL="0" lvl="0" indent="0" algn="ctr">
                 <a:lnSpc>
                   <a:spcPts val="3639"/>
                 </a:lnSpc>
@@ -5134,7 +5092,7 @@
                 </a:spcBef>
               </a:pPr>
               <a:r>
-                <a:rPr lang="en-US" b="true" sz="2599">
+                <a:rPr lang="en-US" sz="2599" b="1">
                   <a:solidFill>
                     <a:srgbClr val="FFFFFF"/>
                   </a:solidFill>
@@ -5143,31 +5101,19 @@
                   <a:cs typeface="29LT Bukra Bold"/>
                   <a:sym typeface="29LT Bukra Bold"/>
                 </a:rPr>
-                <a:t>HUERTAS</a:t>
-              </a:r>
-              <a:r>
-                <a:rPr lang="en-US" b="true" sz="2599">
-                  <a:solidFill>
-                    <a:srgbClr val="FFFFFF"/>
-                  </a:solidFill>
-                  <a:latin typeface="29LT Bukra Bold"/>
-                  <a:ea typeface="29LT Bukra Bold"/>
-                  <a:cs typeface="29LT Bukra Bold"/>
-                  <a:sym typeface="29LT Bukra Bold"/>
-                </a:rPr>
-                <a:t> PASCACIO BRYAN CRISTOPHER</a:t>
+                <a:t>HUERTAS PASCACIO BRYAN CRISTOPHER</a:t>
               </a:r>
             </a:p>
           </p:txBody>
         </p:sp>
         <p:sp>
           <p:nvSpPr>
-            <p:cNvPr name="TextBox 6" id="6"/>
-            <p:cNvSpPr txBox="true"/>
+            <p:cNvPr id="6" name="TextBox 6"/>
+            <p:cNvSpPr txBox="1"/>
             <p:nvPr/>
           </p:nvSpPr>
           <p:spPr>
-            <a:xfrm rot="0">
+            <a:xfrm>
               <a:off x="0" y="2008555"/>
               <a:ext cx="4725353" cy="5913332"/>
             </a:xfrm>
@@ -5176,12 +5122,12 @@
             </a:prstGeom>
           </p:spPr>
           <p:txBody>
-            <a:bodyPr anchor="t" rtlCol="false" tIns="0" lIns="0" bIns="0" rIns="0">
+            <a:bodyPr lIns="0" tIns="0" rIns="0" bIns="0" rtlCol="0" anchor="t">
               <a:spAutoFit/>
             </a:bodyPr>
             <a:lstStyle/>
             <a:p>
-              <a:pPr algn="ctr" marL="0" indent="0" lvl="0">
+              <a:pPr marL="0" lvl="0" indent="0" algn="ctr">
                 <a:lnSpc>
                   <a:spcPts val="3219"/>
                 </a:lnSpc>
@@ -5202,7 +5148,7 @@
                 <a:t>Anal</a:t>
               </a:r>
               <a:r>
-                <a:rPr lang="en-US" sz="2299" strike="noStrike" u="none">
+                <a:rPr lang="en-US" sz="2299" u="none" strike="noStrike">
                   <a:solidFill>
                     <a:srgbClr val="FFFFFF"/>
                   </a:solidFill>
@@ -5211,1027 +5157,7 @@
                   <a:cs typeface="29LT Bukra"/>
                   <a:sym typeface="29LT Bukra"/>
                 </a:rPr>
-                <a:t>is</a:t>
-              </a:r>
-              <a:r>
-                <a:rPr lang="en-US" sz="2299" strike="noStrike" u="none">
-                  <a:solidFill>
-                    <a:srgbClr val="FFFFFF"/>
-                  </a:solidFill>
-                  <a:latin typeface="29LT Bukra"/>
-                  <a:ea typeface="29LT Bukra"/>
-                  <a:cs typeface="29LT Bukra"/>
-                  <a:sym typeface="29LT Bukra"/>
-                </a:rPr>
-                <a:t>ta</a:t>
-              </a:r>
-              <a:r>
-                <a:rPr lang="en-US" sz="2299" strike="noStrike" u="none">
-                  <a:solidFill>
-                    <a:srgbClr val="FFFFFF"/>
-                  </a:solidFill>
-                  <a:latin typeface="29LT Bukra"/>
-                  <a:ea typeface="29LT Bukra"/>
-                  <a:cs typeface="29LT Bukra"/>
-                  <a:sym typeface="29LT Bukra"/>
-                </a:rPr>
-                <a:t> d</a:t>
-              </a:r>
-              <a:r>
-                <a:rPr lang="en-US" sz="2299" strike="noStrike" u="none">
-                  <a:solidFill>
-                    <a:srgbClr val="FFFFFF"/>
-                  </a:solidFill>
-                  <a:latin typeface="29LT Bukra"/>
-                  <a:ea typeface="29LT Bukra"/>
-                  <a:cs typeface="29LT Bukra"/>
-                  <a:sym typeface="29LT Bukra"/>
-                </a:rPr>
-                <a:t>e Dat</a:t>
-              </a:r>
-              <a:r>
-                <a:rPr lang="en-US" sz="2299" strike="noStrike" u="none">
-                  <a:solidFill>
-                    <a:srgbClr val="FFFFFF"/>
-                  </a:solidFill>
-                  <a:latin typeface="29LT Bukra"/>
-                  <a:ea typeface="29LT Bukra"/>
-                  <a:cs typeface="29LT Bukra"/>
-                  <a:sym typeface="29LT Bukra"/>
-                </a:rPr>
-                <a:t>o</a:t>
-              </a:r>
-              <a:r>
-                <a:rPr lang="en-US" sz="2299" strike="noStrike" u="none">
-                  <a:solidFill>
-                    <a:srgbClr val="FFFFFF"/>
-                  </a:solidFill>
-                  <a:latin typeface="29LT Bukra"/>
-                  <a:ea typeface="29LT Bukra"/>
-                  <a:cs typeface="29LT Bukra"/>
-                  <a:sym typeface="29LT Bukra"/>
-                </a:rPr>
-                <a:t>s y Dashb</a:t>
-              </a:r>
-              <a:r>
-                <a:rPr lang="en-US" sz="2299" strike="noStrike" u="none">
-                  <a:solidFill>
-                    <a:srgbClr val="FFFFFF"/>
-                  </a:solidFill>
-                  <a:latin typeface="29LT Bukra"/>
-                  <a:ea typeface="29LT Bukra"/>
-                  <a:cs typeface="29LT Bukra"/>
-                  <a:sym typeface="29LT Bukra"/>
-                </a:rPr>
-                <a:t>o</a:t>
-              </a:r>
-              <a:r>
-                <a:rPr lang="en-US" sz="2299" strike="noStrike" u="none">
-                  <a:solidFill>
-                    <a:srgbClr val="FFFFFF"/>
-                  </a:solidFill>
-                  <a:latin typeface="29LT Bukra"/>
-                  <a:ea typeface="29LT Bukra"/>
-                  <a:cs typeface="29LT Bukra"/>
-                  <a:sym typeface="29LT Bukra"/>
-                </a:rPr>
-                <a:t>a</a:t>
-              </a:r>
-              <a:r>
-                <a:rPr lang="en-US" sz="2299" strike="noStrike" u="none">
-                  <a:solidFill>
-                    <a:srgbClr val="FFFFFF"/>
-                  </a:solidFill>
-                  <a:latin typeface="29LT Bukra"/>
-                  <a:ea typeface="29LT Bukra"/>
-                  <a:cs typeface="29LT Bukra"/>
-                  <a:sym typeface="29LT Bukra"/>
-                </a:rPr>
-                <a:t>r</a:t>
-              </a:r>
-              <a:r>
-                <a:rPr lang="en-US" sz="2299" strike="noStrike" u="none">
-                  <a:solidFill>
-                    <a:srgbClr val="FFFFFF"/>
-                  </a:solidFill>
-                  <a:latin typeface="29LT Bukra"/>
-                  <a:ea typeface="29LT Bukra"/>
-                  <a:cs typeface="29LT Bukra"/>
-                  <a:sym typeface="29LT Bukra"/>
-                </a:rPr>
-                <a:t>d:</a:t>
-              </a:r>
-              <a:r>
-                <a:rPr lang="en-US" sz="2299" strike="noStrike" u="none">
-                  <a:solidFill>
-                    <a:srgbClr val="FFFFFF"/>
-                  </a:solidFill>
-                  <a:latin typeface="29LT Bukra"/>
-                  <a:ea typeface="29LT Bukra"/>
-                  <a:cs typeface="29LT Bukra"/>
-                  <a:sym typeface="29LT Bukra"/>
-                </a:rPr>
-                <a:t> </a:t>
-              </a:r>
-              <a:r>
-                <a:rPr lang="en-US" sz="2299" strike="noStrike" u="none">
-                  <a:solidFill>
-                    <a:srgbClr val="FFFFFF"/>
-                  </a:solidFill>
-                  <a:latin typeface="29LT Bukra"/>
-                  <a:ea typeface="29LT Bukra"/>
-                  <a:cs typeface="29LT Bukra"/>
-                  <a:sym typeface="29LT Bukra"/>
-                </a:rPr>
-                <a:t>encargado</a:t>
-              </a:r>
-              <a:r>
-                <a:rPr lang="en-US" sz="2299" strike="noStrike" u="none">
-                  <a:solidFill>
-                    <a:srgbClr val="FFFFFF"/>
-                  </a:solidFill>
-                  <a:latin typeface="29LT Bukra"/>
-                  <a:ea typeface="29LT Bukra"/>
-                  <a:cs typeface="29LT Bukra"/>
-                  <a:sym typeface="29LT Bukra"/>
-                </a:rPr>
-                <a:t> </a:t>
-              </a:r>
-              <a:r>
-                <a:rPr lang="en-US" sz="2299" strike="noStrike" u="none">
-                  <a:solidFill>
-                    <a:srgbClr val="FFFFFF"/>
-                  </a:solidFill>
-                  <a:latin typeface="29LT Bukra"/>
-                  <a:ea typeface="29LT Bukra"/>
-                  <a:cs typeface="29LT Bukra"/>
-                  <a:sym typeface="29LT Bukra"/>
-                </a:rPr>
-                <a:t>d</a:t>
-              </a:r>
-              <a:r>
-                <a:rPr lang="en-US" sz="2299" strike="noStrike" u="none">
-                  <a:solidFill>
-                    <a:srgbClr val="FFFFFF"/>
-                  </a:solidFill>
-                  <a:latin typeface="29LT Bukra"/>
-                  <a:ea typeface="29LT Bukra"/>
-                  <a:cs typeface="29LT Bukra"/>
-                  <a:sym typeface="29LT Bukra"/>
-                </a:rPr>
-                <a:t>e conect</a:t>
-              </a:r>
-              <a:r>
-                <a:rPr lang="en-US" sz="2299" strike="noStrike" u="none">
-                  <a:solidFill>
-                    <a:srgbClr val="FFFFFF"/>
-                  </a:solidFill>
-                  <a:latin typeface="29LT Bukra"/>
-                  <a:ea typeface="29LT Bukra"/>
-                  <a:cs typeface="29LT Bukra"/>
-                  <a:sym typeface="29LT Bukra"/>
-                </a:rPr>
-                <a:t>a</a:t>
-              </a:r>
-              <a:r>
-                <a:rPr lang="en-US" sz="2299" strike="noStrike" u="none">
-                  <a:solidFill>
-                    <a:srgbClr val="FFFFFF"/>
-                  </a:solidFill>
-                  <a:latin typeface="29LT Bukra"/>
-                  <a:ea typeface="29LT Bukra"/>
-                  <a:cs typeface="29LT Bukra"/>
-                  <a:sym typeface="29LT Bukra"/>
-                </a:rPr>
-                <a:t>r </a:t>
-              </a:r>
-              <a:r>
-                <a:rPr lang="en-US" sz="2299" strike="noStrike" u="none">
-                  <a:solidFill>
-                    <a:srgbClr val="FFFFFF"/>
-                  </a:solidFill>
-                  <a:latin typeface="29LT Bukra"/>
-                  <a:ea typeface="29LT Bukra"/>
-                  <a:cs typeface="29LT Bukra"/>
-                  <a:sym typeface="29LT Bukra"/>
-                </a:rPr>
-                <a:t>l</a:t>
-              </a:r>
-              <a:r>
-                <a:rPr lang="en-US" sz="2299" strike="noStrike" u="none">
-                  <a:solidFill>
-                    <a:srgbClr val="FFFFFF"/>
-                  </a:solidFill>
-                  <a:latin typeface="29LT Bukra"/>
-                  <a:ea typeface="29LT Bukra"/>
-                  <a:cs typeface="29LT Bukra"/>
-                  <a:sym typeface="29LT Bukra"/>
-                </a:rPr>
-                <a:t>a</a:t>
-              </a:r>
-              <a:r>
-                <a:rPr lang="en-US" sz="2299" strike="noStrike" u="none">
-                  <a:solidFill>
-                    <a:srgbClr val="FFFFFF"/>
-                  </a:solidFill>
-                  <a:latin typeface="29LT Bukra"/>
-                  <a:ea typeface="29LT Bukra"/>
-                  <a:cs typeface="29LT Bukra"/>
-                  <a:sym typeface="29LT Bukra"/>
-                </a:rPr>
-                <a:t> BD a la herram</a:t>
-              </a:r>
-              <a:r>
-                <a:rPr lang="en-US" sz="2299" strike="noStrike" u="none">
-                  <a:solidFill>
-                    <a:srgbClr val="FFFFFF"/>
-                  </a:solidFill>
-                  <a:latin typeface="29LT Bukra"/>
-                  <a:ea typeface="29LT Bukra"/>
-                  <a:cs typeface="29LT Bukra"/>
-                  <a:sym typeface="29LT Bukra"/>
-                </a:rPr>
-                <a:t>i</a:t>
-              </a:r>
-              <a:r>
-                <a:rPr lang="en-US" sz="2299" strike="noStrike" u="none">
-                  <a:solidFill>
-                    <a:srgbClr val="FFFFFF"/>
-                  </a:solidFill>
-                  <a:latin typeface="29LT Bukra"/>
-                  <a:ea typeface="29LT Bukra"/>
-                  <a:cs typeface="29LT Bukra"/>
-                  <a:sym typeface="29LT Bukra"/>
-                </a:rPr>
-                <a:t>enta BI </a:t>
-              </a:r>
-              <a:r>
-                <a:rPr lang="en-US" sz="2299" strike="noStrike" u="none">
-                  <a:solidFill>
-                    <a:srgbClr val="FFFFFF"/>
-                  </a:solidFill>
-                  <a:latin typeface="29LT Bukra"/>
-                  <a:ea typeface="29LT Bukra"/>
-                  <a:cs typeface="29LT Bukra"/>
-                  <a:sym typeface="29LT Bukra"/>
-                </a:rPr>
-                <a:t>s</a:t>
-              </a:r>
-              <a:r>
-                <a:rPr lang="en-US" sz="2299" strike="noStrike" u="none">
-                  <a:solidFill>
-                    <a:srgbClr val="FFFFFF"/>
-                  </a:solidFill>
-                  <a:latin typeface="29LT Bukra"/>
-                  <a:ea typeface="29LT Bukra"/>
-                  <a:cs typeface="29LT Bukra"/>
-                  <a:sym typeface="29LT Bukra"/>
-                </a:rPr>
-                <a:t>elec</a:t>
-              </a:r>
-              <a:r>
-                <a:rPr lang="en-US" sz="2299" strike="noStrike" u="none">
-                  <a:solidFill>
-                    <a:srgbClr val="FFFFFF"/>
-                  </a:solidFill>
-                  <a:latin typeface="29LT Bukra"/>
-                  <a:ea typeface="29LT Bukra"/>
-                  <a:cs typeface="29LT Bukra"/>
-                  <a:sym typeface="29LT Bukra"/>
-                </a:rPr>
-                <a:t>ci</a:t>
-              </a:r>
-              <a:r>
-                <a:rPr lang="en-US" sz="2299" strike="noStrike" u="none">
-                  <a:solidFill>
-                    <a:srgbClr val="FFFFFF"/>
-                  </a:solidFill>
-                  <a:latin typeface="29LT Bukra"/>
-                  <a:ea typeface="29LT Bukra"/>
-                  <a:cs typeface="29LT Bukra"/>
-                  <a:sym typeface="29LT Bukra"/>
-                </a:rPr>
-                <a:t>o</a:t>
-              </a:r>
-              <a:r>
-                <a:rPr lang="en-US" sz="2299" strike="noStrike" u="none">
-                  <a:solidFill>
-                    <a:srgbClr val="FFFFFF"/>
-                  </a:solidFill>
-                  <a:latin typeface="29LT Bukra"/>
-                  <a:ea typeface="29LT Bukra"/>
-                  <a:cs typeface="29LT Bukra"/>
-                  <a:sym typeface="29LT Bukra"/>
-                </a:rPr>
-                <a:t>n</a:t>
-              </a:r>
-              <a:r>
-                <a:rPr lang="en-US" sz="2299" strike="noStrike" u="none">
-                  <a:solidFill>
-                    <a:srgbClr val="FFFFFF"/>
-                  </a:solidFill>
-                  <a:latin typeface="29LT Bukra"/>
-                  <a:ea typeface="29LT Bukra"/>
-                  <a:cs typeface="29LT Bukra"/>
-                  <a:sym typeface="29LT Bukra"/>
-                </a:rPr>
-                <a:t>ada, diseñar</a:t>
-              </a:r>
-              <a:r>
-                <a:rPr lang="en-US" sz="2299" strike="noStrike" u="none">
-                  <a:solidFill>
-                    <a:srgbClr val="FFFFFF"/>
-                  </a:solidFill>
-                  <a:latin typeface="29LT Bukra"/>
-                  <a:ea typeface="29LT Bukra"/>
-                  <a:cs typeface="29LT Bukra"/>
-                  <a:sym typeface="29LT Bukra"/>
-                </a:rPr>
-                <a:t> el </a:t>
-              </a:r>
-              <a:r>
-                <a:rPr lang="en-US" sz="2299" strike="noStrike" u="none">
-                  <a:solidFill>
-                    <a:srgbClr val="FFFFFF"/>
-                  </a:solidFill>
-                  <a:latin typeface="29LT Bukra"/>
-                  <a:ea typeface="29LT Bukra"/>
-                  <a:cs typeface="29LT Bukra"/>
-                  <a:sym typeface="29LT Bukra"/>
-                </a:rPr>
-                <a:t>D</a:t>
-              </a:r>
-              <a:r>
-                <a:rPr lang="en-US" sz="2299" strike="noStrike" u="none">
-                  <a:solidFill>
-                    <a:srgbClr val="FFFFFF"/>
-                  </a:solidFill>
-                  <a:latin typeface="29LT Bukra"/>
-                  <a:ea typeface="29LT Bukra"/>
-                  <a:cs typeface="29LT Bukra"/>
-                  <a:sym typeface="29LT Bukra"/>
-                </a:rPr>
-                <a:t>a</a:t>
-              </a:r>
-              <a:r>
-                <a:rPr lang="en-US" sz="2299" strike="noStrike" u="none">
-                  <a:solidFill>
-                    <a:srgbClr val="FFFFFF"/>
-                  </a:solidFill>
-                  <a:latin typeface="29LT Bukra"/>
-                  <a:ea typeface="29LT Bukra"/>
-                  <a:cs typeface="29LT Bukra"/>
-                  <a:sym typeface="29LT Bukra"/>
-                </a:rPr>
-                <a:t>shboard</a:t>
-              </a:r>
-              <a:r>
-                <a:rPr lang="en-US" sz="2299" strike="noStrike" u="none">
-                  <a:solidFill>
-                    <a:srgbClr val="FFFFFF"/>
-                  </a:solidFill>
-                  <a:latin typeface="29LT Bukra"/>
-                  <a:ea typeface="29LT Bukra"/>
-                  <a:cs typeface="29LT Bukra"/>
-                  <a:sym typeface="29LT Bukra"/>
-                </a:rPr>
-                <a:t> </a:t>
-              </a:r>
-              <a:r>
-                <a:rPr lang="en-US" sz="2299" strike="noStrike" u="none">
-                  <a:solidFill>
-                    <a:srgbClr val="FFFFFF"/>
-                  </a:solidFill>
-                  <a:latin typeface="29LT Bukra"/>
-                  <a:ea typeface="29LT Bukra"/>
-                  <a:cs typeface="29LT Bukra"/>
-                  <a:sym typeface="29LT Bukra"/>
-                </a:rPr>
-                <a:t>co</a:t>
-              </a:r>
-              <a:r>
-                <a:rPr lang="en-US" sz="2299" strike="noStrike" u="none">
-                  <a:solidFill>
-                    <a:srgbClr val="FFFFFF"/>
-                  </a:solidFill>
-                  <a:latin typeface="29LT Bukra"/>
-                  <a:ea typeface="29LT Bukra"/>
-                  <a:cs typeface="29LT Bukra"/>
-                  <a:sym typeface="29LT Bukra"/>
-                </a:rPr>
-                <a:t>n </a:t>
-              </a:r>
-              <a:r>
-                <a:rPr lang="en-US" sz="2299" strike="noStrike" u="none">
-                  <a:solidFill>
-                    <a:srgbClr val="FFFFFF"/>
-                  </a:solidFill>
-                  <a:latin typeface="29LT Bukra"/>
-                  <a:ea typeface="29LT Bukra"/>
-                  <a:cs typeface="29LT Bukra"/>
-                  <a:sym typeface="29LT Bukra"/>
-                </a:rPr>
-                <a:t>las</a:t>
-              </a:r>
-              <a:r>
-                <a:rPr lang="en-US" sz="2299" strike="noStrike" u="none">
-                  <a:solidFill>
-                    <a:srgbClr val="FFFFFF"/>
-                  </a:solidFill>
-                  <a:latin typeface="29LT Bukra"/>
-                  <a:ea typeface="29LT Bukra"/>
-                  <a:cs typeface="29LT Bukra"/>
-                  <a:sym typeface="29LT Bukra"/>
-                </a:rPr>
-                <a:t> </a:t>
-              </a:r>
-              <a:r>
-                <a:rPr lang="en-US" sz="2299" strike="noStrike" u="none">
-                  <a:solidFill>
-                    <a:srgbClr val="FFFFFF"/>
-                  </a:solidFill>
-                  <a:latin typeface="29LT Bukra"/>
-                  <a:ea typeface="29LT Bukra"/>
-                  <a:cs typeface="29LT Bukra"/>
-                  <a:sym typeface="29LT Bukra"/>
-                </a:rPr>
-                <a:t>v</a:t>
-              </a:r>
-              <a:r>
-                <a:rPr lang="en-US" sz="2299" strike="noStrike" u="none">
-                  <a:solidFill>
-                    <a:srgbClr val="FFFFFF"/>
-                  </a:solidFill>
-                  <a:latin typeface="29LT Bukra"/>
-                  <a:ea typeface="29LT Bukra"/>
-                  <a:cs typeface="29LT Bukra"/>
-                  <a:sym typeface="29LT Bukra"/>
-                </a:rPr>
-                <a:t>isu</a:t>
-              </a:r>
-              <a:r>
-                <a:rPr lang="en-US" sz="2299" strike="noStrike" u="none">
-                  <a:solidFill>
-                    <a:srgbClr val="FFFFFF"/>
-                  </a:solidFill>
-                  <a:latin typeface="29LT Bukra"/>
-                  <a:ea typeface="29LT Bukra"/>
-                  <a:cs typeface="29LT Bukra"/>
-                  <a:sym typeface="29LT Bukra"/>
-                </a:rPr>
-                <a:t>a</a:t>
-              </a:r>
-              <a:r>
-                <a:rPr lang="en-US" sz="2299" strike="noStrike" u="none">
-                  <a:solidFill>
-                    <a:srgbClr val="FFFFFF"/>
-                  </a:solidFill>
-                  <a:latin typeface="29LT Bukra"/>
-                  <a:ea typeface="29LT Bukra"/>
-                  <a:cs typeface="29LT Bukra"/>
-                  <a:sym typeface="29LT Bukra"/>
-                </a:rPr>
-                <a:t>l</a:t>
-              </a:r>
-              <a:r>
-                <a:rPr lang="en-US" sz="2299" strike="noStrike" u="none">
-                  <a:solidFill>
-                    <a:srgbClr val="FFFFFF"/>
-                  </a:solidFill>
-                  <a:latin typeface="29LT Bukra"/>
-                  <a:ea typeface="29LT Bukra"/>
-                  <a:cs typeface="29LT Bukra"/>
-                  <a:sym typeface="29LT Bukra"/>
-                </a:rPr>
-                <a:t>iz</a:t>
-              </a:r>
-              <a:r>
-                <a:rPr lang="en-US" sz="2299" strike="noStrike" u="none">
-                  <a:solidFill>
-                    <a:srgbClr val="FFFFFF"/>
-                  </a:solidFill>
-                  <a:latin typeface="29LT Bukra"/>
-                  <a:ea typeface="29LT Bukra"/>
-                  <a:cs typeface="29LT Bukra"/>
-                  <a:sym typeface="29LT Bukra"/>
-                </a:rPr>
-                <a:t>ac</a:t>
-              </a:r>
-              <a:r>
-                <a:rPr lang="en-US" sz="2299" strike="noStrike" u="none">
-                  <a:solidFill>
-                    <a:srgbClr val="FFFFFF"/>
-                  </a:solidFill>
-                  <a:latin typeface="29LT Bukra"/>
-                  <a:ea typeface="29LT Bukra"/>
-                  <a:cs typeface="29LT Bukra"/>
-                  <a:sym typeface="29LT Bukra"/>
-                </a:rPr>
-                <a:t>i</a:t>
-              </a:r>
-              <a:r>
-                <a:rPr lang="en-US" sz="2299" strike="noStrike" u="none">
-                  <a:solidFill>
-                    <a:srgbClr val="FFFFFF"/>
-                  </a:solidFill>
-                  <a:latin typeface="29LT Bukra"/>
-                  <a:ea typeface="29LT Bukra"/>
-                  <a:cs typeface="29LT Bukra"/>
-                  <a:sym typeface="29LT Bukra"/>
-                </a:rPr>
-                <a:t>o</a:t>
-              </a:r>
-              <a:r>
-                <a:rPr lang="en-US" sz="2299" strike="noStrike" u="none">
-                  <a:solidFill>
-                    <a:srgbClr val="FFFFFF"/>
-                  </a:solidFill>
-                  <a:latin typeface="29LT Bukra"/>
-                  <a:ea typeface="29LT Bukra"/>
-                  <a:cs typeface="29LT Bukra"/>
-                  <a:sym typeface="29LT Bukra"/>
-                </a:rPr>
-                <a:t>n</a:t>
-              </a:r>
-              <a:r>
-                <a:rPr lang="en-US" sz="2299" strike="noStrike" u="none">
-                  <a:solidFill>
-                    <a:srgbClr val="FFFFFF"/>
-                  </a:solidFill>
-                  <a:latin typeface="29LT Bukra"/>
-                  <a:ea typeface="29LT Bukra"/>
-                  <a:cs typeface="29LT Bukra"/>
-                  <a:sym typeface="29LT Bukra"/>
-                </a:rPr>
-                <a:t>e</a:t>
-              </a:r>
-              <a:r>
-                <a:rPr lang="en-US" sz="2299" strike="noStrike" u="none">
-                  <a:solidFill>
-                    <a:srgbClr val="FFFFFF"/>
-                  </a:solidFill>
-                  <a:latin typeface="29LT Bukra"/>
-                  <a:ea typeface="29LT Bukra"/>
-                  <a:cs typeface="29LT Bukra"/>
-                  <a:sym typeface="29LT Bukra"/>
-                </a:rPr>
-                <a:t>s</a:t>
-              </a:r>
-              <a:r>
-                <a:rPr lang="en-US" sz="2299" strike="noStrike" u="none">
-                  <a:solidFill>
-                    <a:srgbClr val="FFFFFF"/>
-                  </a:solidFill>
-                  <a:latin typeface="29LT Bukra"/>
-                  <a:ea typeface="29LT Bukra"/>
-                  <a:cs typeface="29LT Bukra"/>
-                  <a:sym typeface="29LT Bukra"/>
-                </a:rPr>
-                <a:t> e</a:t>
-              </a:r>
-              <a:r>
-                <a:rPr lang="en-US" sz="2299" strike="noStrike" u="none">
-                  <a:solidFill>
-                    <a:srgbClr val="FFFFFF"/>
-                  </a:solidFill>
-                  <a:latin typeface="29LT Bukra"/>
-                  <a:ea typeface="29LT Bukra"/>
-                  <a:cs typeface="29LT Bukra"/>
-                  <a:sym typeface="29LT Bukra"/>
-                </a:rPr>
-                <a:t> </a:t>
-              </a:r>
-              <a:r>
-                <a:rPr lang="en-US" sz="2299" strike="noStrike" u="none">
-                  <a:solidFill>
-                    <a:srgbClr val="FFFFFF"/>
-                  </a:solidFill>
-                  <a:latin typeface="29LT Bukra"/>
-                  <a:ea typeface="29LT Bukra"/>
-                  <a:cs typeface="29LT Bukra"/>
-                  <a:sym typeface="29LT Bukra"/>
-                </a:rPr>
-                <a:t>ind</a:t>
-              </a:r>
-              <a:r>
-                <a:rPr lang="en-US" sz="2299" strike="noStrike" u="none">
-                  <a:solidFill>
-                    <a:srgbClr val="FFFFFF"/>
-                  </a:solidFill>
-                  <a:latin typeface="29LT Bukra"/>
-                  <a:ea typeface="29LT Bukra"/>
-                  <a:cs typeface="29LT Bukra"/>
-                  <a:sym typeface="29LT Bukra"/>
-                </a:rPr>
-                <a:t>icado</a:t>
-              </a:r>
-              <a:r>
-                <a:rPr lang="en-US" sz="2299" strike="noStrike" u="none">
-                  <a:solidFill>
-                    <a:srgbClr val="FFFFFF"/>
-                  </a:solidFill>
-                  <a:latin typeface="29LT Bukra"/>
-                  <a:ea typeface="29LT Bukra"/>
-                  <a:cs typeface="29LT Bukra"/>
-                  <a:sym typeface="29LT Bukra"/>
-                </a:rPr>
-                <a:t>res</a:t>
-              </a:r>
-              <a:r>
-                <a:rPr lang="en-US" sz="2299" strike="noStrike" u="none">
-                  <a:solidFill>
-                    <a:srgbClr val="FFFFFF"/>
-                  </a:solidFill>
-                  <a:latin typeface="29LT Bukra"/>
-                  <a:ea typeface="29LT Bukra"/>
-                  <a:cs typeface="29LT Bukra"/>
-                  <a:sym typeface="29LT Bukra"/>
-                </a:rPr>
-                <a:t> d</a:t>
-              </a:r>
-              <a:r>
-                <a:rPr lang="en-US" sz="2299" strike="noStrike" u="none">
-                  <a:solidFill>
-                    <a:srgbClr val="FFFFFF"/>
-                  </a:solidFill>
-                  <a:latin typeface="29LT Bukra"/>
-                  <a:ea typeface="29LT Bukra"/>
-                  <a:cs typeface="29LT Bukra"/>
-                  <a:sym typeface="29LT Bukra"/>
-                </a:rPr>
-                <a:t>e</a:t>
-              </a:r>
-              <a:r>
-                <a:rPr lang="en-US" sz="2299" strike="noStrike" u="none">
-                  <a:solidFill>
-                    <a:srgbClr val="FFFFFF"/>
-                  </a:solidFill>
-                  <a:latin typeface="29LT Bukra"/>
-                  <a:ea typeface="29LT Bukra"/>
-                  <a:cs typeface="29LT Bukra"/>
-                  <a:sym typeface="29LT Bukra"/>
-                </a:rPr>
-                <a:t>l</a:t>
-              </a:r>
-              <a:r>
-                <a:rPr lang="en-US" sz="2299" strike="noStrike" u="none">
-                  <a:solidFill>
-                    <a:srgbClr val="FFFFFF"/>
-                  </a:solidFill>
-                  <a:latin typeface="29LT Bukra"/>
-                  <a:ea typeface="29LT Bukra"/>
-                  <a:cs typeface="29LT Bukra"/>
-                  <a:sym typeface="29LT Bukra"/>
-                </a:rPr>
-                <a:t> </a:t>
-              </a:r>
-              <a:r>
-                <a:rPr lang="en-US" sz="2299" strike="noStrike" u="none">
-                  <a:solidFill>
-                    <a:srgbClr val="FFFFFF"/>
-                  </a:solidFill>
-                  <a:latin typeface="29LT Bukra"/>
-                  <a:ea typeface="29LT Bukra"/>
-                  <a:cs typeface="29LT Bukra"/>
-                  <a:sym typeface="29LT Bukra"/>
-                </a:rPr>
-                <a:t>p</a:t>
-              </a:r>
-              <a:r>
-                <a:rPr lang="en-US" sz="2299" strike="noStrike" u="none">
-                  <a:solidFill>
-                    <a:srgbClr val="FFFFFF"/>
-                  </a:solidFill>
-                  <a:latin typeface="29LT Bukra"/>
-                  <a:ea typeface="29LT Bukra"/>
-                  <a:cs typeface="29LT Bukra"/>
-                  <a:sym typeface="29LT Bukra"/>
-                </a:rPr>
-                <a:t>r</a:t>
-              </a:r>
-              <a:r>
-                <a:rPr lang="en-US" sz="2299" strike="noStrike" u="none">
-                  <a:solidFill>
-                    <a:srgbClr val="FFFFFF"/>
-                  </a:solidFill>
-                  <a:latin typeface="29LT Bukra"/>
-                  <a:ea typeface="29LT Bukra"/>
-                  <a:cs typeface="29LT Bukra"/>
-                  <a:sym typeface="29LT Bukra"/>
-                </a:rPr>
-                <a:t>oce</a:t>
-              </a:r>
-              <a:r>
-                <a:rPr lang="en-US" sz="2299" strike="noStrike" u="none">
-                  <a:solidFill>
-                    <a:srgbClr val="FFFFFF"/>
-                  </a:solidFill>
-                  <a:latin typeface="29LT Bukra"/>
-                  <a:ea typeface="29LT Bukra"/>
-                  <a:cs typeface="29LT Bukra"/>
-                  <a:sym typeface="29LT Bukra"/>
-                </a:rPr>
-                <a:t>s</a:t>
-              </a:r>
-              <a:r>
-                <a:rPr lang="en-US" sz="2299" strike="noStrike" u="none">
-                  <a:solidFill>
-                    <a:srgbClr val="FFFFFF"/>
-                  </a:solidFill>
-                  <a:latin typeface="29LT Bukra"/>
-                  <a:ea typeface="29LT Bukra"/>
-                  <a:cs typeface="29LT Bukra"/>
-                  <a:sym typeface="29LT Bukra"/>
-                </a:rPr>
-                <a:t>o</a:t>
-              </a:r>
-              <a:r>
-                <a:rPr lang="en-US" sz="2299" strike="noStrike" u="none">
-                  <a:solidFill>
-                    <a:srgbClr val="FFFFFF"/>
-                  </a:solidFill>
-                  <a:latin typeface="29LT Bukra"/>
-                  <a:ea typeface="29LT Bukra"/>
-                  <a:cs typeface="29LT Bukra"/>
-                  <a:sym typeface="29LT Bukra"/>
-                </a:rPr>
-                <a:t> </a:t>
-              </a:r>
-              <a:r>
-                <a:rPr lang="en-US" sz="2299" strike="noStrike" u="none">
-                  <a:solidFill>
-                    <a:srgbClr val="FFFFFF"/>
-                  </a:solidFill>
-                  <a:latin typeface="29LT Bukra"/>
-                  <a:ea typeface="29LT Bukra"/>
-                  <a:cs typeface="29LT Bukra"/>
-                  <a:sym typeface="29LT Bukra"/>
-                </a:rPr>
-                <a:t>de n</a:t>
-              </a:r>
-              <a:r>
-                <a:rPr lang="en-US" sz="2299" strike="noStrike" u="none">
-                  <a:solidFill>
-                    <a:srgbClr val="FFFFFF"/>
-                  </a:solidFill>
-                  <a:latin typeface="29LT Bukra"/>
-                  <a:ea typeface="29LT Bukra"/>
-                  <a:cs typeface="29LT Bukra"/>
-                  <a:sym typeface="29LT Bukra"/>
-                </a:rPr>
-                <a:t>e</a:t>
-              </a:r>
-              <a:r>
-                <a:rPr lang="en-US" sz="2299" strike="noStrike" u="none">
-                  <a:solidFill>
-                    <a:srgbClr val="FFFFFF"/>
-                  </a:solidFill>
-                  <a:latin typeface="29LT Bukra"/>
-                  <a:ea typeface="29LT Bukra"/>
-                  <a:cs typeface="29LT Bukra"/>
-                  <a:sym typeface="29LT Bukra"/>
-                </a:rPr>
-                <a:t>goci</a:t>
-              </a:r>
-              <a:r>
-                <a:rPr lang="en-US" sz="2299" strike="noStrike" u="none">
-                  <a:solidFill>
-                    <a:srgbClr val="FFFFFF"/>
-                  </a:solidFill>
-                  <a:latin typeface="29LT Bukra"/>
-                  <a:ea typeface="29LT Bukra"/>
-                  <a:cs typeface="29LT Bukra"/>
-                  <a:sym typeface="29LT Bukra"/>
-                </a:rPr>
-                <a:t>o, </a:t>
-              </a:r>
-              <a:r>
-                <a:rPr lang="en-US" sz="2299" strike="noStrike" u="none">
-                  <a:solidFill>
-                    <a:srgbClr val="FFFFFF"/>
-                  </a:solidFill>
-                  <a:latin typeface="29LT Bukra"/>
-                  <a:ea typeface="29LT Bukra"/>
-                  <a:cs typeface="29LT Bukra"/>
-                  <a:sym typeface="29LT Bukra"/>
-                </a:rPr>
-                <a:t>y elabo</a:t>
-              </a:r>
-              <a:r>
-                <a:rPr lang="en-US" sz="2299" strike="noStrike" u="none">
-                  <a:solidFill>
-                    <a:srgbClr val="FFFFFF"/>
-                  </a:solidFill>
-                  <a:latin typeface="29LT Bukra"/>
-                  <a:ea typeface="29LT Bukra"/>
-                  <a:cs typeface="29LT Bukra"/>
-                  <a:sym typeface="29LT Bukra"/>
-                </a:rPr>
-                <a:t>r</a:t>
-              </a:r>
-              <a:r>
-                <a:rPr lang="en-US" sz="2299" strike="noStrike" u="none">
-                  <a:solidFill>
-                    <a:srgbClr val="FFFFFF"/>
-                  </a:solidFill>
-                  <a:latin typeface="29LT Bukra"/>
-                  <a:ea typeface="29LT Bukra"/>
-                  <a:cs typeface="29LT Bukra"/>
-                  <a:sym typeface="29LT Bukra"/>
-                </a:rPr>
-                <a:t>ar la documentac</a:t>
-              </a:r>
-              <a:r>
-                <a:rPr lang="en-US" sz="2299" strike="noStrike" u="none">
-                  <a:solidFill>
-                    <a:srgbClr val="FFFFFF"/>
-                  </a:solidFill>
-                  <a:latin typeface="29LT Bukra"/>
-                  <a:ea typeface="29LT Bukra"/>
-                  <a:cs typeface="29LT Bukra"/>
-                  <a:sym typeface="29LT Bukra"/>
-                </a:rPr>
-                <a:t>i</a:t>
-              </a:r>
-              <a:r>
-                <a:rPr lang="en-US" sz="2299" strike="noStrike" u="none">
-                  <a:solidFill>
-                    <a:srgbClr val="FFFFFF"/>
-                  </a:solidFill>
-                  <a:latin typeface="29LT Bukra"/>
-                  <a:ea typeface="29LT Bukra"/>
-                  <a:cs typeface="29LT Bukra"/>
-                  <a:sym typeface="29LT Bukra"/>
-                </a:rPr>
-                <a:t>ó</a:t>
-              </a:r>
-              <a:r>
-                <a:rPr lang="en-US" sz="2299" strike="noStrike" u="none">
-                  <a:solidFill>
-                    <a:srgbClr val="FFFFFF"/>
-                  </a:solidFill>
-                  <a:latin typeface="29LT Bukra"/>
-                  <a:ea typeface="29LT Bukra"/>
-                  <a:cs typeface="29LT Bukra"/>
-                  <a:sym typeface="29LT Bukra"/>
-                </a:rPr>
-                <a:t>n</a:t>
-              </a:r>
-              <a:r>
-                <a:rPr lang="en-US" sz="2299" strike="noStrike" u="none">
-                  <a:solidFill>
-                    <a:srgbClr val="FFFFFF"/>
-                  </a:solidFill>
-                  <a:latin typeface="29LT Bukra"/>
-                  <a:ea typeface="29LT Bukra"/>
-                  <a:cs typeface="29LT Bukra"/>
-                  <a:sym typeface="29LT Bukra"/>
-                </a:rPr>
-                <a:t> técn</a:t>
-              </a:r>
-              <a:r>
-                <a:rPr lang="en-US" sz="2299" strike="noStrike" u="none">
-                  <a:solidFill>
-                    <a:srgbClr val="FFFFFF"/>
-                  </a:solidFill>
-                  <a:latin typeface="29LT Bukra"/>
-                  <a:ea typeface="29LT Bukra"/>
-                  <a:cs typeface="29LT Bukra"/>
-                  <a:sym typeface="29LT Bukra"/>
-                </a:rPr>
-                <a:t>i</a:t>
-              </a:r>
-              <a:r>
-                <a:rPr lang="en-US" sz="2299" strike="noStrike" u="none">
-                  <a:solidFill>
-                    <a:srgbClr val="FFFFFF"/>
-                  </a:solidFill>
-                  <a:latin typeface="29LT Bukra"/>
-                  <a:ea typeface="29LT Bukra"/>
-                  <a:cs typeface="29LT Bukra"/>
-                  <a:sym typeface="29LT Bukra"/>
-                </a:rPr>
-                <a:t>c</a:t>
-              </a:r>
-              <a:r>
-                <a:rPr lang="en-US" sz="2299" strike="noStrike" u="none">
-                  <a:solidFill>
-                    <a:srgbClr val="FFFFFF"/>
-                  </a:solidFill>
-                  <a:latin typeface="29LT Bukra"/>
-                  <a:ea typeface="29LT Bukra"/>
-                  <a:cs typeface="29LT Bukra"/>
-                  <a:sym typeface="29LT Bukra"/>
-                </a:rPr>
-                <a:t>a </a:t>
-              </a:r>
-              <a:r>
-                <a:rPr lang="en-US" sz="2299" strike="noStrike" u="none">
-                  <a:solidFill>
-                    <a:srgbClr val="FFFFFF"/>
-                  </a:solidFill>
-                  <a:latin typeface="29LT Bukra"/>
-                  <a:ea typeface="29LT Bukra"/>
-                  <a:cs typeface="29LT Bukra"/>
-                  <a:sym typeface="29LT Bukra"/>
-                </a:rPr>
-                <a:t>d</a:t>
-              </a:r>
-              <a:r>
-                <a:rPr lang="en-US" sz="2299" strike="noStrike" u="none">
-                  <a:solidFill>
-                    <a:srgbClr val="FFFFFF"/>
-                  </a:solidFill>
-                  <a:latin typeface="29LT Bukra"/>
-                  <a:ea typeface="29LT Bukra"/>
-                  <a:cs typeface="29LT Bukra"/>
-                  <a:sym typeface="29LT Bukra"/>
-                </a:rPr>
-                <a:t>e</a:t>
-              </a:r>
-              <a:r>
-                <a:rPr lang="en-US" sz="2299" strike="noStrike" u="none">
-                  <a:solidFill>
-                    <a:srgbClr val="FFFFFF"/>
-                  </a:solidFill>
-                  <a:latin typeface="29LT Bukra"/>
-                  <a:ea typeface="29LT Bukra"/>
-                  <a:cs typeface="29LT Bukra"/>
-                  <a:sym typeface="29LT Bukra"/>
-                </a:rPr>
-                <a:t>l</a:t>
-              </a:r>
-              <a:r>
-                <a:rPr lang="en-US" sz="2299" strike="noStrike" u="none">
-                  <a:solidFill>
-                    <a:srgbClr val="FFFFFF"/>
-                  </a:solidFill>
-                  <a:latin typeface="29LT Bukra"/>
-                  <a:ea typeface="29LT Bukra"/>
-                  <a:cs typeface="29LT Bukra"/>
-                  <a:sym typeface="29LT Bukra"/>
-                </a:rPr>
-                <a:t> </a:t>
-              </a:r>
-              <a:r>
-                <a:rPr lang="en-US" sz="2299" strike="noStrike" u="none">
-                  <a:solidFill>
-                    <a:srgbClr val="FFFFFF"/>
-                  </a:solidFill>
-                  <a:latin typeface="29LT Bukra"/>
-                  <a:ea typeface="29LT Bukra"/>
-                  <a:cs typeface="29LT Bukra"/>
-                  <a:sym typeface="29LT Bukra"/>
-                </a:rPr>
-                <a:t>s</a:t>
-              </a:r>
-              <a:r>
-                <a:rPr lang="en-US" sz="2299" strike="noStrike" u="none">
-                  <a:solidFill>
-                    <a:srgbClr val="FFFFFF"/>
-                  </a:solidFill>
-                  <a:latin typeface="29LT Bukra"/>
-                  <a:ea typeface="29LT Bukra"/>
-                  <a:cs typeface="29LT Bukra"/>
-                  <a:sym typeface="29LT Bukra"/>
-                </a:rPr>
-                <a:t>is</a:t>
-              </a:r>
-              <a:r>
-                <a:rPr lang="en-US" sz="2299" strike="noStrike" u="none">
-                  <a:solidFill>
-                    <a:srgbClr val="FFFFFF"/>
-                  </a:solidFill>
-                  <a:latin typeface="29LT Bukra"/>
-                  <a:ea typeface="29LT Bukra"/>
-                  <a:cs typeface="29LT Bukra"/>
-                  <a:sym typeface="29LT Bukra"/>
-                </a:rPr>
-                <a:t>te</a:t>
-              </a:r>
-              <a:r>
-                <a:rPr lang="en-US" sz="2299" strike="noStrike" u="none">
-                  <a:solidFill>
-                    <a:srgbClr val="FFFFFF"/>
-                  </a:solidFill>
-                  <a:latin typeface="29LT Bukra"/>
-                  <a:ea typeface="29LT Bukra"/>
-                  <a:cs typeface="29LT Bukra"/>
-                  <a:sym typeface="29LT Bukra"/>
-                </a:rPr>
-                <a:t>m</a:t>
-              </a:r>
-              <a:r>
-                <a:rPr lang="en-US" sz="2299" strike="noStrike" u="none">
-                  <a:solidFill>
-                    <a:srgbClr val="FFFFFF"/>
-                  </a:solidFill>
-                  <a:latin typeface="29LT Bukra"/>
-                  <a:ea typeface="29LT Bukra"/>
-                  <a:cs typeface="29LT Bukra"/>
-                  <a:sym typeface="29LT Bukra"/>
-                </a:rPr>
-                <a:t>a</a:t>
+                <a:t>ista de Datos y Dashboard: encargado de conectar la BD a la herramienta BI seleccionada, diseñar el Dashboard con las visualizaciones e indicadores del proceso de negocio, y elaborar la documentación técnica del sistema</a:t>
               </a:r>
             </a:p>
           </p:txBody>
@@ -6239,12 +5165,12 @@
       </p:grpSp>
       <p:grpSp>
         <p:nvGrpSpPr>
-          <p:cNvPr name="Group 7" id="7"/>
+          <p:cNvPr id="7" name="Group 7"/>
           <p:cNvGrpSpPr/>
           <p:nvPr/>
         </p:nvGrpSpPr>
         <p:grpSpPr>
-          <a:xfrm rot="0">
+          <a:xfrm>
             <a:off x="4934665" y="3316885"/>
             <a:ext cx="3544015" cy="5541365"/>
             <a:chOff x="0" y="0"/>
@@ -6253,12 +5179,12 @@
         </p:grpSpPr>
         <p:sp>
           <p:nvSpPr>
-            <p:cNvPr name="TextBox 8" id="8"/>
-            <p:cNvSpPr txBox="true"/>
+            <p:cNvPr id="8" name="TextBox 8"/>
+            <p:cNvSpPr txBox="1"/>
             <p:nvPr/>
           </p:nvSpPr>
           <p:spPr>
-            <a:xfrm rot="0">
+            <a:xfrm>
               <a:off x="0" y="-142875"/>
               <a:ext cx="4725353" cy="1883622"/>
             </a:xfrm>
@@ -6267,12 +5193,12 @@
             </a:prstGeom>
           </p:spPr>
           <p:txBody>
-            <a:bodyPr anchor="t" rtlCol="false" tIns="0" lIns="0" bIns="0" rIns="0">
+            <a:bodyPr lIns="0" tIns="0" rIns="0" bIns="0" rtlCol="0" anchor="t">
               <a:spAutoFit/>
             </a:bodyPr>
             <a:lstStyle/>
             <a:p>
-              <a:pPr algn="ctr" marL="0" indent="0" lvl="0">
+              <a:pPr marL="0" lvl="0" indent="0" algn="ctr">
                 <a:lnSpc>
                   <a:spcPts val="3639"/>
                 </a:lnSpc>
@@ -6281,7 +5207,7 @@
                 </a:spcBef>
               </a:pPr>
               <a:r>
-                <a:rPr lang="en-US" b="true" sz="2599">
+                <a:rPr lang="en-US" sz="2599" b="1">
                   <a:solidFill>
                     <a:srgbClr val="FFFFFF"/>
                   </a:solidFill>
@@ -6290,31 +5216,19 @@
                   <a:cs typeface="29LT Bukra Bold"/>
                   <a:sym typeface="29LT Bukra Bold"/>
                 </a:rPr>
-                <a:t>JARA</a:t>
-              </a:r>
-              <a:r>
-                <a:rPr lang="en-US" b="true" sz="2599">
-                  <a:solidFill>
-                    <a:srgbClr val="FFFFFF"/>
-                  </a:solidFill>
-                  <a:latin typeface="29LT Bukra Bold"/>
-                  <a:ea typeface="29LT Bukra Bold"/>
-                  <a:cs typeface="29LT Bukra Bold"/>
-                  <a:sym typeface="29LT Bukra Bold"/>
-                </a:rPr>
-                <a:t> NUÑEZ DANIEL ALEJANDRO</a:t>
+                <a:t>JARA NUÑEZ DANIEL ALEJANDRO</a:t>
               </a:r>
             </a:p>
           </p:txBody>
         </p:sp>
         <p:sp>
           <p:nvSpPr>
-            <p:cNvPr name="TextBox 9" id="9"/>
-            <p:cNvSpPr txBox="true"/>
+            <p:cNvPr id="9" name="TextBox 9"/>
+            <p:cNvSpPr txBox="1"/>
             <p:nvPr/>
           </p:nvSpPr>
           <p:spPr>
-            <a:xfrm rot="0">
+            <a:xfrm>
               <a:off x="0" y="2008555"/>
               <a:ext cx="4725353" cy="5379932"/>
             </a:xfrm>
@@ -6323,12 +5237,12 @@
             </a:prstGeom>
           </p:spPr>
           <p:txBody>
-            <a:bodyPr anchor="t" rtlCol="false" tIns="0" lIns="0" bIns="0" rIns="0">
+            <a:bodyPr lIns="0" tIns="0" rIns="0" bIns="0" rtlCol="0" anchor="t">
               <a:spAutoFit/>
             </a:bodyPr>
             <a:lstStyle/>
             <a:p>
-              <a:pPr algn="ctr" marL="0" indent="0" lvl="0">
+              <a:pPr marL="0" lvl="0" indent="0" algn="ctr">
                 <a:lnSpc>
                   <a:spcPts val="3219"/>
                 </a:lnSpc>
@@ -6349,7 +5263,7 @@
                 <a:t>A</a:t>
               </a:r>
               <a:r>
-                <a:rPr lang="en-US" sz="2299" strike="noStrike" u="none">
+                <a:rPr lang="en-US" sz="2299" u="none" strike="noStrike">
                   <a:solidFill>
                     <a:srgbClr val="FFFFFF"/>
                   </a:solidFill>
@@ -6358,751 +5272,7 @@
                   <a:cs typeface="29LT Bukra"/>
                   <a:sym typeface="29LT Bukra"/>
                 </a:rPr>
-                <a:t>r</a:t>
-              </a:r>
-              <a:r>
-                <a:rPr lang="en-US" sz="2299" strike="noStrike" u="none">
-                  <a:solidFill>
-                    <a:srgbClr val="FFFFFF"/>
-                  </a:solidFill>
-                  <a:latin typeface="29LT Bukra"/>
-                  <a:ea typeface="29LT Bukra"/>
-                  <a:cs typeface="29LT Bukra"/>
-                  <a:sym typeface="29LT Bukra"/>
-                </a:rPr>
-                <a:t>quit</a:t>
-              </a:r>
-              <a:r>
-                <a:rPr lang="en-US" sz="2299" strike="noStrike" u="none">
-                  <a:solidFill>
-                    <a:srgbClr val="FFFFFF"/>
-                  </a:solidFill>
-                  <a:latin typeface="29LT Bukra"/>
-                  <a:ea typeface="29LT Bukra"/>
-                  <a:cs typeface="29LT Bukra"/>
-                  <a:sym typeface="29LT Bukra"/>
-                </a:rPr>
-                <a:t>e</a:t>
-              </a:r>
-              <a:r>
-                <a:rPr lang="en-US" sz="2299" strike="noStrike" u="none">
-                  <a:solidFill>
-                    <a:srgbClr val="FFFFFF"/>
-                  </a:solidFill>
-                  <a:latin typeface="29LT Bukra"/>
-                  <a:ea typeface="29LT Bukra"/>
-                  <a:cs typeface="29LT Bukra"/>
-                  <a:sym typeface="29LT Bukra"/>
-                </a:rPr>
-                <a:t>cto</a:t>
-              </a:r>
-              <a:r>
-                <a:rPr lang="en-US" sz="2299" strike="noStrike" u="none">
-                  <a:solidFill>
-                    <a:srgbClr val="FFFFFF"/>
-                  </a:solidFill>
-                  <a:latin typeface="29LT Bukra"/>
-                  <a:ea typeface="29LT Bukra"/>
-                  <a:cs typeface="29LT Bukra"/>
-                  <a:sym typeface="29LT Bukra"/>
-                </a:rPr>
-                <a:t> </a:t>
-              </a:r>
-              <a:r>
-                <a:rPr lang="en-US" sz="2299" strike="noStrike" u="none">
-                  <a:solidFill>
-                    <a:srgbClr val="FFFFFF"/>
-                  </a:solidFill>
-                  <a:latin typeface="29LT Bukra"/>
-                  <a:ea typeface="29LT Bukra"/>
-                  <a:cs typeface="29LT Bukra"/>
-                  <a:sym typeface="29LT Bukra"/>
-                </a:rPr>
-                <a:t>de Ba</a:t>
-              </a:r>
-              <a:r>
-                <a:rPr lang="en-US" sz="2299" strike="noStrike" u="none">
-                  <a:solidFill>
-                    <a:srgbClr val="FFFFFF"/>
-                  </a:solidFill>
-                  <a:latin typeface="29LT Bukra"/>
-                  <a:ea typeface="29LT Bukra"/>
-                  <a:cs typeface="29LT Bukra"/>
-                  <a:sym typeface="29LT Bukra"/>
-                </a:rPr>
-                <a:t>s</a:t>
-              </a:r>
-              <a:r>
-                <a:rPr lang="en-US" sz="2299" strike="noStrike" u="none">
-                  <a:solidFill>
-                    <a:srgbClr val="FFFFFF"/>
-                  </a:solidFill>
-                  <a:latin typeface="29LT Bukra"/>
-                  <a:ea typeface="29LT Bukra"/>
-                  <a:cs typeface="29LT Bukra"/>
-                  <a:sym typeface="29LT Bukra"/>
-                </a:rPr>
-                <a:t>e</a:t>
-              </a:r>
-              <a:r>
-                <a:rPr lang="en-US" sz="2299" strike="noStrike" u="none">
-                  <a:solidFill>
-                    <a:srgbClr val="FFFFFF"/>
-                  </a:solidFill>
-                  <a:latin typeface="29LT Bukra"/>
-                  <a:ea typeface="29LT Bukra"/>
-                  <a:cs typeface="29LT Bukra"/>
-                  <a:sym typeface="29LT Bukra"/>
-                </a:rPr>
-                <a:t> d</a:t>
-              </a:r>
-              <a:r>
-                <a:rPr lang="en-US" sz="2299" strike="noStrike" u="none">
-                  <a:solidFill>
-                    <a:srgbClr val="FFFFFF"/>
-                  </a:solidFill>
-                  <a:latin typeface="29LT Bukra"/>
-                  <a:ea typeface="29LT Bukra"/>
-                  <a:cs typeface="29LT Bukra"/>
-                  <a:sym typeface="29LT Bukra"/>
-                </a:rPr>
-                <a:t>e Dat</a:t>
-              </a:r>
-              <a:r>
-                <a:rPr lang="en-US" sz="2299" strike="noStrike" u="none">
-                  <a:solidFill>
-                    <a:srgbClr val="FFFFFF"/>
-                  </a:solidFill>
-                  <a:latin typeface="29LT Bukra"/>
-                  <a:ea typeface="29LT Bukra"/>
-                  <a:cs typeface="29LT Bukra"/>
-                  <a:sym typeface="29LT Bukra"/>
-                </a:rPr>
-                <a:t>o</a:t>
-              </a:r>
-              <a:r>
-                <a:rPr lang="en-US" sz="2299" strike="noStrike" u="none">
-                  <a:solidFill>
-                    <a:srgbClr val="FFFFFF"/>
-                  </a:solidFill>
-                  <a:latin typeface="29LT Bukra"/>
-                  <a:ea typeface="29LT Bukra"/>
-                  <a:cs typeface="29LT Bukra"/>
-                  <a:sym typeface="29LT Bukra"/>
-                </a:rPr>
-                <a:t>s: resp</a:t>
-              </a:r>
-              <a:r>
-                <a:rPr lang="en-US" sz="2299" strike="noStrike" u="none">
-                  <a:solidFill>
-                    <a:srgbClr val="FFFFFF"/>
-                  </a:solidFill>
-                  <a:latin typeface="29LT Bukra"/>
-                  <a:ea typeface="29LT Bukra"/>
-                  <a:cs typeface="29LT Bukra"/>
-                  <a:sym typeface="29LT Bukra"/>
-                </a:rPr>
-                <a:t>o</a:t>
-              </a:r>
-              <a:r>
-                <a:rPr lang="en-US" sz="2299" strike="noStrike" u="none">
-                  <a:solidFill>
-                    <a:srgbClr val="FFFFFF"/>
-                  </a:solidFill>
-                  <a:latin typeface="29LT Bukra"/>
-                  <a:ea typeface="29LT Bukra"/>
-                  <a:cs typeface="29LT Bukra"/>
-                  <a:sym typeface="29LT Bukra"/>
-                </a:rPr>
-                <a:t>nsable</a:t>
-              </a:r>
-              <a:r>
-                <a:rPr lang="en-US" sz="2299" strike="noStrike" u="none">
-                  <a:solidFill>
-                    <a:srgbClr val="FFFFFF"/>
-                  </a:solidFill>
-                  <a:latin typeface="29LT Bukra"/>
-                  <a:ea typeface="29LT Bukra"/>
-                  <a:cs typeface="29LT Bukra"/>
-                  <a:sym typeface="29LT Bukra"/>
-                </a:rPr>
-                <a:t> </a:t>
-              </a:r>
-              <a:r>
-                <a:rPr lang="en-US" sz="2299" strike="noStrike" u="none">
-                  <a:solidFill>
-                    <a:srgbClr val="FFFFFF"/>
-                  </a:solidFill>
-                  <a:latin typeface="29LT Bukra"/>
-                  <a:ea typeface="29LT Bukra"/>
-                  <a:cs typeface="29LT Bukra"/>
-                  <a:sym typeface="29LT Bukra"/>
-                </a:rPr>
-                <a:t>del</a:t>
-              </a:r>
-              <a:r>
-                <a:rPr lang="en-US" sz="2299" strike="noStrike" u="none">
-                  <a:solidFill>
-                    <a:srgbClr val="FFFFFF"/>
-                  </a:solidFill>
-                  <a:latin typeface="29LT Bukra"/>
-                  <a:ea typeface="29LT Bukra"/>
-                  <a:cs typeface="29LT Bukra"/>
-                  <a:sym typeface="29LT Bukra"/>
-                </a:rPr>
-                <a:t> m</a:t>
-              </a:r>
-              <a:r>
-                <a:rPr lang="en-US" sz="2299" strike="noStrike" u="none">
-                  <a:solidFill>
-                    <a:srgbClr val="FFFFFF"/>
-                  </a:solidFill>
-                  <a:latin typeface="29LT Bukra"/>
-                  <a:ea typeface="29LT Bukra"/>
-                  <a:cs typeface="29LT Bukra"/>
-                  <a:sym typeface="29LT Bukra"/>
-                </a:rPr>
-                <a:t>od</a:t>
-              </a:r>
-              <a:r>
-                <a:rPr lang="en-US" sz="2299" strike="noStrike" u="none">
-                  <a:solidFill>
-                    <a:srgbClr val="FFFFFF"/>
-                  </a:solidFill>
-                  <a:latin typeface="29LT Bukra"/>
-                  <a:ea typeface="29LT Bukra"/>
-                  <a:cs typeface="29LT Bukra"/>
-                  <a:sym typeface="29LT Bukra"/>
-                </a:rPr>
-                <a:t>e</a:t>
-              </a:r>
-              <a:r>
-                <a:rPr lang="en-US" sz="2299" strike="noStrike" u="none">
-                  <a:solidFill>
-                    <a:srgbClr val="FFFFFF"/>
-                  </a:solidFill>
-                  <a:latin typeface="29LT Bukra"/>
-                  <a:ea typeface="29LT Bukra"/>
-                  <a:cs typeface="29LT Bukra"/>
-                  <a:sym typeface="29LT Bukra"/>
-                </a:rPr>
-                <a:t>lo</a:t>
-              </a:r>
-              <a:r>
-                <a:rPr lang="en-US" sz="2299" strike="noStrike" u="none">
-                  <a:solidFill>
-                    <a:srgbClr val="FFFFFF"/>
-                  </a:solidFill>
-                  <a:latin typeface="29LT Bukra"/>
-                  <a:ea typeface="29LT Bukra"/>
-                  <a:cs typeface="29LT Bukra"/>
-                  <a:sym typeface="29LT Bukra"/>
-                </a:rPr>
-                <a:t> conce</a:t>
-              </a:r>
-              <a:r>
-                <a:rPr lang="en-US" sz="2299" strike="noStrike" u="none">
-                  <a:solidFill>
-                    <a:srgbClr val="FFFFFF"/>
-                  </a:solidFill>
-                  <a:latin typeface="29LT Bukra"/>
-                  <a:ea typeface="29LT Bukra"/>
-                  <a:cs typeface="29LT Bukra"/>
-                  <a:sym typeface="29LT Bukra"/>
-                </a:rPr>
-                <a:t>p</a:t>
-              </a:r>
-              <a:r>
-                <a:rPr lang="en-US" sz="2299" strike="noStrike" u="none">
-                  <a:solidFill>
-                    <a:srgbClr val="FFFFFF"/>
-                  </a:solidFill>
-                  <a:latin typeface="29LT Bukra"/>
-                  <a:ea typeface="29LT Bukra"/>
-                  <a:cs typeface="29LT Bukra"/>
-                  <a:sym typeface="29LT Bukra"/>
-                </a:rPr>
-                <a:t>tual </a:t>
-              </a:r>
-              <a:r>
-                <a:rPr lang="en-US" sz="2299" strike="noStrike" u="none">
-                  <a:solidFill>
-                    <a:srgbClr val="FFFFFF"/>
-                  </a:solidFill>
-                  <a:latin typeface="29LT Bukra"/>
-                  <a:ea typeface="29LT Bukra"/>
-                  <a:cs typeface="29LT Bukra"/>
-                  <a:sym typeface="29LT Bukra"/>
-                </a:rPr>
-                <a:t>(DER),</a:t>
-              </a:r>
-              <a:r>
-                <a:rPr lang="en-US" sz="2299" strike="noStrike" u="none">
-                  <a:solidFill>
-                    <a:srgbClr val="FFFFFF"/>
-                  </a:solidFill>
-                  <a:latin typeface="29LT Bukra"/>
-                  <a:ea typeface="29LT Bukra"/>
-                  <a:cs typeface="29LT Bukra"/>
-                  <a:sym typeface="29LT Bukra"/>
-                </a:rPr>
-                <a:t> m</a:t>
-              </a:r>
-              <a:r>
-                <a:rPr lang="en-US" sz="2299" strike="noStrike" u="none">
-                  <a:solidFill>
-                    <a:srgbClr val="FFFFFF"/>
-                  </a:solidFill>
-                  <a:latin typeface="29LT Bukra"/>
-                  <a:ea typeface="29LT Bukra"/>
-                  <a:cs typeface="29LT Bukra"/>
-                  <a:sym typeface="29LT Bukra"/>
-                </a:rPr>
-                <a:t>od</a:t>
-              </a:r>
-              <a:r>
-                <a:rPr lang="en-US" sz="2299" strike="noStrike" u="none">
-                  <a:solidFill>
-                    <a:srgbClr val="FFFFFF"/>
-                  </a:solidFill>
-                  <a:latin typeface="29LT Bukra"/>
-                  <a:ea typeface="29LT Bukra"/>
-                  <a:cs typeface="29LT Bukra"/>
-                  <a:sym typeface="29LT Bukra"/>
-                </a:rPr>
-                <a:t>el</a:t>
-              </a:r>
-              <a:r>
-                <a:rPr lang="en-US" sz="2299" strike="noStrike" u="none">
-                  <a:solidFill>
-                    <a:srgbClr val="FFFFFF"/>
-                  </a:solidFill>
-                  <a:latin typeface="29LT Bukra"/>
-                  <a:ea typeface="29LT Bukra"/>
-                  <a:cs typeface="29LT Bukra"/>
-                  <a:sym typeface="29LT Bukra"/>
-                </a:rPr>
-                <a:t>o</a:t>
-              </a:r>
-              <a:r>
-                <a:rPr lang="en-US" sz="2299" strike="noStrike" u="none">
-                  <a:solidFill>
-                    <a:srgbClr val="FFFFFF"/>
-                  </a:solidFill>
-                  <a:latin typeface="29LT Bukra"/>
-                  <a:ea typeface="29LT Bukra"/>
-                  <a:cs typeface="29LT Bukra"/>
-                  <a:sym typeface="29LT Bukra"/>
-                </a:rPr>
-                <a:t> l</a:t>
-              </a:r>
-              <a:r>
-                <a:rPr lang="en-US" sz="2299" strike="noStrike" u="none">
-                  <a:solidFill>
-                    <a:srgbClr val="FFFFFF"/>
-                  </a:solidFill>
-                  <a:latin typeface="29LT Bukra"/>
-                  <a:ea typeface="29LT Bukra"/>
-                  <a:cs typeface="29LT Bukra"/>
-                  <a:sym typeface="29LT Bukra"/>
-                </a:rPr>
-                <a:t>ógi</a:t>
-              </a:r>
-              <a:r>
-                <a:rPr lang="en-US" sz="2299" strike="noStrike" u="none">
-                  <a:solidFill>
-                    <a:srgbClr val="FFFFFF"/>
-                  </a:solidFill>
-                  <a:latin typeface="29LT Bukra"/>
-                  <a:ea typeface="29LT Bukra"/>
-                  <a:cs typeface="29LT Bukra"/>
-                  <a:sym typeface="29LT Bukra"/>
-                </a:rPr>
-                <a:t>co </a:t>
-              </a:r>
-              <a:r>
-                <a:rPr lang="en-US" sz="2299" strike="noStrike" u="none">
-                  <a:solidFill>
-                    <a:srgbClr val="FFFFFF"/>
-                  </a:solidFill>
-                  <a:latin typeface="29LT Bukra"/>
-                  <a:ea typeface="29LT Bukra"/>
-                  <a:cs typeface="29LT Bukra"/>
-                  <a:sym typeface="29LT Bukra"/>
-                </a:rPr>
-                <a:t>(norma</a:t>
-              </a:r>
-              <a:r>
-                <a:rPr lang="en-US" sz="2299" strike="noStrike" u="none">
-                  <a:solidFill>
-                    <a:srgbClr val="FFFFFF"/>
-                  </a:solidFill>
-                  <a:latin typeface="29LT Bukra"/>
-                  <a:ea typeface="29LT Bukra"/>
-                  <a:cs typeface="29LT Bukra"/>
-                  <a:sym typeface="29LT Bukra"/>
-                </a:rPr>
-                <a:t>li</a:t>
-              </a:r>
-              <a:r>
-                <a:rPr lang="en-US" sz="2299" strike="noStrike" u="none">
-                  <a:solidFill>
-                    <a:srgbClr val="FFFFFF"/>
-                  </a:solidFill>
-                  <a:latin typeface="29LT Bukra"/>
-                  <a:ea typeface="29LT Bukra"/>
-                  <a:cs typeface="29LT Bukra"/>
-                  <a:sym typeface="29LT Bukra"/>
-                </a:rPr>
-                <a:t>zació</a:t>
-              </a:r>
-              <a:r>
-                <a:rPr lang="en-US" sz="2299" strike="noStrike" u="none">
-                  <a:solidFill>
-                    <a:srgbClr val="FFFFFF"/>
-                  </a:solidFill>
-                  <a:latin typeface="29LT Bukra"/>
-                  <a:ea typeface="29LT Bukra"/>
-                  <a:cs typeface="29LT Bukra"/>
-                  <a:sym typeface="29LT Bukra"/>
-                </a:rPr>
-                <a:t>n</a:t>
-              </a:r>
-              <a:r>
-                <a:rPr lang="en-US" sz="2299" strike="noStrike" u="none">
-                  <a:solidFill>
-                    <a:srgbClr val="FFFFFF"/>
-                  </a:solidFill>
-                  <a:latin typeface="29LT Bukra"/>
-                  <a:ea typeface="29LT Bukra"/>
-                  <a:cs typeface="29LT Bukra"/>
-                  <a:sym typeface="29LT Bukra"/>
-                </a:rPr>
-                <a:t>) y mo</a:t>
-              </a:r>
-              <a:r>
-                <a:rPr lang="en-US" sz="2299" strike="noStrike" u="none">
-                  <a:solidFill>
-                    <a:srgbClr val="FFFFFF"/>
-                  </a:solidFill>
-                  <a:latin typeface="29LT Bukra"/>
-                  <a:ea typeface="29LT Bukra"/>
-                  <a:cs typeface="29LT Bukra"/>
-                  <a:sym typeface="29LT Bukra"/>
-                </a:rPr>
-                <a:t>d</a:t>
-              </a:r>
-              <a:r>
-                <a:rPr lang="en-US" sz="2299" strike="noStrike" u="none">
-                  <a:solidFill>
-                    <a:srgbClr val="FFFFFF"/>
-                  </a:solidFill>
-                  <a:latin typeface="29LT Bukra"/>
-                  <a:ea typeface="29LT Bukra"/>
-                  <a:cs typeface="29LT Bukra"/>
-                  <a:sym typeface="29LT Bukra"/>
-                </a:rPr>
-                <a:t>elo</a:t>
-              </a:r>
-              <a:r>
-                <a:rPr lang="en-US" sz="2299" strike="noStrike" u="none">
-                  <a:solidFill>
-                    <a:srgbClr val="FFFFFF"/>
-                  </a:solidFill>
-                  <a:latin typeface="29LT Bukra"/>
-                  <a:ea typeface="29LT Bukra"/>
-                  <a:cs typeface="29LT Bukra"/>
-                  <a:sym typeface="29LT Bukra"/>
-                </a:rPr>
-                <a:t> </a:t>
-              </a:r>
-              <a:r>
-                <a:rPr lang="en-US" sz="2299" strike="noStrike" u="none">
-                  <a:solidFill>
-                    <a:srgbClr val="FFFFFF"/>
-                  </a:solidFill>
-                  <a:latin typeface="29LT Bukra"/>
-                  <a:ea typeface="29LT Bukra"/>
-                  <a:cs typeface="29LT Bukra"/>
-                  <a:sym typeface="29LT Bukra"/>
-                </a:rPr>
-                <a:t>fí</a:t>
-              </a:r>
-              <a:r>
-                <a:rPr lang="en-US" sz="2299" strike="noStrike" u="none">
-                  <a:solidFill>
-                    <a:srgbClr val="FFFFFF"/>
-                  </a:solidFill>
-                  <a:latin typeface="29LT Bukra"/>
-                  <a:ea typeface="29LT Bukra"/>
-                  <a:cs typeface="29LT Bukra"/>
-                  <a:sym typeface="29LT Bukra"/>
-                </a:rPr>
-                <a:t>s</a:t>
-              </a:r>
-              <a:r>
-                <a:rPr lang="en-US" sz="2299" strike="noStrike" u="none">
-                  <a:solidFill>
-                    <a:srgbClr val="FFFFFF"/>
-                  </a:solidFill>
-                  <a:latin typeface="29LT Bukra"/>
-                  <a:ea typeface="29LT Bukra"/>
-                  <a:cs typeface="29LT Bukra"/>
-                  <a:sym typeface="29LT Bukra"/>
-                </a:rPr>
-                <a:t>ico</a:t>
-              </a:r>
-              <a:r>
-                <a:rPr lang="en-US" sz="2299" strike="noStrike" u="none">
-                  <a:solidFill>
-                    <a:srgbClr val="FFFFFF"/>
-                  </a:solidFill>
-                  <a:latin typeface="29LT Bukra"/>
-                  <a:ea typeface="29LT Bukra"/>
-                  <a:cs typeface="29LT Bukra"/>
-                  <a:sym typeface="29LT Bukra"/>
-                </a:rPr>
-                <a:t> </a:t>
-              </a:r>
-              <a:r>
-                <a:rPr lang="en-US" sz="2299" strike="noStrike" u="none">
-                  <a:solidFill>
-                    <a:srgbClr val="FFFFFF"/>
-                  </a:solidFill>
-                  <a:latin typeface="29LT Bukra"/>
-                  <a:ea typeface="29LT Bukra"/>
-                  <a:cs typeface="29LT Bukra"/>
-                  <a:sym typeface="29LT Bukra"/>
-                </a:rPr>
-                <a:t>(DDL: f</a:t>
-              </a:r>
-              <a:r>
-                <a:rPr lang="en-US" sz="2299" strike="noStrike" u="none">
-                  <a:solidFill>
-                    <a:srgbClr val="FFFFFF"/>
-                  </a:solidFill>
-                  <a:latin typeface="29LT Bukra"/>
-                  <a:ea typeface="29LT Bukra"/>
-                  <a:cs typeface="29LT Bukra"/>
-                  <a:sym typeface="29LT Bukra"/>
-                </a:rPr>
-                <a:t>ile</a:t>
-              </a:r>
-              <a:r>
-                <a:rPr lang="en-US" sz="2299" strike="noStrike" u="none">
-                  <a:solidFill>
-                    <a:srgbClr val="FFFFFF"/>
-                  </a:solidFill>
-                  <a:latin typeface="29LT Bukra"/>
-                  <a:ea typeface="29LT Bukra"/>
-                  <a:cs typeface="29LT Bukra"/>
-                  <a:sym typeface="29LT Bukra"/>
-                </a:rPr>
-                <a:t>gr</a:t>
-              </a:r>
-              <a:r>
-                <a:rPr lang="en-US" sz="2299" strike="noStrike" u="none">
-                  <a:solidFill>
-                    <a:srgbClr val="FFFFFF"/>
-                  </a:solidFill>
-                  <a:latin typeface="29LT Bukra"/>
-                  <a:ea typeface="29LT Bukra"/>
-                  <a:cs typeface="29LT Bukra"/>
-                  <a:sym typeface="29LT Bukra"/>
-                </a:rPr>
-                <a:t>o</a:t>
-              </a:r>
-              <a:r>
-                <a:rPr lang="en-US" sz="2299" strike="noStrike" u="none">
-                  <a:solidFill>
-                    <a:srgbClr val="FFFFFF"/>
-                  </a:solidFill>
-                  <a:latin typeface="29LT Bukra"/>
-                  <a:ea typeface="29LT Bukra"/>
-                  <a:cs typeface="29LT Bukra"/>
-                  <a:sym typeface="29LT Bukra"/>
-                </a:rPr>
-                <a:t>ups</a:t>
-              </a:r>
-              <a:r>
-                <a:rPr lang="en-US" sz="2299" strike="noStrike" u="none">
-                  <a:solidFill>
-                    <a:srgbClr val="FFFFFF"/>
-                  </a:solidFill>
-                  <a:latin typeface="29LT Bukra"/>
-                  <a:ea typeface="29LT Bukra"/>
-                  <a:cs typeface="29LT Bukra"/>
-                  <a:sym typeface="29LT Bukra"/>
-                </a:rPr>
-                <a:t>, </a:t>
-              </a:r>
-              <a:r>
-                <a:rPr lang="en-US" sz="2299" strike="noStrike" u="none">
-                  <a:solidFill>
-                    <a:srgbClr val="FFFFFF"/>
-                  </a:solidFill>
-                  <a:latin typeface="29LT Bukra"/>
-                  <a:ea typeface="29LT Bukra"/>
-                  <a:cs typeface="29LT Bukra"/>
-                  <a:sym typeface="29LT Bukra"/>
-                </a:rPr>
-                <a:t>data</a:t>
-              </a:r>
-              <a:r>
-                <a:rPr lang="en-US" sz="2299" strike="noStrike" u="none">
-                  <a:solidFill>
-                    <a:srgbClr val="FFFFFF"/>
-                  </a:solidFill>
-                  <a:latin typeface="29LT Bukra"/>
-                  <a:ea typeface="29LT Bukra"/>
-                  <a:cs typeface="29LT Bukra"/>
-                  <a:sym typeface="29LT Bukra"/>
-                </a:rPr>
-                <a:t>fil</a:t>
-              </a:r>
-              <a:r>
-                <a:rPr lang="en-US" sz="2299" strike="noStrike" u="none">
-                  <a:solidFill>
-                    <a:srgbClr val="FFFFFF"/>
-                  </a:solidFill>
-                  <a:latin typeface="29LT Bukra"/>
-                  <a:ea typeface="29LT Bukra"/>
-                  <a:cs typeface="29LT Bukra"/>
-                  <a:sym typeface="29LT Bukra"/>
-                </a:rPr>
-                <a:t>es, tab</a:t>
-              </a:r>
-              <a:r>
-                <a:rPr lang="en-US" sz="2299" strike="noStrike" u="none">
-                  <a:solidFill>
-                    <a:srgbClr val="FFFFFF"/>
-                  </a:solidFill>
-                  <a:latin typeface="29LT Bukra"/>
-                  <a:ea typeface="29LT Bukra"/>
-                  <a:cs typeface="29LT Bukra"/>
-                  <a:sym typeface="29LT Bukra"/>
-                </a:rPr>
-                <a:t>la</a:t>
-              </a:r>
-              <a:r>
-                <a:rPr lang="en-US" sz="2299" strike="noStrike" u="none">
-                  <a:solidFill>
-                    <a:srgbClr val="FFFFFF"/>
-                  </a:solidFill>
-                  <a:latin typeface="29LT Bukra"/>
-                  <a:ea typeface="29LT Bukra"/>
-                  <a:cs typeface="29LT Bukra"/>
-                  <a:sym typeface="29LT Bukra"/>
-                </a:rPr>
-                <a:t>s,</a:t>
-              </a:r>
-              <a:r>
-                <a:rPr lang="en-US" sz="2299" strike="noStrike" u="none">
-                  <a:solidFill>
-                    <a:srgbClr val="FFFFFF"/>
-                  </a:solidFill>
-                  <a:latin typeface="29LT Bukra"/>
-                  <a:ea typeface="29LT Bukra"/>
-                  <a:cs typeface="29LT Bukra"/>
-                  <a:sym typeface="29LT Bukra"/>
-                </a:rPr>
-                <a:t> </a:t>
-              </a:r>
-              <a:r>
-                <a:rPr lang="en-US" sz="2299" strike="noStrike" u="none">
-                  <a:solidFill>
-                    <a:srgbClr val="FFFFFF"/>
-                  </a:solidFill>
-                  <a:latin typeface="29LT Bukra"/>
-                  <a:ea typeface="29LT Bukra"/>
-                  <a:cs typeface="29LT Bukra"/>
-                  <a:sym typeface="29LT Bukra"/>
-                </a:rPr>
-                <a:t>cons</a:t>
-              </a:r>
-              <a:r>
-                <a:rPr lang="en-US" sz="2299" strike="noStrike" u="none">
-                  <a:solidFill>
-                    <a:srgbClr val="FFFFFF"/>
-                  </a:solidFill>
-                  <a:latin typeface="29LT Bukra"/>
-                  <a:ea typeface="29LT Bukra"/>
-                  <a:cs typeface="29LT Bukra"/>
-                  <a:sym typeface="29LT Bukra"/>
-                </a:rPr>
-                <a:t>t</a:t>
-              </a:r>
-              <a:r>
-                <a:rPr lang="en-US" sz="2299" strike="noStrike" u="none">
-                  <a:solidFill>
-                    <a:srgbClr val="FFFFFF"/>
-                  </a:solidFill>
-                  <a:latin typeface="29LT Bukra"/>
-                  <a:ea typeface="29LT Bukra"/>
-                  <a:cs typeface="29LT Bukra"/>
-                  <a:sym typeface="29LT Bukra"/>
-                </a:rPr>
-                <a:t>ra</a:t>
-              </a:r>
-              <a:r>
-                <a:rPr lang="en-US" sz="2299" strike="noStrike" u="none">
-                  <a:solidFill>
-                    <a:srgbClr val="FFFFFF"/>
-                  </a:solidFill>
-                  <a:latin typeface="29LT Bukra"/>
-                  <a:ea typeface="29LT Bukra"/>
-                  <a:cs typeface="29LT Bukra"/>
-                  <a:sym typeface="29LT Bukra"/>
-                </a:rPr>
-                <a:t>i</a:t>
-              </a:r>
-              <a:r>
-                <a:rPr lang="en-US" sz="2299" strike="noStrike" u="none">
-                  <a:solidFill>
-                    <a:srgbClr val="FFFFFF"/>
-                  </a:solidFill>
-                  <a:latin typeface="29LT Bukra"/>
-                  <a:ea typeface="29LT Bukra"/>
-                  <a:cs typeface="29LT Bukra"/>
-                  <a:sym typeface="29LT Bukra"/>
-                </a:rPr>
-                <a:t>nt</a:t>
-              </a:r>
-              <a:r>
-                <a:rPr lang="en-US" sz="2299" strike="noStrike" u="none">
-                  <a:solidFill>
-                    <a:srgbClr val="FFFFFF"/>
-                  </a:solidFill>
-                  <a:latin typeface="29LT Bukra"/>
-                  <a:ea typeface="29LT Bukra"/>
-                  <a:cs typeface="29LT Bukra"/>
-                  <a:sym typeface="29LT Bukra"/>
-                </a:rPr>
-                <a:t>s</a:t>
-              </a:r>
-              <a:r>
-                <a:rPr lang="en-US" sz="2299" strike="noStrike" u="none">
-                  <a:solidFill>
-                    <a:srgbClr val="FFFFFF"/>
-                  </a:solidFill>
-                  <a:latin typeface="29LT Bukra"/>
-                  <a:ea typeface="29LT Bukra"/>
-                  <a:cs typeface="29LT Bukra"/>
-                  <a:sym typeface="29LT Bukra"/>
-                </a:rPr>
-                <a:t> PK/FK/CHECK/UNIQUE/DEFAULT)</a:t>
-              </a:r>
-              <a:r>
-                <a:rPr lang="en-US" sz="2299" strike="noStrike" u="none">
-                  <a:solidFill>
-                    <a:srgbClr val="FFFFFF"/>
-                  </a:solidFill>
-                  <a:latin typeface="29LT Bukra"/>
-                  <a:ea typeface="29LT Bukra"/>
-                  <a:cs typeface="29LT Bukra"/>
-                  <a:sym typeface="29LT Bukra"/>
-                </a:rPr>
-                <a:t>.</a:t>
+                <a:t>rquitecto de Base de Datos: responsable del modelo conceptual (DER), modelo lógico (normalización) y modelo físico (DDL: filegroups, datafiles, tablas, constraints PK/FK/CHECK/UNIQUE/DEFAULT).</a:t>
               </a:r>
             </a:p>
           </p:txBody>
@@ -7110,12 +5280,12 @@
       </p:grpSp>
       <p:grpSp>
         <p:nvGrpSpPr>
-          <p:cNvPr name="Group 10" id="10"/>
+          <p:cNvPr id="10" name="Group 10"/>
           <p:cNvGrpSpPr/>
           <p:nvPr/>
         </p:nvGrpSpPr>
         <p:grpSpPr>
-          <a:xfrm rot="0">
+          <a:xfrm>
             <a:off x="8659654" y="3316885"/>
             <a:ext cx="3544015" cy="5484215"/>
             <a:chOff x="0" y="0"/>
@@ -7124,12 +5294,12 @@
         </p:grpSpPr>
         <p:sp>
           <p:nvSpPr>
-            <p:cNvPr name="TextBox 11" id="11"/>
-            <p:cNvSpPr txBox="true"/>
+            <p:cNvPr id="11" name="TextBox 11"/>
+            <p:cNvSpPr txBox="1"/>
             <p:nvPr/>
           </p:nvSpPr>
           <p:spPr>
-            <a:xfrm rot="0">
+            <a:xfrm>
               <a:off x="0" y="-142875"/>
               <a:ext cx="4725353" cy="1274022"/>
             </a:xfrm>
@@ -7138,12 +5308,12 @@
             </a:prstGeom>
           </p:spPr>
           <p:txBody>
-            <a:bodyPr anchor="t" rtlCol="false" tIns="0" lIns="0" bIns="0" rIns="0">
+            <a:bodyPr lIns="0" tIns="0" rIns="0" bIns="0" rtlCol="0" anchor="t">
               <a:spAutoFit/>
             </a:bodyPr>
             <a:lstStyle/>
             <a:p>
-              <a:pPr algn="ctr" marL="0" indent="0" lvl="0">
+              <a:pPr marL="0" lvl="0" indent="0" algn="ctr">
                 <a:lnSpc>
                   <a:spcPts val="3639"/>
                 </a:lnSpc>
@@ -7152,7 +5322,7 @@
                 </a:spcBef>
               </a:pPr>
               <a:r>
-                <a:rPr lang="en-US" b="true" sz="2599">
+                <a:rPr lang="en-US" sz="2599" b="1">
                   <a:solidFill>
                     <a:srgbClr val="FFFFFF"/>
                   </a:solidFill>
@@ -7161,31 +5331,19 @@
                   <a:cs typeface="29LT Bukra Bold"/>
                   <a:sym typeface="29LT Bukra Bold"/>
                 </a:rPr>
-                <a:t>LAZARO</a:t>
-              </a:r>
-              <a:r>
-                <a:rPr lang="en-US" b="true" sz="2599">
-                  <a:solidFill>
-                    <a:srgbClr val="FFFFFF"/>
-                  </a:solidFill>
-                  <a:latin typeface="29LT Bukra Bold"/>
-                  <a:ea typeface="29LT Bukra Bold"/>
-                  <a:cs typeface="29LT Bukra Bold"/>
-                  <a:sym typeface="29LT Bukra Bold"/>
-                </a:rPr>
-                <a:t> ROQUE ANGELO MATEO</a:t>
+                <a:t>LAZARO ROQUE ANGELO MATEO</a:t>
               </a:r>
             </a:p>
           </p:txBody>
         </p:sp>
         <p:sp>
           <p:nvSpPr>
-            <p:cNvPr name="TextBox 12" id="12"/>
-            <p:cNvSpPr txBox="true"/>
+            <p:cNvPr id="12" name="TextBox 12"/>
+            <p:cNvSpPr txBox="1"/>
             <p:nvPr/>
           </p:nvSpPr>
           <p:spPr>
-            <a:xfrm rot="0">
+            <a:xfrm>
               <a:off x="0" y="1398955"/>
               <a:ext cx="4725353" cy="5913332"/>
             </a:xfrm>
@@ -7194,12 +5352,12 @@
             </a:prstGeom>
           </p:spPr>
           <p:txBody>
-            <a:bodyPr anchor="t" rtlCol="false" tIns="0" lIns="0" bIns="0" rIns="0">
+            <a:bodyPr lIns="0" tIns="0" rIns="0" bIns="0" rtlCol="0" anchor="t">
               <a:spAutoFit/>
             </a:bodyPr>
             <a:lstStyle/>
             <a:p>
-              <a:pPr algn="ctr" marL="0" indent="0" lvl="0">
+              <a:pPr marL="0" lvl="0" indent="0" algn="ctr">
                 <a:lnSpc>
                   <a:spcPts val="3219"/>
                 </a:lnSpc>
@@ -7220,7 +5378,7 @@
                 <a:t>D</a:t>
               </a:r>
               <a:r>
-                <a:rPr lang="en-US" sz="2299" strike="noStrike" u="none">
+                <a:rPr lang="en-US" sz="2299" u="none" strike="noStrike">
                   <a:solidFill>
                     <a:srgbClr val="FFFFFF"/>
                   </a:solidFill>
@@ -7229,859 +5387,7 @@
                   <a:cs typeface="29LT Bukra"/>
                   <a:sym typeface="29LT Bukra"/>
                 </a:rPr>
-                <a:t>es</a:t>
-              </a:r>
-              <a:r>
-                <a:rPr lang="en-US" sz="2299" strike="noStrike" u="none">
-                  <a:solidFill>
-                    <a:srgbClr val="FFFFFF"/>
-                  </a:solidFill>
-                  <a:latin typeface="29LT Bukra"/>
-                  <a:ea typeface="29LT Bukra"/>
-                  <a:cs typeface="29LT Bukra"/>
-                  <a:sym typeface="29LT Bukra"/>
-                </a:rPr>
-                <a:t>arr</a:t>
-              </a:r>
-              <a:r>
-                <a:rPr lang="en-US" sz="2299" strike="noStrike" u="none">
-                  <a:solidFill>
-                    <a:srgbClr val="FFFFFF"/>
-                  </a:solidFill>
-                  <a:latin typeface="29LT Bukra"/>
-                  <a:ea typeface="29LT Bukra"/>
-                  <a:cs typeface="29LT Bukra"/>
-                  <a:sym typeface="29LT Bukra"/>
-                </a:rPr>
-                <a:t>ol</a:t>
-              </a:r>
-              <a:r>
-                <a:rPr lang="en-US" sz="2299" strike="noStrike" u="none">
-                  <a:solidFill>
-                    <a:srgbClr val="FFFFFF"/>
-                  </a:solidFill>
-                  <a:latin typeface="29LT Bukra"/>
-                  <a:ea typeface="29LT Bukra"/>
-                  <a:cs typeface="29LT Bukra"/>
-                  <a:sym typeface="29LT Bukra"/>
-                </a:rPr>
-                <a:t>lad</a:t>
-              </a:r>
-              <a:r>
-                <a:rPr lang="en-US" sz="2299" strike="noStrike" u="none">
-                  <a:solidFill>
-                    <a:srgbClr val="FFFFFF"/>
-                  </a:solidFill>
-                  <a:latin typeface="29LT Bukra"/>
-                  <a:ea typeface="29LT Bukra"/>
-                  <a:cs typeface="29LT Bukra"/>
-                  <a:sym typeface="29LT Bukra"/>
-                </a:rPr>
-                <a:t>or </a:t>
-              </a:r>
-              <a:r>
-                <a:rPr lang="en-US" sz="2299" strike="noStrike" u="none">
-                  <a:solidFill>
-                    <a:srgbClr val="FFFFFF"/>
-                  </a:solidFill>
-                  <a:latin typeface="29LT Bukra"/>
-                  <a:ea typeface="29LT Bukra"/>
-                  <a:cs typeface="29LT Bukra"/>
-                  <a:sym typeface="29LT Bukra"/>
-                </a:rPr>
-                <a:t>d</a:t>
-              </a:r>
-              <a:r>
-                <a:rPr lang="en-US" sz="2299" strike="noStrike" u="none">
-                  <a:solidFill>
-                    <a:srgbClr val="FFFFFF"/>
-                  </a:solidFill>
-                  <a:latin typeface="29LT Bukra"/>
-                  <a:ea typeface="29LT Bukra"/>
-                  <a:cs typeface="29LT Bukra"/>
-                  <a:sym typeface="29LT Bukra"/>
-                </a:rPr>
-                <a:t>e </a:t>
-              </a:r>
-              <a:r>
-                <a:rPr lang="en-US" sz="2299" strike="noStrike" u="none">
-                  <a:solidFill>
-                    <a:srgbClr val="FFFFFF"/>
-                  </a:solidFill>
-                  <a:latin typeface="29LT Bukra"/>
-                  <a:ea typeface="29LT Bukra"/>
-                  <a:cs typeface="29LT Bukra"/>
-                  <a:sym typeface="29LT Bukra"/>
-                </a:rPr>
-                <a:t>Pr</a:t>
-              </a:r>
-              <a:r>
-                <a:rPr lang="en-US" sz="2299" strike="noStrike" u="none">
-                  <a:solidFill>
-                    <a:srgbClr val="FFFFFF"/>
-                  </a:solidFill>
-                  <a:latin typeface="29LT Bukra"/>
-                  <a:ea typeface="29LT Bukra"/>
-                  <a:cs typeface="29LT Bukra"/>
-                  <a:sym typeface="29LT Bukra"/>
-                </a:rPr>
-                <a:t>ocedi</a:t>
-              </a:r>
-              <a:r>
-                <a:rPr lang="en-US" sz="2299" strike="noStrike" u="none">
-                  <a:solidFill>
-                    <a:srgbClr val="FFFFFF"/>
-                  </a:solidFill>
-                  <a:latin typeface="29LT Bukra"/>
-                  <a:ea typeface="29LT Bukra"/>
-                  <a:cs typeface="29LT Bukra"/>
-                  <a:sym typeface="29LT Bukra"/>
-                </a:rPr>
-                <a:t>m</a:t>
-              </a:r>
-              <a:r>
-                <a:rPr lang="en-US" sz="2299" strike="noStrike" u="none">
-                  <a:solidFill>
-                    <a:srgbClr val="FFFFFF"/>
-                  </a:solidFill>
-                  <a:latin typeface="29LT Bukra"/>
-                  <a:ea typeface="29LT Bukra"/>
-                  <a:cs typeface="29LT Bukra"/>
-                  <a:sym typeface="29LT Bukra"/>
-                </a:rPr>
-                <a:t>i</a:t>
-              </a:r>
-              <a:r>
-                <a:rPr lang="en-US" sz="2299" strike="noStrike" u="none">
-                  <a:solidFill>
-                    <a:srgbClr val="FFFFFF"/>
-                  </a:solidFill>
-                  <a:latin typeface="29LT Bukra"/>
-                  <a:ea typeface="29LT Bukra"/>
-                  <a:cs typeface="29LT Bukra"/>
-                  <a:sym typeface="29LT Bukra"/>
-                </a:rPr>
-                <a:t>ento</a:t>
-              </a:r>
-              <a:r>
-                <a:rPr lang="en-US" sz="2299" strike="noStrike" u="none">
-                  <a:solidFill>
-                    <a:srgbClr val="FFFFFF"/>
-                  </a:solidFill>
-                  <a:latin typeface="29LT Bukra"/>
-                  <a:ea typeface="29LT Bukra"/>
-                  <a:cs typeface="29LT Bukra"/>
-                  <a:sym typeface="29LT Bukra"/>
-                </a:rPr>
-                <a:t>s</a:t>
-              </a:r>
-              <a:r>
-                <a:rPr lang="en-US" sz="2299" strike="noStrike" u="none">
-                  <a:solidFill>
-                    <a:srgbClr val="FFFFFF"/>
-                  </a:solidFill>
-                  <a:latin typeface="29LT Bukra"/>
-                  <a:ea typeface="29LT Bukra"/>
-                  <a:cs typeface="29LT Bukra"/>
-                  <a:sym typeface="29LT Bukra"/>
-                </a:rPr>
-                <a:t> Alma</a:t>
-              </a:r>
-              <a:r>
-                <a:rPr lang="en-US" sz="2299" strike="noStrike" u="none">
-                  <a:solidFill>
-                    <a:srgbClr val="FFFFFF"/>
-                  </a:solidFill>
-                  <a:latin typeface="29LT Bukra"/>
-                  <a:ea typeface="29LT Bukra"/>
-                  <a:cs typeface="29LT Bukra"/>
-                  <a:sym typeface="29LT Bukra"/>
-                </a:rPr>
-                <a:t>c</a:t>
-              </a:r>
-              <a:r>
-                <a:rPr lang="en-US" sz="2299" strike="noStrike" u="none">
-                  <a:solidFill>
-                    <a:srgbClr val="FFFFFF"/>
-                  </a:solidFill>
-                  <a:latin typeface="29LT Bukra"/>
-                  <a:ea typeface="29LT Bukra"/>
-                  <a:cs typeface="29LT Bukra"/>
-                  <a:sym typeface="29LT Bukra"/>
-                </a:rPr>
-                <a:t>e</a:t>
-              </a:r>
-              <a:r>
-                <a:rPr lang="en-US" sz="2299" strike="noStrike" u="none">
-                  <a:solidFill>
-                    <a:srgbClr val="FFFFFF"/>
-                  </a:solidFill>
-                  <a:latin typeface="29LT Bukra"/>
-                  <a:ea typeface="29LT Bukra"/>
-                  <a:cs typeface="29LT Bukra"/>
-                  <a:sym typeface="29LT Bukra"/>
-                </a:rPr>
-                <a:t>na</a:t>
-              </a:r>
-              <a:r>
-                <a:rPr lang="en-US" sz="2299" strike="noStrike" u="none">
-                  <a:solidFill>
-                    <a:srgbClr val="FFFFFF"/>
-                  </a:solidFill>
-                  <a:latin typeface="29LT Bukra"/>
-                  <a:ea typeface="29LT Bukra"/>
-                  <a:cs typeface="29LT Bukra"/>
-                  <a:sym typeface="29LT Bukra"/>
-                </a:rPr>
-                <a:t>dos:</a:t>
-              </a:r>
-              <a:r>
-                <a:rPr lang="en-US" sz="2299" strike="noStrike" u="none">
-                  <a:solidFill>
-                    <a:srgbClr val="FFFFFF"/>
-                  </a:solidFill>
-                  <a:latin typeface="29LT Bukra"/>
-                  <a:ea typeface="29LT Bukra"/>
-                  <a:cs typeface="29LT Bukra"/>
-                  <a:sym typeface="29LT Bukra"/>
-                </a:rPr>
-                <a:t> en</a:t>
-              </a:r>
-              <a:r>
-                <a:rPr lang="en-US" sz="2299" strike="noStrike" u="none">
-                  <a:solidFill>
-                    <a:srgbClr val="FFFFFF"/>
-                  </a:solidFill>
-                  <a:latin typeface="29LT Bukra"/>
-                  <a:ea typeface="29LT Bukra"/>
-                  <a:cs typeface="29LT Bukra"/>
-                  <a:sym typeface="29LT Bukra"/>
-                </a:rPr>
-                <a:t>cargado</a:t>
-              </a:r>
-              <a:r>
-                <a:rPr lang="en-US" sz="2299" strike="noStrike" u="none">
-                  <a:solidFill>
-                    <a:srgbClr val="FFFFFF"/>
-                  </a:solidFill>
-                  <a:latin typeface="29LT Bukra"/>
-                  <a:ea typeface="29LT Bukra"/>
-                  <a:cs typeface="29LT Bukra"/>
-                  <a:sym typeface="29LT Bukra"/>
-                </a:rPr>
-                <a:t> </a:t>
-              </a:r>
-              <a:r>
-                <a:rPr lang="en-US" sz="2299" strike="noStrike" u="none">
-                  <a:solidFill>
-                    <a:srgbClr val="FFFFFF"/>
-                  </a:solidFill>
-                  <a:latin typeface="29LT Bukra"/>
-                  <a:ea typeface="29LT Bukra"/>
-                  <a:cs typeface="29LT Bukra"/>
-                  <a:sym typeface="29LT Bukra"/>
-                </a:rPr>
-                <a:t>d</a:t>
-              </a:r>
-              <a:r>
-                <a:rPr lang="en-US" sz="2299" strike="noStrike" u="none">
-                  <a:solidFill>
-                    <a:srgbClr val="FFFFFF"/>
-                  </a:solidFill>
-                  <a:latin typeface="29LT Bukra"/>
-                  <a:ea typeface="29LT Bukra"/>
-                  <a:cs typeface="29LT Bukra"/>
-                  <a:sym typeface="29LT Bukra"/>
-                </a:rPr>
-                <a:t>e </a:t>
-              </a:r>
-              <a:r>
-                <a:rPr lang="en-US" sz="2299" strike="noStrike" u="none">
-                  <a:solidFill>
-                    <a:srgbClr val="FFFFFF"/>
-                  </a:solidFill>
-                  <a:latin typeface="29LT Bukra"/>
-                  <a:ea typeface="29LT Bukra"/>
-                  <a:cs typeface="29LT Bukra"/>
-                  <a:sym typeface="29LT Bukra"/>
-                </a:rPr>
-                <a:t>d</a:t>
-              </a:r>
-              <a:r>
-                <a:rPr lang="en-US" sz="2299" strike="noStrike" u="none">
-                  <a:solidFill>
-                    <a:srgbClr val="FFFFFF"/>
-                  </a:solidFill>
-                  <a:latin typeface="29LT Bukra"/>
-                  <a:ea typeface="29LT Bukra"/>
-                  <a:cs typeface="29LT Bukra"/>
-                  <a:sym typeface="29LT Bukra"/>
-                </a:rPr>
-                <a:t>is</a:t>
-              </a:r>
-              <a:r>
-                <a:rPr lang="en-US" sz="2299" strike="noStrike" u="none">
-                  <a:solidFill>
-                    <a:srgbClr val="FFFFFF"/>
-                  </a:solidFill>
-                  <a:latin typeface="29LT Bukra"/>
-                  <a:ea typeface="29LT Bukra"/>
-                  <a:cs typeface="29LT Bukra"/>
-                  <a:sym typeface="29LT Bukra"/>
-                </a:rPr>
-                <a:t>eñ</a:t>
-              </a:r>
-              <a:r>
-                <a:rPr lang="en-US" sz="2299" strike="noStrike" u="none">
-                  <a:solidFill>
-                    <a:srgbClr val="FFFFFF"/>
-                  </a:solidFill>
-                  <a:latin typeface="29LT Bukra"/>
-                  <a:ea typeface="29LT Bukra"/>
-                  <a:cs typeface="29LT Bukra"/>
-                  <a:sym typeface="29LT Bukra"/>
-                </a:rPr>
-                <a:t>ar</a:t>
-              </a:r>
-              <a:r>
-                <a:rPr lang="en-US" sz="2299" strike="noStrike" u="none">
-                  <a:solidFill>
-                    <a:srgbClr val="FFFFFF"/>
-                  </a:solidFill>
-                  <a:latin typeface="29LT Bukra"/>
-                  <a:ea typeface="29LT Bukra"/>
-                  <a:cs typeface="29LT Bukra"/>
-                  <a:sym typeface="29LT Bukra"/>
-                </a:rPr>
-                <a:t>,</a:t>
-              </a:r>
-              <a:r>
-                <a:rPr lang="en-US" sz="2299" strike="noStrike" u="none">
-                  <a:solidFill>
-                    <a:srgbClr val="FFFFFF"/>
-                  </a:solidFill>
-                  <a:latin typeface="29LT Bukra"/>
-                  <a:ea typeface="29LT Bukra"/>
-                  <a:cs typeface="29LT Bukra"/>
-                  <a:sym typeface="29LT Bukra"/>
-                </a:rPr>
-                <a:t> </a:t>
-              </a:r>
-              <a:r>
-                <a:rPr lang="en-US" sz="2299" strike="noStrike" u="none">
-                  <a:solidFill>
-                    <a:srgbClr val="FFFFFF"/>
-                  </a:solidFill>
-                  <a:latin typeface="29LT Bukra"/>
-                  <a:ea typeface="29LT Bukra"/>
-                  <a:cs typeface="29LT Bukra"/>
-                  <a:sym typeface="29LT Bukra"/>
-                </a:rPr>
-                <a:t>imp</a:t>
-              </a:r>
-              <a:r>
-                <a:rPr lang="en-US" sz="2299" strike="noStrike" u="none">
-                  <a:solidFill>
-                    <a:srgbClr val="FFFFFF"/>
-                  </a:solidFill>
-                  <a:latin typeface="29LT Bukra"/>
-                  <a:ea typeface="29LT Bukra"/>
-                  <a:cs typeface="29LT Bukra"/>
-                  <a:sym typeface="29LT Bukra"/>
-                </a:rPr>
-                <a:t>le</a:t>
-              </a:r>
-              <a:r>
-                <a:rPr lang="en-US" sz="2299" strike="noStrike" u="none">
-                  <a:solidFill>
-                    <a:srgbClr val="FFFFFF"/>
-                  </a:solidFill>
-                  <a:latin typeface="29LT Bukra"/>
-                  <a:ea typeface="29LT Bukra"/>
-                  <a:cs typeface="29LT Bukra"/>
-                  <a:sym typeface="29LT Bukra"/>
-                </a:rPr>
-                <a:t>m</a:t>
-              </a:r>
-              <a:r>
-                <a:rPr lang="en-US" sz="2299" strike="noStrike" u="none">
-                  <a:solidFill>
-                    <a:srgbClr val="FFFFFF"/>
-                  </a:solidFill>
-                  <a:latin typeface="29LT Bukra"/>
-                  <a:ea typeface="29LT Bukra"/>
-                  <a:cs typeface="29LT Bukra"/>
-                  <a:sym typeface="29LT Bukra"/>
-                </a:rPr>
-                <a:t>en</a:t>
-              </a:r>
-              <a:r>
-                <a:rPr lang="en-US" sz="2299" strike="noStrike" u="none">
-                  <a:solidFill>
-                    <a:srgbClr val="FFFFFF"/>
-                  </a:solidFill>
-                  <a:latin typeface="29LT Bukra"/>
-                  <a:ea typeface="29LT Bukra"/>
-                  <a:cs typeface="29LT Bukra"/>
-                  <a:sym typeface="29LT Bukra"/>
-                </a:rPr>
-                <a:t>tar</a:t>
-              </a:r>
-              <a:r>
-                <a:rPr lang="en-US" sz="2299" strike="noStrike" u="none">
-                  <a:solidFill>
-                    <a:srgbClr val="FFFFFF"/>
-                  </a:solidFill>
-                  <a:latin typeface="29LT Bukra"/>
-                  <a:ea typeface="29LT Bukra"/>
-                  <a:cs typeface="29LT Bukra"/>
-                  <a:sym typeface="29LT Bukra"/>
-                </a:rPr>
-                <a:t> </a:t>
-              </a:r>
-              <a:r>
-                <a:rPr lang="en-US" sz="2299" strike="noStrike" u="none">
-                  <a:solidFill>
-                    <a:srgbClr val="FFFFFF"/>
-                  </a:solidFill>
-                  <a:latin typeface="29LT Bukra"/>
-                  <a:ea typeface="29LT Bukra"/>
-                  <a:cs typeface="29LT Bukra"/>
-                  <a:sym typeface="29LT Bukra"/>
-                </a:rPr>
-                <a:t>y p</a:t>
-              </a:r>
-              <a:r>
-                <a:rPr lang="en-US" sz="2299" strike="noStrike" u="none">
-                  <a:solidFill>
-                    <a:srgbClr val="FFFFFF"/>
-                  </a:solidFill>
-                  <a:latin typeface="29LT Bukra"/>
-                  <a:ea typeface="29LT Bukra"/>
-                  <a:cs typeface="29LT Bukra"/>
-                  <a:sym typeface="29LT Bukra"/>
-                </a:rPr>
-                <a:t>r</a:t>
-              </a:r>
-              <a:r>
-                <a:rPr lang="en-US" sz="2299" strike="noStrike" u="none">
-                  <a:solidFill>
-                    <a:srgbClr val="FFFFFF"/>
-                  </a:solidFill>
-                  <a:latin typeface="29LT Bukra"/>
-                  <a:ea typeface="29LT Bukra"/>
-                  <a:cs typeface="29LT Bukra"/>
-                  <a:sym typeface="29LT Bukra"/>
-                </a:rPr>
-                <a:t>ob</a:t>
-              </a:r>
-              <a:r>
-                <a:rPr lang="en-US" sz="2299" strike="noStrike" u="none">
-                  <a:solidFill>
-                    <a:srgbClr val="FFFFFF"/>
-                  </a:solidFill>
-                  <a:latin typeface="29LT Bukra"/>
-                  <a:ea typeface="29LT Bukra"/>
-                  <a:cs typeface="29LT Bukra"/>
-                  <a:sym typeface="29LT Bukra"/>
-                </a:rPr>
-                <a:t>a</a:t>
-              </a:r>
-              <a:r>
-                <a:rPr lang="en-US" sz="2299" strike="noStrike" u="none">
-                  <a:solidFill>
-                    <a:srgbClr val="FFFFFF"/>
-                  </a:solidFill>
-                  <a:latin typeface="29LT Bukra"/>
-                  <a:ea typeface="29LT Bukra"/>
-                  <a:cs typeface="29LT Bukra"/>
-                  <a:sym typeface="29LT Bukra"/>
-                </a:rPr>
-                <a:t>r lo</a:t>
-              </a:r>
-              <a:r>
-                <a:rPr lang="en-US" sz="2299" strike="noStrike" u="none">
-                  <a:solidFill>
-                    <a:srgbClr val="FFFFFF"/>
-                  </a:solidFill>
-                  <a:latin typeface="29LT Bukra"/>
-                  <a:ea typeface="29LT Bukra"/>
-                  <a:cs typeface="29LT Bukra"/>
-                  <a:sym typeface="29LT Bukra"/>
-                </a:rPr>
-                <a:t>s</a:t>
-              </a:r>
-              <a:r>
-                <a:rPr lang="en-US" sz="2299" strike="noStrike" u="none">
-                  <a:solidFill>
-                    <a:srgbClr val="FFFFFF"/>
-                  </a:solidFill>
-                  <a:latin typeface="29LT Bukra"/>
-                  <a:ea typeface="29LT Bukra"/>
-                  <a:cs typeface="29LT Bukra"/>
-                  <a:sym typeface="29LT Bukra"/>
-                </a:rPr>
-                <a:t> stor</a:t>
-              </a:r>
-              <a:r>
-                <a:rPr lang="en-US" sz="2299" strike="noStrike" u="none">
-                  <a:solidFill>
-                    <a:srgbClr val="FFFFFF"/>
-                  </a:solidFill>
-                  <a:latin typeface="29LT Bukra"/>
-                  <a:ea typeface="29LT Bukra"/>
-                  <a:cs typeface="29LT Bukra"/>
-                  <a:sym typeface="29LT Bukra"/>
-                </a:rPr>
-                <a:t>e</a:t>
-              </a:r>
-              <a:r>
-                <a:rPr lang="en-US" sz="2299" strike="noStrike" u="none">
-                  <a:solidFill>
-                    <a:srgbClr val="FFFFFF"/>
-                  </a:solidFill>
-                  <a:latin typeface="29LT Bukra"/>
-                  <a:ea typeface="29LT Bukra"/>
-                  <a:cs typeface="29LT Bukra"/>
-                  <a:sym typeface="29LT Bukra"/>
-                </a:rPr>
-                <a:t>d</a:t>
-              </a:r>
-              <a:r>
-                <a:rPr lang="en-US" sz="2299" strike="noStrike" u="none">
-                  <a:solidFill>
-                    <a:srgbClr val="FFFFFF"/>
-                  </a:solidFill>
-                  <a:latin typeface="29LT Bukra"/>
-                  <a:ea typeface="29LT Bukra"/>
-                  <a:cs typeface="29LT Bukra"/>
-                  <a:sym typeface="29LT Bukra"/>
-                </a:rPr>
-                <a:t> </a:t>
-              </a:r>
-              <a:r>
-                <a:rPr lang="en-US" sz="2299" strike="noStrike" u="none">
-                  <a:solidFill>
-                    <a:srgbClr val="FFFFFF"/>
-                  </a:solidFill>
-                  <a:latin typeface="29LT Bukra"/>
-                  <a:ea typeface="29LT Bukra"/>
-                  <a:cs typeface="29LT Bukra"/>
-                  <a:sym typeface="29LT Bukra"/>
-                </a:rPr>
-                <a:t>p</a:t>
-              </a:r>
-              <a:r>
-                <a:rPr lang="en-US" sz="2299" strike="noStrike" u="none">
-                  <a:solidFill>
-                    <a:srgbClr val="FFFFFF"/>
-                  </a:solidFill>
-                  <a:latin typeface="29LT Bukra"/>
-                  <a:ea typeface="29LT Bukra"/>
-                  <a:cs typeface="29LT Bukra"/>
-                  <a:sym typeface="29LT Bukra"/>
-                </a:rPr>
-                <a:t>r</a:t>
-              </a:r>
-              <a:r>
-                <a:rPr lang="en-US" sz="2299" strike="noStrike" u="none">
-                  <a:solidFill>
-                    <a:srgbClr val="FFFFFF"/>
-                  </a:solidFill>
-                  <a:latin typeface="29LT Bukra"/>
-                  <a:ea typeface="29LT Bukra"/>
-                  <a:cs typeface="29LT Bukra"/>
-                  <a:sym typeface="29LT Bukra"/>
-                </a:rPr>
-                <a:t>oced</a:t>
-              </a:r>
-              <a:r>
-                <a:rPr lang="en-US" sz="2299" strike="noStrike" u="none">
-                  <a:solidFill>
-                    <a:srgbClr val="FFFFFF"/>
-                  </a:solidFill>
-                  <a:latin typeface="29LT Bukra"/>
-                  <a:ea typeface="29LT Bukra"/>
-                  <a:cs typeface="29LT Bukra"/>
-                  <a:sym typeface="29LT Bukra"/>
-                </a:rPr>
-                <a:t>u</a:t>
-              </a:r>
-              <a:r>
-                <a:rPr lang="en-US" sz="2299" strike="noStrike" u="none">
-                  <a:solidFill>
-                    <a:srgbClr val="FFFFFF"/>
-                  </a:solidFill>
-                  <a:latin typeface="29LT Bukra"/>
-                  <a:ea typeface="29LT Bukra"/>
-                  <a:cs typeface="29LT Bukra"/>
-                  <a:sym typeface="29LT Bukra"/>
-                </a:rPr>
-                <a:t>re</a:t>
-              </a:r>
-              <a:r>
-                <a:rPr lang="en-US" sz="2299" strike="noStrike" u="none">
-                  <a:solidFill>
-                    <a:srgbClr val="FFFFFF"/>
-                  </a:solidFill>
-                  <a:latin typeface="29LT Bukra"/>
-                  <a:ea typeface="29LT Bukra"/>
-                  <a:cs typeface="29LT Bukra"/>
-                  <a:sym typeface="29LT Bukra"/>
-                </a:rPr>
-                <a:t>s </a:t>
-              </a:r>
-              <a:r>
-                <a:rPr lang="en-US" sz="2299" strike="noStrike" u="none">
-                  <a:solidFill>
-                    <a:srgbClr val="FFFFFF"/>
-                  </a:solidFill>
-                  <a:latin typeface="29LT Bukra"/>
-                  <a:ea typeface="29LT Bukra"/>
-                  <a:cs typeface="29LT Bukra"/>
-                  <a:sym typeface="29LT Bukra"/>
-                </a:rPr>
-                <a:t>con manejo de </a:t>
-              </a:r>
-              <a:r>
-                <a:rPr lang="en-US" sz="2299" strike="noStrike" u="none">
-                  <a:solidFill>
-                    <a:srgbClr val="FFFFFF"/>
-                  </a:solidFill>
-                  <a:latin typeface="29LT Bukra"/>
-                  <a:ea typeface="29LT Bukra"/>
-                  <a:cs typeface="29LT Bukra"/>
-                  <a:sym typeface="29LT Bukra"/>
-                </a:rPr>
-                <a:t>e</a:t>
-              </a:r>
-              <a:r>
-                <a:rPr lang="en-US" sz="2299" strike="noStrike" u="none">
-                  <a:solidFill>
-                    <a:srgbClr val="FFFFFF"/>
-                  </a:solidFill>
-                  <a:latin typeface="29LT Bukra"/>
-                  <a:ea typeface="29LT Bukra"/>
-                  <a:cs typeface="29LT Bukra"/>
-                  <a:sym typeface="29LT Bukra"/>
-                </a:rPr>
-                <a:t>rr</a:t>
-              </a:r>
-              <a:r>
-                <a:rPr lang="en-US" sz="2299" strike="noStrike" u="none">
-                  <a:solidFill>
-                    <a:srgbClr val="FFFFFF"/>
-                  </a:solidFill>
-                  <a:latin typeface="29LT Bukra"/>
-                  <a:ea typeface="29LT Bukra"/>
-                  <a:cs typeface="29LT Bukra"/>
-                  <a:sym typeface="29LT Bukra"/>
-                </a:rPr>
-                <a:t>o</a:t>
-              </a:r>
-              <a:r>
-                <a:rPr lang="en-US" sz="2299" strike="noStrike" u="none">
-                  <a:solidFill>
-                    <a:srgbClr val="FFFFFF"/>
-                  </a:solidFill>
-                  <a:latin typeface="29LT Bukra"/>
-                  <a:ea typeface="29LT Bukra"/>
-                  <a:cs typeface="29LT Bukra"/>
-                  <a:sym typeface="29LT Bukra"/>
-                </a:rPr>
-                <a:t>res (TRY-CATCH)</a:t>
-              </a:r>
-              <a:r>
-                <a:rPr lang="en-US" sz="2299" strike="noStrike" u="none">
-                  <a:solidFill>
-                    <a:srgbClr val="FFFFFF"/>
-                  </a:solidFill>
-                  <a:latin typeface="29LT Bukra"/>
-                  <a:ea typeface="29LT Bukra"/>
-                  <a:cs typeface="29LT Bukra"/>
-                  <a:sym typeface="29LT Bukra"/>
-                </a:rPr>
-                <a:t>, </a:t>
-              </a:r>
-              <a:r>
-                <a:rPr lang="en-US" sz="2299" strike="noStrike" u="none">
-                  <a:solidFill>
-                    <a:srgbClr val="FFFFFF"/>
-                  </a:solidFill>
-                  <a:latin typeface="29LT Bukra"/>
-                  <a:ea typeface="29LT Bukra"/>
-                  <a:cs typeface="29LT Bukra"/>
-                  <a:sym typeface="29LT Bukra"/>
-                </a:rPr>
-                <a:t>t</a:t>
-              </a:r>
-              <a:r>
-                <a:rPr lang="en-US" sz="2299" strike="noStrike" u="none">
-                  <a:solidFill>
-                    <a:srgbClr val="FFFFFF"/>
-                  </a:solidFill>
-                  <a:latin typeface="29LT Bukra"/>
-                  <a:ea typeface="29LT Bukra"/>
-                  <a:cs typeface="29LT Bukra"/>
-                  <a:sym typeface="29LT Bukra"/>
-                </a:rPr>
-                <a:t>r</a:t>
-              </a:r>
-              <a:r>
-                <a:rPr lang="en-US" sz="2299" strike="noStrike" u="none">
-                  <a:solidFill>
-                    <a:srgbClr val="FFFFFF"/>
-                  </a:solidFill>
-                  <a:latin typeface="29LT Bukra"/>
-                  <a:ea typeface="29LT Bukra"/>
-                  <a:cs typeface="29LT Bukra"/>
-                  <a:sym typeface="29LT Bukra"/>
-                </a:rPr>
-                <a:t>ansacc</a:t>
-              </a:r>
-              <a:r>
-                <a:rPr lang="en-US" sz="2299" strike="noStrike" u="none">
-                  <a:solidFill>
-                    <a:srgbClr val="FFFFFF"/>
-                  </a:solidFill>
-                  <a:latin typeface="29LT Bukra"/>
-                  <a:ea typeface="29LT Bukra"/>
-                  <a:cs typeface="29LT Bukra"/>
-                  <a:sym typeface="29LT Bukra"/>
-                </a:rPr>
-                <a:t>i</a:t>
-              </a:r>
-              <a:r>
-                <a:rPr lang="en-US" sz="2299" strike="noStrike" u="none">
-                  <a:solidFill>
-                    <a:srgbClr val="FFFFFF"/>
-                  </a:solidFill>
-                  <a:latin typeface="29LT Bukra"/>
-                  <a:ea typeface="29LT Bukra"/>
-                  <a:cs typeface="29LT Bukra"/>
-                  <a:sym typeface="29LT Bukra"/>
-                </a:rPr>
-                <a:t>o</a:t>
-              </a:r>
-              <a:r>
-                <a:rPr lang="en-US" sz="2299" strike="noStrike" u="none">
-                  <a:solidFill>
-                    <a:srgbClr val="FFFFFF"/>
-                  </a:solidFill>
-                  <a:latin typeface="29LT Bukra"/>
-                  <a:ea typeface="29LT Bukra"/>
-                  <a:cs typeface="29LT Bukra"/>
-                  <a:sym typeface="29LT Bukra"/>
-                </a:rPr>
-                <a:t>n</a:t>
-              </a:r>
-              <a:r>
-                <a:rPr lang="en-US" sz="2299" strike="noStrike" u="none">
-                  <a:solidFill>
-                    <a:srgbClr val="FFFFFF"/>
-                  </a:solidFill>
-                  <a:latin typeface="29LT Bukra"/>
-                  <a:ea typeface="29LT Bukra"/>
-                  <a:cs typeface="29LT Bukra"/>
-                  <a:sym typeface="29LT Bukra"/>
-                </a:rPr>
-                <a:t>es y p</a:t>
-              </a:r>
-              <a:r>
-                <a:rPr lang="en-US" sz="2299" strike="noStrike" u="none">
-                  <a:solidFill>
-                    <a:srgbClr val="FFFFFF"/>
-                  </a:solidFill>
-                  <a:latin typeface="29LT Bukra"/>
-                  <a:ea typeface="29LT Bukra"/>
-                  <a:cs typeface="29LT Bukra"/>
-                  <a:sym typeface="29LT Bukra"/>
-                </a:rPr>
-                <a:t>a</a:t>
-              </a:r>
-              <a:r>
-                <a:rPr lang="en-US" sz="2299" strike="noStrike" u="none">
-                  <a:solidFill>
-                    <a:srgbClr val="FFFFFF"/>
-                  </a:solidFill>
-                  <a:latin typeface="29LT Bukra"/>
-                  <a:ea typeface="29LT Bukra"/>
-                  <a:cs typeface="29LT Bukra"/>
-                  <a:sym typeface="29LT Bukra"/>
-                </a:rPr>
-                <a:t>rámetros</a:t>
-              </a:r>
-              <a:r>
-                <a:rPr lang="en-US" sz="2299" strike="noStrike" u="none">
-                  <a:solidFill>
-                    <a:srgbClr val="FFFFFF"/>
-                  </a:solidFill>
-                  <a:latin typeface="29LT Bukra"/>
-                  <a:ea typeface="29LT Bukra"/>
-                  <a:cs typeface="29LT Bukra"/>
-                  <a:sym typeface="29LT Bukra"/>
-                </a:rPr>
-                <a:t> </a:t>
-              </a:r>
-              <a:r>
-                <a:rPr lang="en-US" sz="2299" strike="noStrike" u="none">
-                  <a:solidFill>
-                    <a:srgbClr val="FFFFFF"/>
-                  </a:solidFill>
-                  <a:latin typeface="29LT Bukra"/>
-                  <a:ea typeface="29LT Bukra"/>
-                  <a:cs typeface="29LT Bukra"/>
-                  <a:sym typeface="29LT Bukra"/>
-                </a:rPr>
-                <a:t>d</a:t>
-              </a:r>
-              <a:r>
-                <a:rPr lang="en-US" sz="2299" strike="noStrike" u="none">
-                  <a:solidFill>
-                    <a:srgbClr val="FFFFFF"/>
-                  </a:solidFill>
-                  <a:latin typeface="29LT Bukra"/>
-                  <a:ea typeface="29LT Bukra"/>
-                  <a:cs typeface="29LT Bukra"/>
-                  <a:sym typeface="29LT Bukra"/>
-                </a:rPr>
-                <a:t>e </a:t>
-              </a:r>
-              <a:r>
-                <a:rPr lang="en-US" sz="2299" strike="noStrike" u="none">
-                  <a:solidFill>
-                    <a:srgbClr val="FFFFFF"/>
-                  </a:solidFill>
-                  <a:latin typeface="29LT Bukra"/>
-                  <a:ea typeface="29LT Bukra"/>
-                  <a:cs typeface="29LT Bukra"/>
-                  <a:sym typeface="29LT Bukra"/>
-                </a:rPr>
-                <a:t>entrada/</a:t>
-              </a:r>
-              <a:r>
-                <a:rPr lang="en-US" sz="2299" strike="noStrike" u="none">
-                  <a:solidFill>
-                    <a:srgbClr val="FFFFFF"/>
-                  </a:solidFill>
-                  <a:latin typeface="29LT Bukra"/>
-                  <a:ea typeface="29LT Bukra"/>
-                  <a:cs typeface="29LT Bukra"/>
-                  <a:sym typeface="29LT Bukra"/>
-                </a:rPr>
-                <a:t>s</a:t>
-              </a:r>
-              <a:r>
-                <a:rPr lang="en-US" sz="2299" strike="noStrike" u="none">
-                  <a:solidFill>
-                    <a:srgbClr val="FFFFFF"/>
-                  </a:solidFill>
-                  <a:latin typeface="29LT Bukra"/>
-                  <a:ea typeface="29LT Bukra"/>
-                  <a:cs typeface="29LT Bukra"/>
-                  <a:sym typeface="29LT Bukra"/>
-                </a:rPr>
-                <a:t>alida</a:t>
+                <a:t>esarrollador de Procedimientos Almacenados: encargado de diseñar, implementar y probar los stored procedures con manejo de errores (TRY-CATCH), transacciones y parámetros de entrada/salida</a:t>
               </a:r>
             </a:p>
           </p:txBody>
@@ -8089,12 +5395,12 @@
       </p:grpSp>
       <p:grpSp>
         <p:nvGrpSpPr>
-          <p:cNvPr name="Group 13" id="13"/>
+          <p:cNvPr id="13" name="Group 13"/>
           <p:cNvGrpSpPr/>
           <p:nvPr/>
         </p:nvGrpSpPr>
         <p:grpSpPr>
-          <a:xfrm rot="0">
+          <a:xfrm>
             <a:off x="12565619" y="3427307"/>
             <a:ext cx="3544015" cy="4684115"/>
             <a:chOff x="0" y="0"/>
@@ -8103,12 +5409,12 @@
         </p:grpSpPr>
         <p:sp>
           <p:nvSpPr>
-            <p:cNvPr name="TextBox 14" id="14"/>
-            <p:cNvSpPr txBox="true"/>
+            <p:cNvPr id="14" name="TextBox 14"/>
+            <p:cNvSpPr txBox="1"/>
             <p:nvPr/>
           </p:nvSpPr>
           <p:spPr>
-            <a:xfrm rot="0">
+            <a:xfrm>
               <a:off x="0" y="-142875"/>
               <a:ext cx="4725353" cy="1274022"/>
             </a:xfrm>
@@ -8117,12 +5423,12 @@
             </a:prstGeom>
           </p:spPr>
           <p:txBody>
-            <a:bodyPr anchor="t" rtlCol="false" tIns="0" lIns="0" bIns="0" rIns="0">
+            <a:bodyPr lIns="0" tIns="0" rIns="0" bIns="0" rtlCol="0" anchor="t">
               <a:spAutoFit/>
             </a:bodyPr>
             <a:lstStyle/>
             <a:p>
-              <a:pPr algn="ctr" marL="0" indent="0" lvl="0">
+              <a:pPr marL="0" lvl="0" indent="0" algn="ctr">
                 <a:lnSpc>
                   <a:spcPts val="3639"/>
                 </a:lnSpc>
@@ -8131,7 +5437,7 @@
                 </a:spcBef>
               </a:pPr>
               <a:r>
-                <a:rPr lang="en-US" b="true" sz="2599">
+                <a:rPr lang="en-US" sz="2599" b="1">
                   <a:solidFill>
                     <a:srgbClr val="FFFFFF"/>
                   </a:solidFill>
@@ -8140,31 +5446,19 @@
                   <a:cs typeface="29LT Bukra Bold"/>
                   <a:sym typeface="29LT Bukra Bold"/>
                 </a:rPr>
-                <a:t>PESCETTO</a:t>
-              </a:r>
-              <a:r>
-                <a:rPr lang="en-US" b="true" sz="2599">
-                  <a:solidFill>
-                    <a:srgbClr val="FFFFFF"/>
-                  </a:solidFill>
-                  <a:latin typeface="29LT Bukra Bold"/>
-                  <a:ea typeface="29LT Bukra Bold"/>
-                  <a:cs typeface="29LT Bukra Bold"/>
-                  <a:sym typeface="29LT Bukra Bold"/>
-                </a:rPr>
-                <a:t> JARA JOSE ANDRES</a:t>
+                <a:t>PESCETTO JARA JOSE ANDRES</a:t>
               </a:r>
             </a:p>
           </p:txBody>
         </p:sp>
         <p:sp>
           <p:nvSpPr>
-            <p:cNvPr name="TextBox 15" id="15"/>
-            <p:cNvSpPr txBox="true"/>
+            <p:cNvPr id="15" name="TextBox 15"/>
+            <p:cNvSpPr txBox="1"/>
             <p:nvPr/>
           </p:nvSpPr>
           <p:spPr>
-            <a:xfrm rot="0">
+            <a:xfrm>
               <a:off x="0" y="1398955"/>
               <a:ext cx="4725353" cy="4846532"/>
             </a:xfrm>
@@ -8173,12 +5467,12 @@
             </a:prstGeom>
           </p:spPr>
           <p:txBody>
-            <a:bodyPr anchor="t" rtlCol="false" tIns="0" lIns="0" bIns="0" rIns="0">
+            <a:bodyPr lIns="0" tIns="0" rIns="0" bIns="0" rtlCol="0" anchor="t">
               <a:spAutoFit/>
             </a:bodyPr>
             <a:lstStyle/>
             <a:p>
-              <a:pPr algn="ctr" marL="0" indent="0" lvl="0">
+              <a:pPr marL="0" lvl="0" indent="0" algn="ctr">
                 <a:lnSpc>
                   <a:spcPts val="3219"/>
                 </a:lnSpc>
@@ -8199,7 +5493,7 @@
                 <a:t>Esp</a:t>
               </a:r>
               <a:r>
-                <a:rPr lang="en-US" sz="2299" strike="noStrike" u="none">
+                <a:rPr lang="en-US" sz="2299" u="none" strike="noStrike">
                   <a:solidFill>
                     <a:srgbClr val="FFFFFF"/>
                   </a:solidFill>
@@ -8208,1015 +5502,7 @@
                   <a:cs typeface="29LT Bukra"/>
                   <a:sym typeface="29LT Bukra"/>
                 </a:rPr>
-                <a:t>e</a:t>
-              </a:r>
-              <a:r>
-                <a:rPr lang="en-US" sz="2299" strike="noStrike" u="none">
-                  <a:solidFill>
-                    <a:srgbClr val="FFFFFF"/>
-                  </a:solidFill>
-                  <a:latin typeface="29LT Bukra"/>
-                  <a:ea typeface="29LT Bukra"/>
-                  <a:cs typeface="29LT Bukra"/>
-                  <a:sym typeface="29LT Bukra"/>
-                </a:rPr>
-                <a:t>c</a:t>
-              </a:r>
-              <a:r>
-                <a:rPr lang="en-US" sz="2299" strike="noStrike" u="none">
-                  <a:solidFill>
-                    <a:srgbClr val="FFFFFF"/>
-                  </a:solidFill>
-                  <a:latin typeface="29LT Bukra"/>
-                  <a:ea typeface="29LT Bukra"/>
-                  <a:cs typeface="29LT Bukra"/>
-                  <a:sym typeface="29LT Bukra"/>
-                </a:rPr>
-                <a:t>i</a:t>
-              </a:r>
-              <a:r>
-                <a:rPr lang="en-US" sz="2299" strike="noStrike" u="none">
-                  <a:solidFill>
-                    <a:srgbClr val="FFFFFF"/>
-                  </a:solidFill>
-                  <a:latin typeface="29LT Bukra"/>
-                  <a:ea typeface="29LT Bukra"/>
-                  <a:cs typeface="29LT Bukra"/>
-                  <a:sym typeface="29LT Bukra"/>
-                </a:rPr>
-                <a:t>a</a:t>
-              </a:r>
-              <a:r>
-                <a:rPr lang="en-US" sz="2299" strike="noStrike" u="none">
-                  <a:solidFill>
-                    <a:srgbClr val="FFFFFF"/>
-                  </a:solidFill>
-                  <a:latin typeface="29LT Bukra"/>
-                  <a:ea typeface="29LT Bukra"/>
-                  <a:cs typeface="29LT Bukra"/>
-                  <a:sym typeface="29LT Bukra"/>
-                </a:rPr>
-                <a:t>l</a:t>
-              </a:r>
-              <a:r>
-                <a:rPr lang="en-US" sz="2299" strike="noStrike" u="none">
-                  <a:solidFill>
-                    <a:srgbClr val="FFFFFF"/>
-                  </a:solidFill>
-                  <a:latin typeface="29LT Bukra"/>
-                  <a:ea typeface="29LT Bukra"/>
-                  <a:cs typeface="29LT Bukra"/>
-                  <a:sym typeface="29LT Bukra"/>
-                </a:rPr>
-                <a:t>i</a:t>
-              </a:r>
-              <a:r>
-                <a:rPr lang="en-US" sz="2299" strike="noStrike" u="none">
-                  <a:solidFill>
-                    <a:srgbClr val="FFFFFF"/>
-                  </a:solidFill>
-                  <a:latin typeface="29LT Bukra"/>
-                  <a:ea typeface="29LT Bukra"/>
-                  <a:cs typeface="29LT Bukra"/>
-                  <a:sym typeface="29LT Bukra"/>
-                </a:rPr>
-                <a:t>sta</a:t>
-              </a:r>
-              <a:r>
-                <a:rPr lang="en-US" sz="2299" strike="noStrike" u="none">
-                  <a:solidFill>
-                    <a:srgbClr val="FFFFFF"/>
-                  </a:solidFill>
-                  <a:latin typeface="29LT Bukra"/>
-                  <a:ea typeface="29LT Bukra"/>
-                  <a:cs typeface="29LT Bukra"/>
-                  <a:sym typeface="29LT Bukra"/>
-                </a:rPr>
-                <a:t> </a:t>
-              </a:r>
-              <a:r>
-                <a:rPr lang="en-US" sz="2299" strike="noStrike" u="none">
-                  <a:solidFill>
-                    <a:srgbClr val="FFFFFF"/>
-                  </a:solidFill>
-                  <a:latin typeface="29LT Bukra"/>
-                  <a:ea typeface="29LT Bukra"/>
-                  <a:cs typeface="29LT Bukra"/>
-                  <a:sym typeface="29LT Bukra"/>
-                </a:rPr>
-                <a:t>en </a:t>
-              </a:r>
-              <a:r>
-                <a:rPr lang="en-US" sz="2299" strike="noStrike" u="none">
-                  <a:solidFill>
-                    <a:srgbClr val="FFFFFF"/>
-                  </a:solidFill>
-                  <a:latin typeface="29LT Bukra"/>
-                  <a:ea typeface="29LT Bukra"/>
-                  <a:cs typeface="29LT Bukra"/>
-                  <a:sym typeface="29LT Bukra"/>
-                </a:rPr>
-                <a:t>O</a:t>
-              </a:r>
-              <a:r>
-                <a:rPr lang="en-US" sz="2299" strike="noStrike" u="none">
-                  <a:solidFill>
-                    <a:srgbClr val="FFFFFF"/>
-                  </a:solidFill>
-                  <a:latin typeface="29LT Bukra"/>
-                  <a:ea typeface="29LT Bukra"/>
-                  <a:cs typeface="29LT Bukra"/>
-                  <a:sym typeface="29LT Bukra"/>
-                </a:rPr>
-                <a:t>p</a:t>
-              </a:r>
-              <a:r>
-                <a:rPr lang="en-US" sz="2299" strike="noStrike" u="none">
-                  <a:solidFill>
-                    <a:srgbClr val="FFFFFF"/>
-                  </a:solidFill>
-                  <a:latin typeface="29LT Bukra"/>
-                  <a:ea typeface="29LT Bukra"/>
-                  <a:cs typeface="29LT Bukra"/>
-                  <a:sym typeface="29LT Bukra"/>
-                </a:rPr>
-                <a:t>t</a:t>
-              </a:r>
-              <a:r>
-                <a:rPr lang="en-US" sz="2299" strike="noStrike" u="none">
-                  <a:solidFill>
-                    <a:srgbClr val="FFFFFF"/>
-                  </a:solidFill>
-                  <a:latin typeface="29LT Bukra"/>
-                  <a:ea typeface="29LT Bukra"/>
-                  <a:cs typeface="29LT Bukra"/>
-                  <a:sym typeface="29LT Bukra"/>
-                </a:rPr>
-                <a:t>i</a:t>
-              </a:r>
-              <a:r>
-                <a:rPr lang="en-US" sz="2299" strike="noStrike" u="none">
-                  <a:solidFill>
-                    <a:srgbClr val="FFFFFF"/>
-                  </a:solidFill>
-                  <a:latin typeface="29LT Bukra"/>
-                  <a:ea typeface="29LT Bukra"/>
-                  <a:cs typeface="29LT Bukra"/>
-                  <a:sym typeface="29LT Bukra"/>
-                </a:rPr>
-                <a:t>miza</a:t>
-              </a:r>
-              <a:r>
-                <a:rPr lang="en-US" sz="2299" strike="noStrike" u="none">
-                  <a:solidFill>
-                    <a:srgbClr val="FFFFFF"/>
-                  </a:solidFill>
-                  <a:latin typeface="29LT Bukra"/>
-                  <a:ea typeface="29LT Bukra"/>
-                  <a:cs typeface="29LT Bukra"/>
-                  <a:sym typeface="29LT Bukra"/>
-                </a:rPr>
-                <a:t>ci</a:t>
-              </a:r>
-              <a:r>
-                <a:rPr lang="en-US" sz="2299" strike="noStrike" u="none">
-                  <a:solidFill>
-                    <a:srgbClr val="FFFFFF"/>
-                  </a:solidFill>
-                  <a:latin typeface="29LT Bukra"/>
-                  <a:ea typeface="29LT Bukra"/>
-                  <a:cs typeface="29LT Bukra"/>
-                  <a:sym typeface="29LT Bukra"/>
-                </a:rPr>
-                <a:t>ó</a:t>
-              </a:r>
-              <a:r>
-                <a:rPr lang="en-US" sz="2299" strike="noStrike" u="none">
-                  <a:solidFill>
-                    <a:srgbClr val="FFFFFF"/>
-                  </a:solidFill>
-                  <a:latin typeface="29LT Bukra"/>
-                  <a:ea typeface="29LT Bukra"/>
-                  <a:cs typeface="29LT Bukra"/>
-                  <a:sym typeface="29LT Bukra"/>
-                </a:rPr>
-                <a:t>n </a:t>
-              </a:r>
-              <a:r>
-                <a:rPr lang="en-US" sz="2299" strike="noStrike" u="none">
-                  <a:solidFill>
-                    <a:srgbClr val="FFFFFF"/>
-                  </a:solidFill>
-                  <a:latin typeface="29LT Bukra"/>
-                  <a:ea typeface="29LT Bukra"/>
-                  <a:cs typeface="29LT Bukra"/>
-                  <a:sym typeface="29LT Bukra"/>
-                </a:rPr>
-                <a:t>y</a:t>
-              </a:r>
-              <a:r>
-                <a:rPr lang="en-US" sz="2299" strike="noStrike" u="none">
-                  <a:solidFill>
-                    <a:srgbClr val="FFFFFF"/>
-                  </a:solidFill>
-                  <a:latin typeface="29LT Bukra"/>
-                  <a:ea typeface="29LT Bukra"/>
-                  <a:cs typeface="29LT Bukra"/>
-                  <a:sym typeface="29LT Bukra"/>
-                </a:rPr>
-                <a:t> </a:t>
-              </a:r>
-              <a:r>
-                <a:rPr lang="en-US" sz="2299" strike="noStrike" u="none">
-                  <a:solidFill>
-                    <a:srgbClr val="FFFFFF"/>
-                  </a:solidFill>
-                  <a:latin typeface="29LT Bukra"/>
-                  <a:ea typeface="29LT Bukra"/>
-                  <a:cs typeface="29LT Bukra"/>
-                  <a:sym typeface="29LT Bukra"/>
-                </a:rPr>
-                <a:t>Vis</a:t>
-              </a:r>
-              <a:r>
-                <a:rPr lang="en-US" sz="2299" strike="noStrike" u="none">
-                  <a:solidFill>
-                    <a:srgbClr val="FFFFFF"/>
-                  </a:solidFill>
-                  <a:latin typeface="29LT Bukra"/>
-                  <a:ea typeface="29LT Bukra"/>
-                  <a:cs typeface="29LT Bukra"/>
-                  <a:sym typeface="29LT Bukra"/>
-                </a:rPr>
-                <a:t>ta</a:t>
-              </a:r>
-              <a:r>
-                <a:rPr lang="en-US" sz="2299" strike="noStrike" u="none">
-                  <a:solidFill>
-                    <a:srgbClr val="FFFFFF"/>
-                  </a:solidFill>
-                  <a:latin typeface="29LT Bukra"/>
-                  <a:ea typeface="29LT Bukra"/>
-                  <a:cs typeface="29LT Bukra"/>
-                  <a:sym typeface="29LT Bukra"/>
-                </a:rPr>
-                <a:t>s:</a:t>
-              </a:r>
-              <a:r>
-                <a:rPr lang="en-US" sz="2299" strike="noStrike" u="none">
-                  <a:solidFill>
-                    <a:srgbClr val="FFFFFF"/>
-                  </a:solidFill>
-                  <a:latin typeface="29LT Bukra"/>
-                  <a:ea typeface="29LT Bukra"/>
-                  <a:cs typeface="29LT Bukra"/>
-                  <a:sym typeface="29LT Bukra"/>
-                </a:rPr>
-                <a:t> </a:t>
-              </a:r>
-              <a:r>
-                <a:rPr lang="en-US" sz="2299" strike="noStrike" u="none">
-                  <a:solidFill>
-                    <a:srgbClr val="FFFFFF"/>
-                  </a:solidFill>
-                  <a:latin typeface="29LT Bukra"/>
-                  <a:ea typeface="29LT Bukra"/>
-                  <a:cs typeface="29LT Bukra"/>
-                  <a:sym typeface="29LT Bukra"/>
-                </a:rPr>
-                <a:t>r</a:t>
-              </a:r>
-              <a:r>
-                <a:rPr lang="en-US" sz="2299" strike="noStrike" u="none">
-                  <a:solidFill>
-                    <a:srgbClr val="FFFFFF"/>
-                  </a:solidFill>
-                  <a:latin typeface="29LT Bukra"/>
-                  <a:ea typeface="29LT Bukra"/>
-                  <a:cs typeface="29LT Bukra"/>
-                  <a:sym typeface="29LT Bukra"/>
-                </a:rPr>
-                <a:t>e</a:t>
-              </a:r>
-              <a:r>
-                <a:rPr lang="en-US" sz="2299" strike="noStrike" u="none">
-                  <a:solidFill>
-                    <a:srgbClr val="FFFFFF"/>
-                  </a:solidFill>
-                  <a:latin typeface="29LT Bukra"/>
-                  <a:ea typeface="29LT Bukra"/>
-                  <a:cs typeface="29LT Bukra"/>
-                  <a:sym typeface="29LT Bukra"/>
-                </a:rPr>
-                <a:t>spo</a:t>
-              </a:r>
-              <a:r>
-                <a:rPr lang="en-US" sz="2299" strike="noStrike" u="none">
-                  <a:solidFill>
-                    <a:srgbClr val="FFFFFF"/>
-                  </a:solidFill>
-                  <a:latin typeface="29LT Bukra"/>
-                  <a:ea typeface="29LT Bukra"/>
-                  <a:cs typeface="29LT Bukra"/>
-                  <a:sym typeface="29LT Bukra"/>
-                </a:rPr>
-                <a:t>n</a:t>
-              </a:r>
-              <a:r>
-                <a:rPr lang="en-US" sz="2299" strike="noStrike" u="none">
-                  <a:solidFill>
-                    <a:srgbClr val="FFFFFF"/>
-                  </a:solidFill>
-                  <a:latin typeface="29LT Bukra"/>
-                  <a:ea typeface="29LT Bukra"/>
-                  <a:cs typeface="29LT Bukra"/>
-                  <a:sym typeface="29LT Bukra"/>
-                </a:rPr>
-                <a:t>sable</a:t>
-              </a:r>
-              <a:r>
-                <a:rPr lang="en-US" sz="2299" strike="noStrike" u="none">
-                  <a:solidFill>
-                    <a:srgbClr val="FFFFFF"/>
-                  </a:solidFill>
-                  <a:latin typeface="29LT Bukra"/>
-                  <a:ea typeface="29LT Bukra"/>
-                  <a:cs typeface="29LT Bukra"/>
-                  <a:sym typeface="29LT Bukra"/>
-                </a:rPr>
-                <a:t> </a:t>
-              </a:r>
-              <a:r>
-                <a:rPr lang="en-US" sz="2299" strike="noStrike" u="none">
-                  <a:solidFill>
-                    <a:srgbClr val="FFFFFF"/>
-                  </a:solidFill>
-                  <a:latin typeface="29LT Bukra"/>
-                  <a:ea typeface="29LT Bukra"/>
-                  <a:cs typeface="29LT Bukra"/>
-                  <a:sym typeface="29LT Bukra"/>
-                </a:rPr>
-                <a:t>d</a:t>
-              </a:r>
-              <a:r>
-                <a:rPr lang="en-US" sz="2299" strike="noStrike" u="none">
-                  <a:solidFill>
-                    <a:srgbClr val="FFFFFF"/>
-                  </a:solidFill>
-                  <a:latin typeface="29LT Bukra"/>
-                  <a:ea typeface="29LT Bukra"/>
-                  <a:cs typeface="29LT Bukra"/>
-                  <a:sym typeface="29LT Bukra"/>
-                </a:rPr>
-                <a:t>e </a:t>
-              </a:r>
-              <a:r>
-                <a:rPr lang="en-US" sz="2299" strike="noStrike" u="none">
-                  <a:solidFill>
-                    <a:srgbClr val="FFFFFF"/>
-                  </a:solidFill>
-                  <a:latin typeface="29LT Bukra"/>
-                  <a:ea typeface="29LT Bukra"/>
-                  <a:cs typeface="29LT Bukra"/>
-                  <a:sym typeface="29LT Bukra"/>
-                </a:rPr>
-                <a:t>los í</a:t>
-              </a:r>
-              <a:r>
-                <a:rPr lang="en-US" sz="2299" strike="noStrike" u="none">
-                  <a:solidFill>
-                    <a:srgbClr val="FFFFFF"/>
-                  </a:solidFill>
-                  <a:latin typeface="29LT Bukra"/>
-                  <a:ea typeface="29LT Bukra"/>
-                  <a:cs typeface="29LT Bukra"/>
-                  <a:sym typeface="29LT Bukra"/>
-                </a:rPr>
-                <a:t>n</a:t>
-              </a:r>
-              <a:r>
-                <a:rPr lang="en-US" sz="2299" strike="noStrike" u="none">
-                  <a:solidFill>
-                    <a:srgbClr val="FFFFFF"/>
-                  </a:solidFill>
-                  <a:latin typeface="29LT Bukra"/>
-                  <a:ea typeface="29LT Bukra"/>
-                  <a:cs typeface="29LT Bukra"/>
-                  <a:sym typeface="29LT Bukra"/>
-                </a:rPr>
-                <a:t>d</a:t>
-              </a:r>
-              <a:r>
-                <a:rPr lang="en-US" sz="2299" strike="noStrike" u="none">
-                  <a:solidFill>
-                    <a:srgbClr val="FFFFFF"/>
-                  </a:solidFill>
-                  <a:latin typeface="29LT Bukra"/>
-                  <a:ea typeface="29LT Bukra"/>
-                  <a:cs typeface="29LT Bukra"/>
-                  <a:sym typeface="29LT Bukra"/>
-                </a:rPr>
-                <a:t>i</a:t>
-              </a:r>
-              <a:r>
-                <a:rPr lang="en-US" sz="2299" strike="noStrike" u="none">
-                  <a:solidFill>
-                    <a:srgbClr val="FFFFFF"/>
-                  </a:solidFill>
-                  <a:latin typeface="29LT Bukra"/>
-                  <a:ea typeface="29LT Bukra"/>
-                  <a:cs typeface="29LT Bukra"/>
-                  <a:sym typeface="29LT Bukra"/>
-                </a:rPr>
-                <a:t>ce</a:t>
-              </a:r>
-              <a:r>
-                <a:rPr lang="en-US" sz="2299" strike="noStrike" u="none">
-                  <a:solidFill>
-                    <a:srgbClr val="FFFFFF"/>
-                  </a:solidFill>
-                  <a:latin typeface="29LT Bukra"/>
-                  <a:ea typeface="29LT Bukra"/>
-                  <a:cs typeface="29LT Bukra"/>
-                  <a:sym typeface="29LT Bukra"/>
-                </a:rPr>
-                <a:t>s</a:t>
-              </a:r>
-              <a:r>
-                <a:rPr lang="en-US" sz="2299" strike="noStrike" u="none">
-                  <a:solidFill>
-                    <a:srgbClr val="FFFFFF"/>
-                  </a:solidFill>
-                  <a:latin typeface="29LT Bukra"/>
-                  <a:ea typeface="29LT Bukra"/>
-                  <a:cs typeface="29LT Bukra"/>
-                  <a:sym typeface="29LT Bukra"/>
-                </a:rPr>
-                <a:t> c</a:t>
-              </a:r>
-              <a:r>
-                <a:rPr lang="en-US" sz="2299" strike="noStrike" u="none">
-                  <a:solidFill>
-                    <a:srgbClr val="FFFFFF"/>
-                  </a:solidFill>
-                  <a:latin typeface="29LT Bukra"/>
-                  <a:ea typeface="29LT Bukra"/>
-                  <a:cs typeface="29LT Bukra"/>
-                  <a:sym typeface="29LT Bukra"/>
-                </a:rPr>
-                <a:t>lu</a:t>
-              </a:r>
-              <a:r>
-                <a:rPr lang="en-US" sz="2299" strike="noStrike" u="none">
-                  <a:solidFill>
-                    <a:srgbClr val="FFFFFF"/>
-                  </a:solidFill>
-                  <a:latin typeface="29LT Bukra"/>
-                  <a:ea typeface="29LT Bukra"/>
-                  <a:cs typeface="29LT Bukra"/>
-                  <a:sym typeface="29LT Bukra"/>
-                </a:rPr>
-                <a:t>stered/non-c</a:t>
-              </a:r>
-              <a:r>
-                <a:rPr lang="en-US" sz="2299" strike="noStrike" u="none">
-                  <a:solidFill>
-                    <a:srgbClr val="FFFFFF"/>
-                  </a:solidFill>
-                  <a:latin typeface="29LT Bukra"/>
-                  <a:ea typeface="29LT Bukra"/>
-                  <a:cs typeface="29LT Bukra"/>
-                  <a:sym typeface="29LT Bukra"/>
-                </a:rPr>
-                <a:t>l</a:t>
-              </a:r>
-              <a:r>
-                <a:rPr lang="en-US" sz="2299" strike="noStrike" u="none">
-                  <a:solidFill>
-                    <a:srgbClr val="FFFFFF"/>
-                  </a:solidFill>
-                  <a:latin typeface="29LT Bukra"/>
-                  <a:ea typeface="29LT Bukra"/>
-                  <a:cs typeface="29LT Bukra"/>
-                  <a:sym typeface="29LT Bukra"/>
-                </a:rPr>
-                <a:t>ustered, </a:t>
-              </a:r>
-              <a:r>
-                <a:rPr lang="en-US" sz="2299" strike="noStrike" u="none">
-                  <a:solidFill>
-                    <a:srgbClr val="FFFFFF"/>
-                  </a:solidFill>
-                  <a:latin typeface="29LT Bukra"/>
-                  <a:ea typeface="29LT Bukra"/>
-                  <a:cs typeface="29LT Bukra"/>
-                  <a:sym typeface="29LT Bukra"/>
-                </a:rPr>
-                <a:t>la</a:t>
-              </a:r>
-              <a:r>
-                <a:rPr lang="en-US" sz="2299" strike="noStrike" u="none">
-                  <a:solidFill>
-                    <a:srgbClr val="FFFFFF"/>
-                  </a:solidFill>
-                  <a:latin typeface="29LT Bukra"/>
-                  <a:ea typeface="29LT Bukra"/>
-                  <a:cs typeface="29LT Bukra"/>
-                  <a:sym typeface="29LT Bukra"/>
-                </a:rPr>
-                <a:t>s vistas (si</a:t>
-              </a:r>
-              <a:r>
-                <a:rPr lang="en-US" sz="2299" strike="noStrike" u="none">
-                  <a:solidFill>
-                    <a:srgbClr val="FFFFFF"/>
-                  </a:solidFill>
-                  <a:latin typeface="29LT Bukra"/>
-                  <a:ea typeface="29LT Bukra"/>
-                  <a:cs typeface="29LT Bukra"/>
-                  <a:sym typeface="29LT Bukra"/>
-                </a:rPr>
-                <a:t>mp</a:t>
-              </a:r>
-              <a:r>
-                <a:rPr lang="en-US" sz="2299" strike="noStrike" u="none">
-                  <a:solidFill>
-                    <a:srgbClr val="FFFFFF"/>
-                  </a:solidFill>
-                  <a:latin typeface="29LT Bukra"/>
-                  <a:ea typeface="29LT Bukra"/>
-                  <a:cs typeface="29LT Bukra"/>
-                  <a:sym typeface="29LT Bukra"/>
-                </a:rPr>
-                <a:t>l</a:t>
-              </a:r>
-              <a:r>
-                <a:rPr lang="en-US" sz="2299" strike="noStrike" u="none">
-                  <a:solidFill>
-                    <a:srgbClr val="FFFFFF"/>
-                  </a:solidFill>
-                  <a:latin typeface="29LT Bukra"/>
-                  <a:ea typeface="29LT Bukra"/>
-                  <a:cs typeface="29LT Bukra"/>
-                  <a:sym typeface="29LT Bukra"/>
-                </a:rPr>
-                <a:t>e</a:t>
-              </a:r>
-              <a:r>
-                <a:rPr lang="en-US" sz="2299" strike="noStrike" u="none">
-                  <a:solidFill>
-                    <a:srgbClr val="FFFFFF"/>
-                  </a:solidFill>
-                  <a:latin typeface="29LT Bukra"/>
-                  <a:ea typeface="29LT Bukra"/>
-                  <a:cs typeface="29LT Bukra"/>
-                  <a:sym typeface="29LT Bukra"/>
-                </a:rPr>
-                <a:t>s</a:t>
-              </a:r>
-              <a:r>
-                <a:rPr lang="en-US" sz="2299" strike="noStrike" u="none">
-                  <a:solidFill>
-                    <a:srgbClr val="FFFFFF"/>
-                  </a:solidFill>
-                  <a:latin typeface="29LT Bukra"/>
-                  <a:ea typeface="29LT Bukra"/>
-                  <a:cs typeface="29LT Bukra"/>
-                  <a:sym typeface="29LT Bukra"/>
-                </a:rPr>
-                <a:t> e</a:t>
-              </a:r>
-              <a:r>
-                <a:rPr lang="en-US" sz="2299" strike="noStrike" u="none">
-                  <a:solidFill>
-                    <a:srgbClr val="FFFFFF"/>
-                  </a:solidFill>
-                  <a:latin typeface="29LT Bukra"/>
-                  <a:ea typeface="29LT Bukra"/>
-                  <a:cs typeface="29LT Bukra"/>
-                  <a:sym typeface="29LT Bukra"/>
-                </a:rPr>
-                <a:t> </a:t>
-              </a:r>
-              <a:r>
-                <a:rPr lang="en-US" sz="2299" strike="noStrike" u="none">
-                  <a:solidFill>
-                    <a:srgbClr val="FFFFFF"/>
-                  </a:solidFill>
-                  <a:latin typeface="29LT Bukra"/>
-                  <a:ea typeface="29LT Bukra"/>
-                  <a:cs typeface="29LT Bukra"/>
-                  <a:sym typeface="29LT Bukra"/>
-                </a:rPr>
-                <a:t>inde</a:t>
-              </a:r>
-              <a:r>
-                <a:rPr lang="en-US" sz="2299" strike="noStrike" u="none">
-                  <a:solidFill>
-                    <a:srgbClr val="FFFFFF"/>
-                  </a:solidFill>
-                  <a:latin typeface="29LT Bukra"/>
-                  <a:ea typeface="29LT Bukra"/>
-                  <a:cs typeface="29LT Bukra"/>
-                  <a:sym typeface="29LT Bukra"/>
-                </a:rPr>
-                <a:t>xada</a:t>
-              </a:r>
-              <a:r>
-                <a:rPr lang="en-US" sz="2299" strike="noStrike" u="none">
-                  <a:solidFill>
-                    <a:srgbClr val="FFFFFF"/>
-                  </a:solidFill>
-                  <a:latin typeface="29LT Bukra"/>
-                  <a:ea typeface="29LT Bukra"/>
-                  <a:cs typeface="29LT Bukra"/>
-                  <a:sym typeface="29LT Bukra"/>
-                </a:rPr>
-                <a:t>s</a:t>
-              </a:r>
-              <a:r>
-                <a:rPr lang="en-US" sz="2299" strike="noStrike" u="none">
-                  <a:solidFill>
-                    <a:srgbClr val="FFFFFF"/>
-                  </a:solidFill>
-                  <a:latin typeface="29LT Bukra"/>
-                  <a:ea typeface="29LT Bukra"/>
-                  <a:cs typeface="29LT Bukra"/>
-                  <a:sym typeface="29LT Bukra"/>
-                </a:rPr>
-                <a:t>), y </a:t>
-              </a:r>
-              <a:r>
-                <a:rPr lang="en-US" sz="2299" strike="noStrike" u="none">
-                  <a:solidFill>
-                    <a:srgbClr val="FFFFFF"/>
-                  </a:solidFill>
-                  <a:latin typeface="29LT Bukra"/>
-                  <a:ea typeface="29LT Bukra"/>
-                  <a:cs typeface="29LT Bukra"/>
-                  <a:sym typeface="29LT Bukra"/>
-                </a:rPr>
-                <a:t>e</a:t>
-              </a:r>
-              <a:r>
-                <a:rPr lang="en-US" sz="2299" strike="noStrike" u="none">
-                  <a:solidFill>
-                    <a:srgbClr val="FFFFFF"/>
-                  </a:solidFill>
-                  <a:latin typeface="29LT Bukra"/>
-                  <a:ea typeface="29LT Bukra"/>
-                  <a:cs typeface="29LT Bukra"/>
-                  <a:sym typeface="29LT Bukra"/>
-                </a:rPr>
-                <a:t>l</a:t>
-              </a:r>
-              <a:r>
-                <a:rPr lang="en-US" sz="2299" strike="noStrike" u="none">
-                  <a:solidFill>
-                    <a:srgbClr val="FFFFFF"/>
-                  </a:solidFill>
-                  <a:latin typeface="29LT Bukra"/>
-                  <a:ea typeface="29LT Bukra"/>
-                  <a:cs typeface="29LT Bukra"/>
-                  <a:sym typeface="29LT Bukra"/>
-                </a:rPr>
-                <a:t> </a:t>
-              </a:r>
-              <a:r>
-                <a:rPr lang="en-US" sz="2299" strike="noStrike" u="none">
-                  <a:solidFill>
-                    <a:srgbClr val="FFFFFF"/>
-                  </a:solidFill>
-                  <a:latin typeface="29LT Bukra"/>
-                  <a:ea typeface="29LT Bukra"/>
-                  <a:cs typeface="29LT Bukra"/>
-                  <a:sym typeface="29LT Bukra"/>
-                </a:rPr>
-                <a:t>anál</a:t>
-              </a:r>
-              <a:r>
-                <a:rPr lang="en-US" sz="2299" strike="noStrike" u="none">
-                  <a:solidFill>
-                    <a:srgbClr val="FFFFFF"/>
-                  </a:solidFill>
-                  <a:latin typeface="29LT Bukra"/>
-                  <a:ea typeface="29LT Bukra"/>
-                  <a:cs typeface="29LT Bukra"/>
-                  <a:sym typeface="29LT Bukra"/>
-                </a:rPr>
-                <a:t>is</a:t>
-              </a:r>
-              <a:r>
-                <a:rPr lang="en-US" sz="2299" strike="noStrike" u="none">
-                  <a:solidFill>
-                    <a:srgbClr val="FFFFFF"/>
-                  </a:solidFill>
-                  <a:latin typeface="29LT Bukra"/>
-                  <a:ea typeface="29LT Bukra"/>
-                  <a:cs typeface="29LT Bukra"/>
-                  <a:sym typeface="29LT Bukra"/>
-                </a:rPr>
-                <a:t>i</a:t>
-              </a:r>
-              <a:r>
-                <a:rPr lang="en-US" sz="2299" strike="noStrike" u="none">
-                  <a:solidFill>
-                    <a:srgbClr val="FFFFFF"/>
-                  </a:solidFill>
-                  <a:latin typeface="29LT Bukra"/>
-                  <a:ea typeface="29LT Bukra"/>
-                  <a:cs typeface="29LT Bukra"/>
-                  <a:sym typeface="29LT Bukra"/>
-                </a:rPr>
-                <a:t>s </a:t>
-              </a:r>
-              <a:r>
-                <a:rPr lang="en-US" sz="2299" strike="noStrike" u="none">
-                  <a:solidFill>
-                    <a:srgbClr val="FFFFFF"/>
-                  </a:solidFill>
-                  <a:latin typeface="29LT Bukra"/>
-                  <a:ea typeface="29LT Bukra"/>
-                  <a:cs typeface="29LT Bukra"/>
-                  <a:sym typeface="29LT Bukra"/>
-                </a:rPr>
-                <a:t>d</a:t>
-              </a:r>
-              <a:r>
-                <a:rPr lang="en-US" sz="2299" strike="noStrike" u="none">
-                  <a:solidFill>
-                    <a:srgbClr val="FFFFFF"/>
-                  </a:solidFill>
-                  <a:latin typeface="29LT Bukra"/>
-                  <a:ea typeface="29LT Bukra"/>
-                  <a:cs typeface="29LT Bukra"/>
-                  <a:sym typeface="29LT Bukra"/>
-                </a:rPr>
-                <a:t>e r</a:t>
-              </a:r>
-              <a:r>
-                <a:rPr lang="en-US" sz="2299" strike="noStrike" u="none">
-                  <a:solidFill>
-                    <a:srgbClr val="FFFFFF"/>
-                  </a:solidFill>
-                  <a:latin typeface="29LT Bukra"/>
-                  <a:ea typeface="29LT Bukra"/>
-                  <a:cs typeface="29LT Bukra"/>
-                  <a:sym typeface="29LT Bukra"/>
-                </a:rPr>
-                <a:t>e</a:t>
-              </a:r>
-              <a:r>
-                <a:rPr lang="en-US" sz="2299" strike="noStrike" u="none">
-                  <a:solidFill>
-                    <a:srgbClr val="FFFFFF"/>
-                  </a:solidFill>
-                  <a:latin typeface="29LT Bukra"/>
-                  <a:ea typeface="29LT Bukra"/>
-                  <a:cs typeface="29LT Bukra"/>
-                  <a:sym typeface="29LT Bukra"/>
-                </a:rPr>
-                <a:t>n</a:t>
-              </a:r>
-              <a:r>
-                <a:rPr lang="en-US" sz="2299" strike="noStrike" u="none">
-                  <a:solidFill>
-                    <a:srgbClr val="FFFFFF"/>
-                  </a:solidFill>
-                  <a:latin typeface="29LT Bukra"/>
-                  <a:ea typeface="29LT Bukra"/>
-                  <a:cs typeface="29LT Bukra"/>
-                  <a:sym typeface="29LT Bukra"/>
-                </a:rPr>
-                <a:t>d</a:t>
-              </a:r>
-              <a:r>
-                <a:rPr lang="en-US" sz="2299" strike="noStrike" u="none">
-                  <a:solidFill>
-                    <a:srgbClr val="FFFFFF"/>
-                  </a:solidFill>
-                  <a:latin typeface="29LT Bukra"/>
-                  <a:ea typeface="29LT Bukra"/>
-                  <a:cs typeface="29LT Bukra"/>
-                  <a:sym typeface="29LT Bukra"/>
-                </a:rPr>
-                <a:t>i</a:t>
-              </a:r>
-              <a:r>
-                <a:rPr lang="en-US" sz="2299" strike="noStrike" u="none">
-                  <a:solidFill>
-                    <a:srgbClr val="FFFFFF"/>
-                  </a:solidFill>
-                  <a:latin typeface="29LT Bukra"/>
-                  <a:ea typeface="29LT Bukra"/>
-                  <a:cs typeface="29LT Bukra"/>
-                  <a:sym typeface="29LT Bukra"/>
-                </a:rPr>
-                <a:t>miento de </a:t>
-              </a:r>
-              <a:r>
-                <a:rPr lang="en-US" sz="2299" strike="noStrike" u="none">
-                  <a:solidFill>
-                    <a:srgbClr val="FFFFFF"/>
-                  </a:solidFill>
-                  <a:latin typeface="29LT Bukra"/>
-                  <a:ea typeface="29LT Bukra"/>
-                  <a:cs typeface="29LT Bukra"/>
-                  <a:sym typeface="29LT Bukra"/>
-                </a:rPr>
-                <a:t>l</a:t>
-              </a:r>
-              <a:r>
-                <a:rPr lang="en-US" sz="2299" strike="noStrike" u="none">
-                  <a:solidFill>
-                    <a:srgbClr val="FFFFFF"/>
-                  </a:solidFill>
-                  <a:latin typeface="29LT Bukra"/>
-                  <a:ea typeface="29LT Bukra"/>
-                  <a:cs typeface="29LT Bukra"/>
-                  <a:sym typeface="29LT Bukra"/>
-                </a:rPr>
-                <a:t>as consu</a:t>
-              </a:r>
-              <a:r>
-                <a:rPr lang="en-US" sz="2299" strike="noStrike" u="none">
-                  <a:solidFill>
-                    <a:srgbClr val="FFFFFF"/>
-                  </a:solidFill>
-                  <a:latin typeface="29LT Bukra"/>
-                  <a:ea typeface="29LT Bukra"/>
-                  <a:cs typeface="29LT Bukra"/>
-                  <a:sym typeface="29LT Bukra"/>
-                </a:rPr>
-                <a:t>l</a:t>
-              </a:r>
-              <a:r>
-                <a:rPr lang="en-US" sz="2299" strike="noStrike" u="none">
-                  <a:solidFill>
-                    <a:srgbClr val="FFFFFF"/>
-                  </a:solidFill>
-                  <a:latin typeface="29LT Bukra"/>
-                  <a:ea typeface="29LT Bukra"/>
-                  <a:cs typeface="29LT Bukra"/>
-                  <a:sym typeface="29LT Bukra"/>
-                </a:rPr>
-                <a:t>t</a:t>
-              </a:r>
-              <a:r>
-                <a:rPr lang="en-US" sz="2299" strike="noStrike" u="none">
-                  <a:solidFill>
-                    <a:srgbClr val="FFFFFF"/>
-                  </a:solidFill>
-                  <a:latin typeface="29LT Bukra"/>
-                  <a:ea typeface="29LT Bukra"/>
-                  <a:cs typeface="29LT Bukra"/>
-                  <a:sym typeface="29LT Bukra"/>
-                </a:rPr>
-                <a:t>a</a:t>
-              </a:r>
-              <a:r>
-                <a:rPr lang="en-US" sz="2299" strike="noStrike" u="none">
-                  <a:solidFill>
-                    <a:srgbClr val="FFFFFF"/>
-                  </a:solidFill>
-                  <a:latin typeface="29LT Bukra"/>
-                  <a:ea typeface="29LT Bukra"/>
-                  <a:cs typeface="29LT Bukra"/>
-                  <a:sym typeface="29LT Bukra"/>
-                </a:rPr>
-                <a:t>s</a:t>
-              </a:r>
-              <a:r>
-                <a:rPr lang="en-US" sz="2299" strike="noStrike" u="none">
-                  <a:solidFill>
-                    <a:srgbClr val="FFFFFF"/>
-                  </a:solidFill>
-                  <a:latin typeface="29LT Bukra"/>
-                  <a:ea typeface="29LT Bukra"/>
-                  <a:cs typeface="29LT Bukra"/>
-                  <a:sym typeface="29LT Bukra"/>
-                </a:rPr>
-                <a:t> </a:t>
-              </a:r>
-              <a:r>
-                <a:rPr lang="en-US" sz="2299" strike="noStrike" u="none">
-                  <a:solidFill>
-                    <a:srgbClr val="FFFFFF"/>
-                  </a:solidFill>
-                  <a:latin typeface="29LT Bukra"/>
-                  <a:ea typeface="29LT Bukra"/>
-                  <a:cs typeface="29LT Bukra"/>
-                  <a:sym typeface="29LT Bukra"/>
-                </a:rPr>
-                <a:t>d</a:t>
-              </a:r>
-              <a:r>
-                <a:rPr lang="en-US" sz="2299" strike="noStrike" u="none">
-                  <a:solidFill>
-                    <a:srgbClr val="FFFFFF"/>
-                  </a:solidFill>
-                  <a:latin typeface="29LT Bukra"/>
-                  <a:ea typeface="29LT Bukra"/>
-                  <a:cs typeface="29LT Bukra"/>
-                  <a:sym typeface="29LT Bukra"/>
-                </a:rPr>
-                <a:t>e</a:t>
-              </a:r>
-              <a:r>
-                <a:rPr lang="en-US" sz="2299" strike="noStrike" u="none">
-                  <a:solidFill>
-                    <a:srgbClr val="FFFFFF"/>
-                  </a:solidFill>
-                  <a:latin typeface="29LT Bukra"/>
-                  <a:ea typeface="29LT Bukra"/>
-                  <a:cs typeface="29LT Bukra"/>
-                  <a:sym typeface="29LT Bukra"/>
-                </a:rPr>
-                <a:t>l</a:t>
-              </a:r>
-              <a:r>
-                <a:rPr lang="en-US" sz="2299" strike="noStrike" u="none">
-                  <a:solidFill>
-                    <a:srgbClr val="FFFFFF"/>
-                  </a:solidFill>
-                  <a:latin typeface="29LT Bukra"/>
-                  <a:ea typeface="29LT Bukra"/>
-                  <a:cs typeface="29LT Bukra"/>
-                  <a:sym typeface="29LT Bukra"/>
-                </a:rPr>
-                <a:t> </a:t>
-              </a:r>
-              <a:r>
-                <a:rPr lang="en-US" sz="2299" strike="noStrike" u="none">
-                  <a:solidFill>
-                    <a:srgbClr val="FFFFFF"/>
-                  </a:solidFill>
-                  <a:latin typeface="29LT Bukra"/>
-                  <a:ea typeface="29LT Bukra"/>
-                  <a:cs typeface="29LT Bukra"/>
-                  <a:sym typeface="29LT Bukra"/>
-                </a:rPr>
-                <a:t>s</a:t>
-              </a:r>
-              <a:r>
-                <a:rPr lang="en-US" sz="2299" strike="noStrike" u="none">
-                  <a:solidFill>
-                    <a:srgbClr val="FFFFFF"/>
-                  </a:solidFill>
-                  <a:latin typeface="29LT Bukra"/>
-                  <a:ea typeface="29LT Bukra"/>
-                  <a:cs typeface="29LT Bukra"/>
-                  <a:sym typeface="29LT Bukra"/>
-                </a:rPr>
-                <a:t>is</a:t>
-              </a:r>
-              <a:r>
-                <a:rPr lang="en-US" sz="2299" strike="noStrike" u="none">
-                  <a:solidFill>
-                    <a:srgbClr val="FFFFFF"/>
-                  </a:solidFill>
-                  <a:latin typeface="29LT Bukra"/>
-                  <a:ea typeface="29LT Bukra"/>
-                  <a:cs typeface="29LT Bukra"/>
-                  <a:sym typeface="29LT Bukra"/>
-                </a:rPr>
-                <a:t>te</a:t>
-              </a:r>
-              <a:r>
-                <a:rPr lang="en-US" sz="2299" strike="noStrike" u="none">
-                  <a:solidFill>
-                    <a:srgbClr val="FFFFFF"/>
-                  </a:solidFill>
-                  <a:latin typeface="29LT Bukra"/>
-                  <a:ea typeface="29LT Bukra"/>
-                  <a:cs typeface="29LT Bukra"/>
-                  <a:sym typeface="29LT Bukra"/>
-                </a:rPr>
-                <a:t>m</a:t>
-              </a:r>
-              <a:r>
-                <a:rPr lang="en-US" sz="2299" strike="noStrike" u="none">
-                  <a:solidFill>
-                    <a:srgbClr val="FFFFFF"/>
-                  </a:solidFill>
-                  <a:latin typeface="29LT Bukra"/>
-                  <a:ea typeface="29LT Bukra"/>
-                  <a:cs typeface="29LT Bukra"/>
-                  <a:sym typeface="29LT Bukra"/>
-                </a:rPr>
-                <a:t>a</a:t>
-              </a:r>
-              <a:r>
-                <a:rPr lang="en-US" sz="2299" strike="noStrike" u="none">
-                  <a:solidFill>
-                    <a:srgbClr val="FFFFFF"/>
-                  </a:solidFill>
-                  <a:latin typeface="29LT Bukra"/>
-                  <a:ea typeface="29LT Bukra"/>
-                  <a:cs typeface="29LT Bukra"/>
-                  <a:sym typeface="29LT Bukra"/>
-                </a:rPr>
-                <a:t>.</a:t>
+                <a:t>ecialista en Optimización y Vistas: responsable de los índices clustered/non-clustered, las vistas (simples e indexadas), y el análisis de rendimiento de las consultas del sistema.</a:t>
               </a:r>
             </a:p>
           </p:txBody>
@@ -9224,12 +5510,12 @@
       </p:grpSp>
       <p:sp>
         <p:nvSpPr>
-          <p:cNvPr name="TextBox 16" id="16"/>
-          <p:cNvSpPr txBox="true"/>
+          <p:cNvPr id="16" name="TextBox 16"/>
+          <p:cNvSpPr txBox="1"/>
           <p:nvPr/>
         </p:nvSpPr>
         <p:spPr>
-          <a:xfrm rot="0">
+          <a:xfrm>
             <a:off x="1028700" y="476117"/>
             <a:ext cx="11749802" cy="1556385"/>
           </a:xfrm>
@@ -9238,7 +5524,7 @@
           </a:prstGeom>
         </p:spPr>
         <p:txBody>
-          <a:bodyPr anchor="t" rtlCol="false" tIns="0" lIns="0" bIns="0" rIns="0">
+          <a:bodyPr lIns="0" tIns="0" rIns="0" bIns="0" rtlCol="0" anchor="t">
             <a:spAutoFit/>
           </a:bodyPr>
           <a:lstStyle/>
@@ -9249,7 +5535,7 @@
               </a:lnSpc>
             </a:pPr>
             <a:r>
-              <a:rPr lang="en-US" b="true" sz="8000">
+              <a:rPr lang="en-US" sz="8000" b="1">
                 <a:solidFill>
                   <a:srgbClr val="38B6FF"/>
                 </a:solidFill>
@@ -9272,7 +5558,7 @@
 </file>
 
 <file path=ppt/slides/slide3.xml><?xml version="1.0" encoding="utf-8"?>
-<p:sld xmlns:p="http://schemas.openxmlformats.org/presentationml/2006/main" xmlns:a="http://schemas.openxmlformats.org/drawingml/2006/main" xmlns:r="http://schemas.openxmlformats.org/officeDocument/2006/relationships">
+<p:sld xmlns:a="http://schemas.openxmlformats.org/drawingml/2006/main" xmlns:r="http://schemas.openxmlformats.org/officeDocument/2006/relationships" xmlns:p="http://schemas.openxmlformats.org/presentationml/2006/main">
   <p:cSld>
     <p:spTree>
       <p:nvGrpSpPr>
@@ -9290,12 +5576,12 @@
       </p:grpSpPr>
       <p:sp>
         <p:nvSpPr>
-          <p:cNvPr name="Freeform 2" id="2"/>
+          <p:cNvPr id="2" name="Freeform 2"/>
           <p:cNvSpPr/>
           <p:nvPr/>
         </p:nvSpPr>
         <p:spPr>
-          <a:xfrm flipH="false" flipV="false" rot="0">
+          <a:xfrm>
             <a:off x="0" y="0"/>
             <a:ext cx="18288000" cy="10287000"/>
           </a:xfrm>
@@ -9304,9 +5590,9 @@
             <a:gdLst/>
             <a:ahLst/>
             <a:cxnLst/>
-            <a:rect r="r" b="b" t="t" l="l"/>
+            <a:rect l="l" t="t" r="r" b="b"/>
             <a:pathLst>
-              <a:path h="10287000" w="18288000">
+              <a:path w="18288000" h="10287000">
                 <a:moveTo>
                   <a:pt x="0" y="0"/>
                 </a:moveTo>
@@ -9329,19 +5615,19 @@
           <a:blipFill>
             <a:blip r:embed="rId2"/>
             <a:stretch>
-              <a:fillRect l="0" t="0" r="0" b="0"/>
+              <a:fillRect/>
             </a:stretch>
           </a:blipFill>
         </p:spPr>
       </p:sp>
       <p:sp>
         <p:nvSpPr>
-          <p:cNvPr name="Freeform 3" id="3"/>
+          <p:cNvPr id="3" name="Freeform 3"/>
           <p:cNvSpPr/>
           <p:nvPr/>
         </p:nvSpPr>
         <p:spPr>
-          <a:xfrm flipH="false" flipV="false" rot="0">
+          <a:xfrm>
             <a:off x="622716" y="1821561"/>
             <a:ext cx="2527786" cy="2527786"/>
           </a:xfrm>
@@ -9350,9 +5636,9 @@
             <a:gdLst/>
             <a:ahLst/>
             <a:cxnLst/>
-            <a:rect r="r" b="b" t="t" l="l"/>
+            <a:rect l="l" t="t" r="r" b="b"/>
             <a:pathLst>
-              <a:path h="2527786" w="2527786">
+              <a:path w="2527786" h="2527786">
                 <a:moveTo>
                   <a:pt x="0" y="0"/>
                 </a:moveTo>
@@ -9375,19 +5661,19 @@
           <a:blipFill>
             <a:blip r:embed="rId3"/>
             <a:stretch>
-              <a:fillRect l="0" t="0" r="0" b="0"/>
+              <a:fillRect/>
             </a:stretch>
           </a:blipFill>
         </p:spPr>
       </p:sp>
       <p:sp>
         <p:nvSpPr>
-          <p:cNvPr name="Freeform 4" id="4"/>
+          <p:cNvPr id="4" name="Freeform 4"/>
           <p:cNvSpPr/>
           <p:nvPr/>
         </p:nvSpPr>
         <p:spPr>
-          <a:xfrm flipH="false" flipV="false" rot="0">
+          <a:xfrm>
             <a:off x="15338231" y="2018547"/>
             <a:ext cx="2621465" cy="2621465"/>
           </a:xfrm>
@@ -9396,9 +5682,9 @@
             <a:gdLst/>
             <a:ahLst/>
             <a:cxnLst/>
-            <a:rect r="r" b="b" t="t" l="l"/>
+            <a:rect l="l" t="t" r="r" b="b"/>
             <a:pathLst>
-              <a:path h="2621465" w="2621465">
+              <a:path w="2621465" h="2621465">
                 <a:moveTo>
                   <a:pt x="0" y="0"/>
                 </a:moveTo>
@@ -9421,19 +5707,19 @@
           <a:blipFill>
             <a:blip r:embed="rId4"/>
             <a:stretch>
-              <a:fillRect l="0" t="0" r="0" b="0"/>
+              <a:fillRect/>
             </a:stretch>
           </a:blipFill>
         </p:spPr>
       </p:sp>
       <p:sp>
         <p:nvSpPr>
-          <p:cNvPr name="TextBox 5" id="5"/>
-          <p:cNvSpPr txBox="true"/>
+          <p:cNvPr id="5" name="TextBox 5"/>
+          <p:cNvSpPr txBox="1"/>
           <p:nvPr/>
         </p:nvSpPr>
         <p:spPr>
-          <a:xfrm rot="0">
+          <a:xfrm>
             <a:off x="1028700" y="265176"/>
             <a:ext cx="16230600" cy="1556385"/>
           </a:xfrm>
@@ -9442,7 +5728,7 @@
           </a:prstGeom>
         </p:spPr>
         <p:txBody>
-          <a:bodyPr anchor="t" rtlCol="false" tIns="0" lIns="0" bIns="0" rIns="0">
+          <a:bodyPr lIns="0" tIns="0" rIns="0" bIns="0" rtlCol="0" anchor="t">
             <a:spAutoFit/>
           </a:bodyPr>
           <a:lstStyle/>
@@ -9453,7 +5739,7 @@
               </a:lnSpc>
             </a:pPr>
             <a:r>
-              <a:rPr lang="en-US" b="true" sz="8000">
+              <a:rPr lang="en-US" sz="8000" b="1">
                 <a:solidFill>
                   <a:srgbClr val="38B6FF"/>
                 </a:solidFill>
@@ -9469,12 +5755,12 @@
       </p:sp>
       <p:grpSp>
         <p:nvGrpSpPr>
-          <p:cNvPr name="Group 6" id="6"/>
+          <p:cNvPr id="6" name="Group 6"/>
           <p:cNvGrpSpPr/>
           <p:nvPr/>
         </p:nvGrpSpPr>
         <p:grpSpPr>
-          <a:xfrm rot="0">
+          <a:xfrm>
             <a:off x="2953517" y="2245365"/>
             <a:ext cx="6190483" cy="7012935"/>
             <a:chOff x="0" y="0"/>
@@ -9483,12 +5769,12 @@
         </p:grpSpPr>
         <p:sp>
           <p:nvSpPr>
-            <p:cNvPr name="TextBox 7" id="7"/>
-            <p:cNvSpPr txBox="true"/>
+            <p:cNvPr id="7" name="TextBox 7"/>
+            <p:cNvSpPr txBox="1"/>
             <p:nvPr/>
           </p:nvSpPr>
           <p:spPr>
-            <a:xfrm rot="0">
+            <a:xfrm>
               <a:off x="0" y="1043512"/>
               <a:ext cx="8253978" cy="8307068"/>
             </a:xfrm>
@@ -9497,12 +5783,12 @@
             </a:prstGeom>
           </p:spPr>
           <p:txBody>
-            <a:bodyPr anchor="t" rtlCol="false" tIns="0" lIns="0" bIns="0" rIns="0">
+            <a:bodyPr lIns="0" tIns="0" rIns="0" bIns="0" rtlCol="0" anchor="t">
               <a:spAutoFit/>
             </a:bodyPr>
             <a:lstStyle/>
             <a:p>
-              <a:pPr algn="l" marL="842023" indent="-421011" lvl="1">
+              <a:pPr marL="842023" lvl="1" indent="-421011" algn="l">
                 <a:lnSpc>
                   <a:spcPts val="5460"/>
                 </a:lnSpc>
@@ -9523,7 +5809,7 @@
               </a:r>
             </a:p>
             <a:p>
-              <a:pPr algn="l" marL="842023" indent="-421011" lvl="1">
+              <a:pPr marL="842023" lvl="1" indent="-421011" algn="l">
                 <a:lnSpc>
                   <a:spcPts val="5460"/>
                 </a:lnSpc>
@@ -9544,7 +5830,7 @@
               </a:r>
             </a:p>
             <a:p>
-              <a:pPr algn="l" marL="842023" indent="-421011" lvl="1">
+              <a:pPr marL="842023" lvl="1" indent="-421011" algn="l">
                 <a:lnSpc>
                   <a:spcPts val="5460"/>
                 </a:lnSpc>
@@ -9571,12 +5857,12 @@
         </p:sp>
         <p:sp>
           <p:nvSpPr>
-            <p:cNvPr name="TextBox 8" id="8"/>
-            <p:cNvSpPr txBox="true"/>
+            <p:cNvPr id="8" name="TextBox 8"/>
+            <p:cNvSpPr txBox="1"/>
             <p:nvPr/>
           </p:nvSpPr>
           <p:spPr>
-            <a:xfrm rot="0">
+            <a:xfrm>
               <a:off x="0" y="-171450"/>
               <a:ext cx="8253978" cy="962913"/>
             </a:xfrm>
@@ -9585,7 +5871,7 @@
             </a:prstGeom>
           </p:spPr>
           <p:txBody>
-            <a:bodyPr anchor="t" rtlCol="false" tIns="0" lIns="0" bIns="0" rIns="0">
+            <a:bodyPr lIns="0" tIns="0" rIns="0" bIns="0" rtlCol="0" anchor="t">
               <a:spAutoFit/>
             </a:bodyPr>
             <a:lstStyle/>
@@ -9596,7 +5882,7 @@
                 </a:lnSpc>
               </a:pPr>
               <a:r>
-                <a:rPr lang="en-US" sz="3900" b="true">
+                <a:rPr lang="en-US" sz="3900" b="1">
                   <a:solidFill>
                     <a:srgbClr val="FFFFFF"/>
                   </a:solidFill>
@@ -9613,12 +5899,12 @@
       </p:grpSp>
       <p:grpSp>
         <p:nvGrpSpPr>
-          <p:cNvPr name="Group 9" id="9"/>
+          <p:cNvPr id="9" name="Group 9"/>
           <p:cNvGrpSpPr/>
           <p:nvPr/>
         </p:nvGrpSpPr>
         <p:grpSpPr>
-          <a:xfrm rot="0">
+          <a:xfrm>
             <a:off x="8863212" y="2245365"/>
             <a:ext cx="6190483" cy="6327137"/>
             <a:chOff x="0" y="0"/>
@@ -9627,12 +5913,12 @@
         </p:grpSpPr>
         <p:sp>
           <p:nvSpPr>
-            <p:cNvPr name="TextBox 10" id="10"/>
-            <p:cNvSpPr txBox="true"/>
+            <p:cNvPr id="10" name="TextBox 10"/>
+            <p:cNvSpPr txBox="1"/>
             <p:nvPr/>
           </p:nvSpPr>
           <p:spPr>
-            <a:xfrm rot="0">
+            <a:xfrm>
               <a:off x="0" y="1043513"/>
               <a:ext cx="8253978" cy="7392670"/>
             </a:xfrm>
@@ -9641,12 +5927,12 @@
             </a:prstGeom>
           </p:spPr>
           <p:txBody>
-            <a:bodyPr anchor="t" rtlCol="false" tIns="0" lIns="0" bIns="0" rIns="0">
+            <a:bodyPr lIns="0" tIns="0" rIns="0" bIns="0" rtlCol="0" anchor="t">
               <a:spAutoFit/>
             </a:bodyPr>
             <a:lstStyle/>
             <a:p>
-              <a:pPr algn="l" marL="842010" indent="-421005" lvl="1">
+              <a:pPr marL="842010" lvl="1" indent="-421005" algn="l">
                 <a:lnSpc>
                   <a:spcPts val="5459"/>
                 </a:lnSpc>
@@ -9667,7 +5953,7 @@
               </a:r>
             </a:p>
             <a:p>
-              <a:pPr algn="l" marL="842010" indent="-421005" lvl="1">
+              <a:pPr marL="842010" lvl="1" indent="-421005" algn="l">
                 <a:lnSpc>
                   <a:spcPts val="5459"/>
                 </a:lnSpc>
@@ -9684,23 +5970,11 @@
                   <a:cs typeface="29LT Bukra"/>
                   <a:sym typeface="29LT Bukra"/>
                 </a:rPr>
-                <a:t>Audit</a:t>
-              </a:r>
-              <a:r>
-                <a:rPr lang="en-US" sz="3900">
-                  <a:solidFill>
-                    <a:srgbClr val="FFFFFF"/>
-                  </a:solidFill>
-                  <a:latin typeface="29LT Bukra"/>
-                  <a:ea typeface="29LT Bukra"/>
-                  <a:cs typeface="29LT Bukra"/>
-                  <a:sym typeface="29LT Bukra"/>
-                </a:rPr>
-                <a:t>oría de incidencias en tiempo real.</a:t>
+                <a:t>Auditoría de incidencias en tiempo real.</a:t>
               </a:r>
             </a:p>
             <a:p>
-              <a:pPr algn="l" marL="842010" indent="-421005" lvl="1">
+              <a:pPr marL="842010" lvl="1" indent="-421005" algn="l">
                 <a:lnSpc>
                   <a:spcPts val="5459"/>
                 </a:lnSpc>
@@ -9720,31 +5994,19 @@
                   <a:cs typeface="29LT Bukra"/>
                   <a:sym typeface="29LT Bukra"/>
                 </a:rPr>
-                <a:t>Da</a:t>
-              </a:r>
-              <a:r>
-                <a:rPr lang="en-US" sz="3900">
-                  <a:solidFill>
-                    <a:srgbClr val="FFFFFF"/>
-                  </a:solidFill>
-                  <a:latin typeface="29LT Bukra"/>
-                  <a:ea typeface="29LT Bukra"/>
-                  <a:cs typeface="29LT Bukra"/>
-                  <a:sym typeface="29LT Bukra"/>
-                </a:rPr>
-                <a:t>shboard gerencial automatizado sin latencia.</a:t>
+                <a:t>Dashboard gerencial automatizado sin latencia.</a:t>
               </a:r>
             </a:p>
           </p:txBody>
         </p:sp>
         <p:sp>
           <p:nvSpPr>
-            <p:cNvPr name="TextBox 11" id="11"/>
-            <p:cNvSpPr txBox="true"/>
+            <p:cNvPr id="11" name="TextBox 11"/>
+            <p:cNvSpPr txBox="1"/>
             <p:nvPr/>
           </p:nvSpPr>
           <p:spPr>
-            <a:xfrm rot="0">
+            <a:xfrm>
               <a:off x="0" y="-171450"/>
               <a:ext cx="8253978" cy="962914"/>
             </a:xfrm>
@@ -9753,7 +6015,7 @@
             </a:prstGeom>
           </p:spPr>
           <p:txBody>
-            <a:bodyPr anchor="t" rtlCol="false" tIns="0" lIns="0" bIns="0" rIns="0">
+            <a:bodyPr lIns="0" tIns="0" rIns="0" bIns="0" rtlCol="0" anchor="t">
               <a:spAutoFit/>
             </a:bodyPr>
             <a:lstStyle/>
@@ -9764,7 +6026,7 @@
                 </a:lnSpc>
               </a:pPr>
               <a:r>
-                <a:rPr lang="en-US" sz="3900" b="true">
+                <a:rPr lang="en-US" sz="3900" b="1">
                   <a:solidFill>
                     <a:srgbClr val="FFFFFF"/>
                   </a:solidFill>
@@ -9788,7 +6050,7 @@
 </file>
 
 <file path=ppt/slides/slide4.xml><?xml version="1.0" encoding="utf-8"?>
-<p:sld xmlns:p="http://schemas.openxmlformats.org/presentationml/2006/main" xmlns:a="http://schemas.openxmlformats.org/drawingml/2006/main" xmlns:r="http://schemas.openxmlformats.org/officeDocument/2006/relationships">
+<p:sld xmlns:a="http://schemas.openxmlformats.org/drawingml/2006/main" xmlns:r="http://schemas.openxmlformats.org/officeDocument/2006/relationships" xmlns:p="http://schemas.openxmlformats.org/presentationml/2006/main">
   <p:cSld>
     <p:spTree>
       <p:nvGrpSpPr>
@@ -9806,12 +6068,12 @@
       </p:grpSpPr>
       <p:sp>
         <p:nvSpPr>
-          <p:cNvPr name="Freeform 2" id="2"/>
+          <p:cNvPr id="2" name="Freeform 2"/>
           <p:cNvSpPr/>
           <p:nvPr/>
         </p:nvSpPr>
         <p:spPr>
-          <a:xfrm flipH="false" flipV="false" rot="0">
+          <a:xfrm>
             <a:off x="0" y="0"/>
             <a:ext cx="18288000" cy="10287000"/>
           </a:xfrm>
@@ -9820,9 +6082,9 @@
             <a:gdLst/>
             <a:ahLst/>
             <a:cxnLst/>
-            <a:rect r="r" b="b" t="t" l="l"/>
+            <a:rect l="l" t="t" r="r" b="b"/>
             <a:pathLst>
-              <a:path h="10287000" w="18288000">
+              <a:path w="18288000" h="10287000">
                 <a:moveTo>
                   <a:pt x="0" y="0"/>
                 </a:moveTo>
@@ -9845,19 +6107,19 @@
           <a:blipFill>
             <a:blip r:embed="rId2"/>
             <a:stretch>
-              <a:fillRect l="0" t="0" r="0" b="0"/>
+              <a:fillRect/>
             </a:stretch>
           </a:blipFill>
         </p:spPr>
       </p:sp>
       <p:sp>
         <p:nvSpPr>
-          <p:cNvPr name="Freeform 3" id="3"/>
+          <p:cNvPr id="3" name="Freeform 3"/>
           <p:cNvSpPr/>
           <p:nvPr/>
         </p:nvSpPr>
         <p:spPr>
-          <a:xfrm flipH="false" flipV="false" rot="0">
+          <a:xfrm>
             <a:off x="5739613" y="2695503"/>
             <a:ext cx="11287210" cy="6391383"/>
           </a:xfrm>
@@ -9866,9 +6128,9 @@
             <a:gdLst/>
             <a:ahLst/>
             <a:cxnLst/>
-            <a:rect r="r" b="b" t="t" l="l"/>
+            <a:rect l="l" t="t" r="r" b="b"/>
             <a:pathLst>
-              <a:path h="6391383" w="11287210">
+              <a:path w="11287210" h="6391383">
                 <a:moveTo>
                   <a:pt x="0" y="0"/>
                 </a:moveTo>
@@ -9891,19 +6153,19 @@
           <a:blipFill>
             <a:blip r:embed="rId3"/>
             <a:stretch>
-              <a:fillRect l="0" t="0" r="0" b="0"/>
+              <a:fillRect/>
             </a:stretch>
           </a:blipFill>
         </p:spPr>
       </p:sp>
       <p:sp>
         <p:nvSpPr>
-          <p:cNvPr name="TextBox 4" id="4"/>
-          <p:cNvSpPr txBox="true"/>
+          <p:cNvPr id="4" name="TextBox 4"/>
+          <p:cNvSpPr txBox="1"/>
           <p:nvPr/>
         </p:nvSpPr>
         <p:spPr>
-          <a:xfrm rot="0">
+          <a:xfrm>
             <a:off x="1028700" y="265176"/>
             <a:ext cx="16230600" cy="1556385"/>
           </a:xfrm>
@@ -9912,7 +6174,7 @@
           </a:prstGeom>
         </p:spPr>
         <p:txBody>
-          <a:bodyPr anchor="t" rtlCol="false" tIns="0" lIns="0" bIns="0" rIns="0">
+          <a:bodyPr lIns="0" tIns="0" rIns="0" bIns="0" rtlCol="0" anchor="t">
             <a:spAutoFit/>
           </a:bodyPr>
           <a:lstStyle/>
@@ -9923,7 +6185,7 @@
               </a:lnSpc>
             </a:pPr>
             <a:r>
-              <a:rPr lang="en-US" b="true" sz="8000">
+              <a:rPr lang="en-US" sz="8000" b="1">
                 <a:solidFill>
                   <a:srgbClr val="38B6FF"/>
                 </a:solidFill>
@@ -9939,12 +6201,12 @@
       </p:sp>
       <p:sp>
         <p:nvSpPr>
-          <p:cNvPr name="TextBox 5" id="5"/>
-          <p:cNvSpPr txBox="true"/>
+          <p:cNvPr id="5" name="TextBox 5"/>
+          <p:cNvSpPr txBox="1"/>
           <p:nvPr/>
         </p:nvSpPr>
         <p:spPr>
-          <a:xfrm rot="0">
+          <a:xfrm>
             <a:off x="1028700" y="1894842"/>
             <a:ext cx="3891527" cy="7363458"/>
           </a:xfrm>
@@ -9953,12 +6215,12 @@
           </a:prstGeom>
         </p:spPr>
         <p:txBody>
-          <a:bodyPr anchor="t" rtlCol="false" tIns="0" lIns="0" bIns="0" rIns="0">
+          <a:bodyPr lIns="0" tIns="0" rIns="0" bIns="0" rtlCol="0" anchor="t">
             <a:spAutoFit/>
           </a:bodyPr>
           <a:lstStyle/>
           <a:p>
-            <a:pPr algn="l" marL="604528" indent="-302264" lvl="1">
+            <a:pPr marL="604528" lvl="1" indent="-302264" algn="l">
               <a:lnSpc>
                 <a:spcPts val="4480"/>
               </a:lnSpc>
@@ -9979,7 +6241,7 @@
             </a:r>
           </a:p>
           <a:p>
-            <a:pPr algn="l" marL="604528" indent="-302264" lvl="1">
+            <a:pPr marL="604528" lvl="1" indent="-302264" algn="l">
               <a:lnSpc>
                 <a:spcPts val="4480"/>
               </a:lnSpc>
@@ -10000,7 +6262,7 @@
             </a:r>
           </a:p>
           <a:p>
-            <a:pPr algn="l" marL="604528" indent="-302264" lvl="1">
+            <a:pPr marL="604528" lvl="1" indent="-302264" algn="l">
               <a:lnSpc>
                 <a:spcPts val="4480"/>
               </a:lnSpc>
@@ -10031,7 +6293,7 @@
 </file>
 
 <file path=ppt/slides/slide5.xml><?xml version="1.0" encoding="utf-8"?>
-<p:sld xmlns:p="http://schemas.openxmlformats.org/presentationml/2006/main" xmlns:a="http://schemas.openxmlformats.org/drawingml/2006/main" xmlns:r="http://schemas.openxmlformats.org/officeDocument/2006/relationships">
+<p:sld xmlns:a="http://schemas.openxmlformats.org/drawingml/2006/main" xmlns:r="http://schemas.openxmlformats.org/officeDocument/2006/relationships" xmlns:p="http://schemas.openxmlformats.org/presentationml/2006/main">
   <p:cSld>
     <p:spTree>
       <p:nvGrpSpPr>
@@ -10049,12 +6311,12 @@
       </p:grpSpPr>
       <p:sp>
         <p:nvSpPr>
-          <p:cNvPr name="Freeform 2" id="2"/>
+          <p:cNvPr id="2" name="Freeform 2"/>
           <p:cNvSpPr/>
           <p:nvPr/>
         </p:nvSpPr>
         <p:spPr>
-          <a:xfrm flipH="false" flipV="false" rot="0">
+          <a:xfrm>
             <a:off x="0" y="0"/>
             <a:ext cx="18288000" cy="10287000"/>
           </a:xfrm>
@@ -10063,9 +6325,9 @@
             <a:gdLst/>
             <a:ahLst/>
             <a:cxnLst/>
-            <a:rect r="r" b="b" t="t" l="l"/>
+            <a:rect l="l" t="t" r="r" b="b"/>
             <a:pathLst>
-              <a:path h="10287000" w="18288000">
+              <a:path w="18288000" h="10287000">
                 <a:moveTo>
                   <a:pt x="0" y="0"/>
                 </a:moveTo>
@@ -10088,19 +6350,19 @@
           <a:blipFill>
             <a:blip r:embed="rId2"/>
             <a:stretch>
-              <a:fillRect l="0" t="0" r="0" b="0"/>
+              <a:fillRect/>
             </a:stretch>
           </a:blipFill>
         </p:spPr>
       </p:sp>
       <p:sp>
         <p:nvSpPr>
-          <p:cNvPr name="Freeform 3" id="3"/>
+          <p:cNvPr id="3" name="Freeform 3"/>
           <p:cNvSpPr/>
           <p:nvPr/>
         </p:nvSpPr>
         <p:spPr>
-          <a:xfrm flipH="false" flipV="false" rot="0">
+          <a:xfrm>
             <a:off x="1361448" y="2403121"/>
             <a:ext cx="15565103" cy="6342780"/>
           </a:xfrm>
@@ -10109,9 +6371,9 @@
             <a:gdLst/>
             <a:ahLst/>
             <a:cxnLst/>
-            <a:rect r="r" b="b" t="t" l="l"/>
+            <a:rect l="l" t="t" r="r" b="b"/>
             <a:pathLst>
-              <a:path h="6342780" w="15565103">
+              <a:path w="15565103" h="6342780">
                 <a:moveTo>
                   <a:pt x="0" y="0"/>
                 </a:moveTo>
@@ -10134,19 +6396,19 @@
           <a:blipFill>
             <a:blip r:embed="rId3"/>
             <a:stretch>
-              <a:fillRect l="0" t="0" r="0" b="0"/>
+              <a:fillRect/>
             </a:stretch>
           </a:blipFill>
         </p:spPr>
       </p:sp>
       <p:sp>
         <p:nvSpPr>
-          <p:cNvPr name="TextBox 4" id="4"/>
-          <p:cNvSpPr txBox="true"/>
+          <p:cNvPr id="4" name="TextBox 4"/>
+          <p:cNvSpPr txBox="1"/>
           <p:nvPr/>
         </p:nvSpPr>
         <p:spPr>
-          <a:xfrm rot="0">
+          <a:xfrm>
             <a:off x="1028700" y="265176"/>
             <a:ext cx="16230600" cy="1556385"/>
           </a:xfrm>
@@ -10155,7 +6417,7 @@
           </a:prstGeom>
         </p:spPr>
         <p:txBody>
-          <a:bodyPr anchor="t" rtlCol="false" tIns="0" lIns="0" bIns="0" rIns="0">
+          <a:bodyPr lIns="0" tIns="0" rIns="0" bIns="0" rtlCol="0" anchor="t">
             <a:spAutoFit/>
           </a:bodyPr>
           <a:lstStyle/>
@@ -10166,7 +6428,7 @@
               </a:lnSpc>
             </a:pPr>
             <a:r>
-              <a:rPr lang="en-US" b="true" sz="8000">
+              <a:rPr lang="en-US" sz="8000" b="1">
                 <a:solidFill>
                   <a:srgbClr val="38B6FF"/>
                 </a:solidFill>
@@ -10189,7 +6451,7 @@
 </file>
 
 <file path=ppt/slides/slide6.xml><?xml version="1.0" encoding="utf-8"?>
-<p:sld xmlns:p="http://schemas.openxmlformats.org/presentationml/2006/main" xmlns:a="http://schemas.openxmlformats.org/drawingml/2006/main" xmlns:r="http://schemas.openxmlformats.org/officeDocument/2006/relationships">
+<p:sld xmlns:a="http://schemas.openxmlformats.org/drawingml/2006/main" xmlns:r="http://schemas.openxmlformats.org/officeDocument/2006/relationships" xmlns:p="http://schemas.openxmlformats.org/presentationml/2006/main">
   <p:cSld>
     <p:spTree>
       <p:nvGrpSpPr>
@@ -10207,12 +6469,12 @@
       </p:grpSpPr>
       <p:sp>
         <p:nvSpPr>
-          <p:cNvPr name="Freeform 2" id="2"/>
+          <p:cNvPr id="2" name="Freeform 2"/>
           <p:cNvSpPr/>
           <p:nvPr/>
         </p:nvSpPr>
         <p:spPr>
-          <a:xfrm flipH="false" flipV="false" rot="0">
+          <a:xfrm>
             <a:off x="0" y="0"/>
             <a:ext cx="18288000" cy="10287000"/>
           </a:xfrm>
@@ -10221,9 +6483,9 @@
             <a:gdLst/>
             <a:ahLst/>
             <a:cxnLst/>
-            <a:rect r="r" b="b" t="t" l="l"/>
+            <a:rect l="l" t="t" r="r" b="b"/>
             <a:pathLst>
-              <a:path h="10287000" w="18288000">
+              <a:path w="18288000" h="10287000">
                 <a:moveTo>
                   <a:pt x="0" y="0"/>
                 </a:moveTo>
@@ -10246,19 +6508,19 @@
           <a:blipFill>
             <a:blip r:embed="rId2"/>
             <a:stretch>
-              <a:fillRect l="0" t="0" r="0" b="0"/>
+              <a:fillRect/>
             </a:stretch>
           </a:blipFill>
         </p:spPr>
       </p:sp>
       <p:sp>
         <p:nvSpPr>
-          <p:cNvPr name="Freeform 3" id="3"/>
+          <p:cNvPr id="3" name="Freeform 3"/>
           <p:cNvSpPr/>
           <p:nvPr/>
         </p:nvSpPr>
         <p:spPr>
-          <a:xfrm flipH="false" flipV="false" rot="0">
+          <a:xfrm>
             <a:off x="1335472" y="7233774"/>
             <a:ext cx="10632206" cy="2024526"/>
           </a:xfrm>
@@ -10267,9 +6529,9 @@
             <a:gdLst/>
             <a:ahLst/>
             <a:cxnLst/>
-            <a:rect r="r" b="b" t="t" l="l"/>
+            <a:rect l="l" t="t" r="r" b="b"/>
             <a:pathLst>
-              <a:path h="2024526" w="10632206">
+              <a:path w="10632206" h="2024526">
                 <a:moveTo>
                   <a:pt x="0" y="0"/>
                 </a:moveTo>
@@ -10292,19 +6554,19 @@
           <a:blipFill>
             <a:blip r:embed="rId3"/>
             <a:stretch>
-              <a:fillRect l="0" t="0" r="0" b="0"/>
+              <a:fillRect/>
             </a:stretch>
           </a:blipFill>
         </p:spPr>
       </p:sp>
       <p:sp>
         <p:nvSpPr>
-          <p:cNvPr name="Freeform 4" id="4"/>
+          <p:cNvPr id="4" name="Freeform 4"/>
           <p:cNvSpPr/>
           <p:nvPr/>
         </p:nvSpPr>
         <p:spPr>
-          <a:xfrm flipH="false" flipV="false" rot="0">
+          <a:xfrm>
             <a:off x="12539083" y="3430784"/>
             <a:ext cx="4241073" cy="6261031"/>
           </a:xfrm>
@@ -10313,9 +6575,9 @@
             <a:gdLst/>
             <a:ahLst/>
             <a:cxnLst/>
-            <a:rect r="r" b="b" t="t" l="l"/>
+            <a:rect l="l" t="t" r="r" b="b"/>
             <a:pathLst>
-              <a:path h="6261031" w="4241073">
+              <a:path w="4241073" h="6261031">
                 <a:moveTo>
                   <a:pt x="0" y="0"/>
                 </a:moveTo>
@@ -10338,19 +6600,19 @@
           <a:blipFill>
             <a:blip r:embed="rId4"/>
             <a:stretch>
-              <a:fillRect l="0" t="0" r="0" b="0"/>
+              <a:fillRect/>
             </a:stretch>
           </a:blipFill>
         </p:spPr>
       </p:sp>
       <p:sp>
         <p:nvSpPr>
-          <p:cNvPr name="TextBox 5" id="5"/>
-          <p:cNvSpPr txBox="true"/>
+          <p:cNvPr id="5" name="TextBox 5"/>
+          <p:cNvSpPr txBox="1"/>
           <p:nvPr/>
         </p:nvSpPr>
         <p:spPr>
-          <a:xfrm rot="0">
+          <a:xfrm>
             <a:off x="1028700" y="229719"/>
             <a:ext cx="16230600" cy="2861310"/>
           </a:xfrm>
@@ -10359,7 +6621,7 @@
           </a:prstGeom>
         </p:spPr>
         <p:txBody>
-          <a:bodyPr anchor="t" rtlCol="false" tIns="0" lIns="0" bIns="0" rIns="0">
+          <a:bodyPr lIns="0" tIns="0" rIns="0" bIns="0" rtlCol="0" anchor="t">
             <a:spAutoFit/>
           </a:bodyPr>
           <a:lstStyle/>
@@ -10370,7 +6632,7 @@
               </a:lnSpc>
             </a:pPr>
             <a:r>
-              <a:rPr lang="en-US" b="true" sz="8000">
+              <a:rPr lang="en-US" sz="8000" b="1">
                 <a:solidFill>
                   <a:srgbClr val="38B6FF"/>
                 </a:solidFill>
@@ -10386,12 +6648,12 @@
       </p:sp>
       <p:sp>
         <p:nvSpPr>
-          <p:cNvPr name="TextBox 6" id="6"/>
-          <p:cNvSpPr txBox="true"/>
+          <p:cNvPr id="6" name="TextBox 6"/>
+          <p:cNvSpPr txBox="1"/>
           <p:nvPr/>
         </p:nvSpPr>
         <p:spPr>
-          <a:xfrm rot="0">
+          <a:xfrm>
             <a:off x="1160056" y="3230759"/>
             <a:ext cx="10983038" cy="3429633"/>
           </a:xfrm>
@@ -10400,12 +6662,12 @@
           </a:prstGeom>
         </p:spPr>
         <p:txBody>
-          <a:bodyPr anchor="t" rtlCol="false" tIns="0" lIns="0" bIns="0" rIns="0">
+          <a:bodyPr lIns="0" tIns="0" rIns="0" bIns="0" rtlCol="0" anchor="t">
             <a:spAutoFit/>
           </a:bodyPr>
           <a:lstStyle/>
           <a:p>
-            <a:pPr algn="l" marL="604528" indent="-302264" lvl="1">
+            <a:pPr marL="604528" lvl="1" indent="-302264" algn="l">
               <a:lnSpc>
                 <a:spcPts val="4480"/>
               </a:lnSpc>
@@ -10426,7 +6688,7 @@
             </a:r>
           </a:p>
           <a:p>
-            <a:pPr algn="l" marL="604528" indent="-302264" lvl="1">
+            <a:pPr marL="604528" lvl="1" indent="-302264" algn="l">
               <a:lnSpc>
                 <a:spcPts val="4480"/>
               </a:lnSpc>
@@ -10447,7 +6709,7 @@
             </a:r>
           </a:p>
           <a:p>
-            <a:pPr algn="l" marL="604528" indent="-302264" lvl="1">
+            <a:pPr marL="604528" lvl="1" indent="-302264" algn="l">
               <a:lnSpc>
                 <a:spcPts val="4480"/>
               </a:lnSpc>
@@ -10478,7 +6740,7 @@
 </file>
 
 <file path=ppt/slides/slide7.xml><?xml version="1.0" encoding="utf-8"?>
-<p:sld xmlns:p="http://schemas.openxmlformats.org/presentationml/2006/main" xmlns:a="http://schemas.openxmlformats.org/drawingml/2006/main" xmlns:r="http://schemas.openxmlformats.org/officeDocument/2006/relationships">
+<p:sld xmlns:a="http://schemas.openxmlformats.org/drawingml/2006/main" xmlns:r="http://schemas.openxmlformats.org/officeDocument/2006/relationships" xmlns:p="http://schemas.openxmlformats.org/presentationml/2006/main">
   <p:cSld>
     <p:spTree>
       <p:nvGrpSpPr>
@@ -10496,12 +6758,12 @@
       </p:grpSpPr>
       <p:sp>
         <p:nvSpPr>
-          <p:cNvPr name="Freeform 2" id="2"/>
+          <p:cNvPr id="2" name="Freeform 2"/>
           <p:cNvSpPr/>
           <p:nvPr/>
         </p:nvSpPr>
         <p:spPr>
-          <a:xfrm flipH="false" flipV="false" rot="0">
+          <a:xfrm>
             <a:off x="0" y="0"/>
             <a:ext cx="18288000" cy="10287000"/>
           </a:xfrm>
@@ -10510,9 +6772,9 @@
             <a:gdLst/>
             <a:ahLst/>
             <a:cxnLst/>
-            <a:rect r="r" b="b" t="t" l="l"/>
+            <a:rect l="l" t="t" r="r" b="b"/>
             <a:pathLst>
-              <a:path h="10287000" w="18288000">
+              <a:path w="18288000" h="10287000">
                 <a:moveTo>
                   <a:pt x="0" y="0"/>
                 </a:moveTo>
@@ -10535,19 +6797,19 @@
           <a:blipFill>
             <a:blip r:embed="rId2"/>
             <a:stretch>
-              <a:fillRect l="0" t="0" r="0" b="0"/>
+              <a:fillRect/>
             </a:stretch>
           </a:blipFill>
         </p:spPr>
       </p:sp>
       <p:sp>
         <p:nvSpPr>
-          <p:cNvPr name="Freeform 3" id="3"/>
+          <p:cNvPr id="3" name="Freeform 3"/>
           <p:cNvSpPr/>
           <p:nvPr/>
         </p:nvSpPr>
         <p:spPr>
-          <a:xfrm flipH="false" flipV="false" rot="0">
+          <a:xfrm>
             <a:off x="4166579" y="1881703"/>
             <a:ext cx="9648420" cy="7646373"/>
           </a:xfrm>
@@ -10556,9 +6818,9 @@
             <a:gdLst/>
             <a:ahLst/>
             <a:cxnLst/>
-            <a:rect r="r" b="b" t="t" l="l"/>
+            <a:rect l="l" t="t" r="r" b="b"/>
             <a:pathLst>
-              <a:path h="7646373" w="9648420">
+              <a:path w="9648420" h="7646373">
                 <a:moveTo>
                   <a:pt x="0" y="0"/>
                 </a:moveTo>
@@ -10581,19 +6843,19 @@
           <a:blipFill>
             <a:blip r:embed="rId3"/>
             <a:stretch>
-              <a:fillRect l="0" t="0" r="0" b="0"/>
+              <a:fillRect/>
             </a:stretch>
           </a:blipFill>
         </p:spPr>
       </p:sp>
       <p:sp>
         <p:nvSpPr>
-          <p:cNvPr name="TextBox 4" id="4"/>
-          <p:cNvSpPr txBox="true"/>
+          <p:cNvPr id="4" name="TextBox 4"/>
+          <p:cNvSpPr txBox="1"/>
           <p:nvPr/>
         </p:nvSpPr>
         <p:spPr>
-          <a:xfrm rot="0">
+          <a:xfrm>
             <a:off x="875488" y="632704"/>
             <a:ext cx="16230600" cy="926209"/>
           </a:xfrm>
@@ -10602,7 +6864,7 @@
           </a:prstGeom>
         </p:spPr>
         <p:txBody>
-          <a:bodyPr anchor="t" rtlCol="false" tIns="0" lIns="0" bIns="0" rIns="0">
+          <a:bodyPr lIns="0" tIns="0" rIns="0" bIns="0" rtlCol="0" anchor="t">
             <a:spAutoFit/>
           </a:bodyPr>
           <a:lstStyle/>
@@ -10613,7 +6875,7 @@
               </a:lnSpc>
             </a:pPr>
             <a:r>
-              <a:rPr lang="en-US" b="true" sz="4800">
+              <a:rPr lang="en-US" sz="4800" b="1">
                 <a:solidFill>
                   <a:srgbClr val="38B6FF"/>
                 </a:solidFill>
@@ -10636,7 +6898,7 @@
 </file>
 
 <file path=ppt/slides/slide8.xml><?xml version="1.0" encoding="utf-8"?>
-<p:sld xmlns:p="http://schemas.openxmlformats.org/presentationml/2006/main" xmlns:a="http://schemas.openxmlformats.org/drawingml/2006/main" xmlns:r="http://schemas.openxmlformats.org/officeDocument/2006/relationships">
+<p:sld xmlns:a="http://schemas.openxmlformats.org/drawingml/2006/main" xmlns:r="http://schemas.openxmlformats.org/officeDocument/2006/relationships" xmlns:p="http://schemas.openxmlformats.org/presentationml/2006/main">
   <p:cSld>
     <p:spTree>
       <p:nvGrpSpPr>
@@ -10654,12 +6916,12 @@
       </p:grpSpPr>
       <p:sp>
         <p:nvSpPr>
-          <p:cNvPr name="Freeform 2" id="2"/>
+          <p:cNvPr id="2" name="Freeform 2"/>
           <p:cNvSpPr/>
           <p:nvPr/>
         </p:nvSpPr>
         <p:spPr>
-          <a:xfrm flipH="false" flipV="false" rot="0">
+          <a:xfrm>
             <a:off x="0" y="0"/>
             <a:ext cx="18288000" cy="10287000"/>
           </a:xfrm>
@@ -10668,9 +6930,9 @@
             <a:gdLst/>
             <a:ahLst/>
             <a:cxnLst/>
-            <a:rect r="r" b="b" t="t" l="l"/>
+            <a:rect l="l" t="t" r="r" b="b"/>
             <a:pathLst>
-              <a:path h="10287000" w="18288000">
+              <a:path w="18288000" h="10287000">
                 <a:moveTo>
                   <a:pt x="0" y="0"/>
                 </a:moveTo>
@@ -10693,19 +6955,19 @@
           <a:blipFill>
             <a:blip r:embed="rId2"/>
             <a:stretch>
-              <a:fillRect l="0" t="0" r="0" b="0"/>
+              <a:fillRect/>
             </a:stretch>
           </a:blipFill>
         </p:spPr>
       </p:sp>
       <p:sp>
         <p:nvSpPr>
-          <p:cNvPr name="Freeform 3" id="3"/>
+          <p:cNvPr id="3" name="Freeform 3"/>
           <p:cNvSpPr/>
           <p:nvPr/>
         </p:nvSpPr>
         <p:spPr>
-          <a:xfrm flipH="false" flipV="false" rot="0">
+          <a:xfrm>
             <a:off x="5695346" y="1506984"/>
             <a:ext cx="6897308" cy="8012891"/>
           </a:xfrm>
@@ -10714,9 +6976,9 @@
             <a:gdLst/>
             <a:ahLst/>
             <a:cxnLst/>
-            <a:rect r="r" b="b" t="t" l="l"/>
+            <a:rect l="l" t="t" r="r" b="b"/>
             <a:pathLst>
-              <a:path h="8012891" w="6897308">
+              <a:path w="6897308" h="8012891">
                 <a:moveTo>
                   <a:pt x="0" y="0"/>
                 </a:moveTo>
@@ -10739,28 +7001,28 @@
           <a:blipFill>
             <a:blip r:embed="rId3"/>
             <a:stretch>
-              <a:fillRect l="0" t="0" r="0" b="0"/>
+              <a:fillRect/>
             </a:stretch>
           </a:blipFill>
         </p:spPr>
       </p:sp>
       <p:sp>
         <p:nvSpPr>
-          <p:cNvPr name="TextBox 4" id="4"/>
-          <p:cNvSpPr txBox="true"/>
+          <p:cNvPr id="4" name="TextBox 4"/>
+          <p:cNvSpPr txBox="1"/>
           <p:nvPr/>
         </p:nvSpPr>
         <p:spPr>
-          <a:xfrm rot="0">
-            <a:off x="1208006" y="121289"/>
-            <a:ext cx="16134636" cy="1385695"/>
+          <a:xfrm>
+            <a:off x="609600" y="121289"/>
+            <a:ext cx="16733042" cy="1179810"/>
           </a:xfrm>
           <a:prstGeom prst="rect">
             <a:avLst/>
           </a:prstGeom>
         </p:spPr>
         <p:txBody>
-          <a:bodyPr anchor="t" rtlCol="false" tIns="0" lIns="0" bIns="0" rIns="0">
+          <a:bodyPr wrap="square" lIns="0" tIns="0" rIns="0" bIns="0" rtlCol="0" anchor="t">
             <a:spAutoFit/>
           </a:bodyPr>
           <a:lstStyle/>
@@ -10774,7 +7036,7 @@
               </a:spcBef>
             </a:pPr>
             <a:r>
-              <a:rPr lang="en-US" b="true" sz="7100">
+              <a:rPr lang="en-US" sz="7100" b="1" dirty="0" err="1">
                 <a:solidFill>
                   <a:srgbClr val="38B6FF"/>
                 </a:solidFill>
@@ -10783,7 +7045,19 @@
                 <a:cs typeface="29LT Bukra Semi-Bold"/>
                 <a:sym typeface="29LT Bukra Semi-Bold"/>
               </a:rPr>
-              <a:t>Arquitectura Empresarial (TOGAF)</a:t>
+              <a:t>Arquitectura</a:t>
+            </a:r>
+            <a:r>
+              <a:rPr lang="en-US" sz="7100" b="1" dirty="0">
+                <a:solidFill>
+                  <a:srgbClr val="38B6FF"/>
+                </a:solidFill>
+                <a:latin typeface="29LT Bukra Semi-Bold"/>
+                <a:ea typeface="29LT Bukra Semi-Bold"/>
+                <a:cs typeface="29LT Bukra Semi-Bold"/>
+                <a:sym typeface="29LT Bukra Semi-Bold"/>
+              </a:rPr>
+              <a:t> Empresarial (TOGAF)</a:t>
             </a:r>
           </a:p>
         </p:txBody>
@@ -10797,7 +7071,7 @@
 </file>
 
 <file path=ppt/slides/slide9.xml><?xml version="1.0" encoding="utf-8"?>
-<p:sld xmlns:p="http://schemas.openxmlformats.org/presentationml/2006/main" xmlns:a="http://schemas.openxmlformats.org/drawingml/2006/main" xmlns:r="http://schemas.openxmlformats.org/officeDocument/2006/relationships">
+<p:sld xmlns:a="http://schemas.openxmlformats.org/drawingml/2006/main" xmlns:r="http://schemas.openxmlformats.org/officeDocument/2006/relationships" xmlns:p="http://schemas.openxmlformats.org/presentationml/2006/main">
   <p:cSld>
     <p:spTree>
       <p:nvGrpSpPr>
@@ -10815,12 +7089,12 @@
       </p:grpSpPr>
       <p:sp>
         <p:nvSpPr>
-          <p:cNvPr name="Freeform 2" id="2"/>
+          <p:cNvPr id="2" name="Freeform 2"/>
           <p:cNvSpPr/>
           <p:nvPr/>
         </p:nvSpPr>
         <p:spPr>
-          <a:xfrm flipH="false" flipV="false" rot="0">
+          <a:xfrm>
             <a:off x="0" y="0"/>
             <a:ext cx="18288000" cy="10287000"/>
           </a:xfrm>
@@ -10829,9 +7103,9 @@
             <a:gdLst/>
             <a:ahLst/>
             <a:cxnLst/>
-            <a:rect r="r" b="b" t="t" l="l"/>
+            <a:rect l="l" t="t" r="r" b="b"/>
             <a:pathLst>
-              <a:path h="10287000" w="18288000">
+              <a:path w="18288000" h="10287000">
                 <a:moveTo>
                   <a:pt x="0" y="0"/>
                 </a:moveTo>
@@ -10854,19 +7128,19 @@
           <a:blipFill>
             <a:blip r:embed="rId2"/>
             <a:stretch>
-              <a:fillRect l="0" t="0" r="0" b="0"/>
+              <a:fillRect/>
             </a:stretch>
           </a:blipFill>
         </p:spPr>
       </p:sp>
       <p:sp>
         <p:nvSpPr>
-          <p:cNvPr name="Freeform 3" id="3"/>
+          <p:cNvPr id="3" name="Freeform 3"/>
           <p:cNvSpPr/>
           <p:nvPr/>
         </p:nvSpPr>
         <p:spPr>
-          <a:xfrm flipH="false" flipV="false" rot="0">
+          <a:xfrm>
             <a:off x="6111253" y="3171401"/>
             <a:ext cx="11301259" cy="3249112"/>
           </a:xfrm>
@@ -10875,9 +7149,9 @@
             <a:gdLst/>
             <a:ahLst/>
             <a:cxnLst/>
-            <a:rect r="r" b="b" t="t" l="l"/>
+            <a:rect l="l" t="t" r="r" b="b"/>
             <a:pathLst>
-              <a:path h="3249112" w="11301259">
+              <a:path w="11301259" h="3249112">
                 <a:moveTo>
                   <a:pt x="0" y="0"/>
                 </a:moveTo>
@@ -10900,19 +7174,19 @@
           <a:blipFill>
             <a:blip r:embed="rId3"/>
             <a:stretch>
-              <a:fillRect l="0" t="0" r="0" b="0"/>
+              <a:fillRect/>
             </a:stretch>
           </a:blipFill>
         </p:spPr>
       </p:sp>
       <p:sp>
         <p:nvSpPr>
-          <p:cNvPr name="Freeform 4" id="4"/>
+          <p:cNvPr id="4" name="Freeform 4"/>
           <p:cNvSpPr/>
           <p:nvPr/>
         </p:nvSpPr>
         <p:spPr>
-          <a:xfrm flipH="false" flipV="false" rot="0">
+          <a:xfrm>
             <a:off x="13669879" y="6788528"/>
             <a:ext cx="3051964" cy="3051964"/>
           </a:xfrm>
@@ -10921,9 +7195,9 @@
             <a:gdLst/>
             <a:ahLst/>
             <a:cxnLst/>
-            <a:rect r="r" b="b" t="t" l="l"/>
+            <a:rect l="l" t="t" r="r" b="b"/>
             <a:pathLst>
-              <a:path h="3051964" w="3051964">
+              <a:path w="3051964" h="3051964">
                 <a:moveTo>
                   <a:pt x="0" y="0"/>
                 </a:moveTo>
@@ -10946,19 +7220,19 @@
           <a:blipFill>
             <a:blip r:embed="rId4"/>
             <a:stretch>
-              <a:fillRect l="0" t="0" r="0" b="0"/>
+              <a:fillRect/>
             </a:stretch>
           </a:blipFill>
         </p:spPr>
       </p:sp>
       <p:sp>
         <p:nvSpPr>
-          <p:cNvPr name="TextBox 5" id="5"/>
-          <p:cNvSpPr txBox="true"/>
+          <p:cNvPr id="5" name="TextBox 5"/>
+          <p:cNvSpPr txBox="1"/>
           <p:nvPr/>
         </p:nvSpPr>
         <p:spPr>
-          <a:xfrm rot="0">
+          <a:xfrm>
             <a:off x="1028700" y="170844"/>
             <a:ext cx="16230600" cy="2787393"/>
           </a:xfrm>
@@ -10967,7 +7241,7 @@
           </a:prstGeom>
         </p:spPr>
         <p:txBody>
-          <a:bodyPr anchor="t" rtlCol="false" tIns="0" lIns="0" bIns="0" rIns="0">
+          <a:bodyPr lIns="0" tIns="0" rIns="0" bIns="0" rtlCol="0" anchor="t">
             <a:spAutoFit/>
           </a:bodyPr>
           <a:lstStyle/>
@@ -10978,7 +7252,7 @@
               </a:lnSpc>
             </a:pPr>
             <a:r>
-              <a:rPr lang="en-US" b="true" sz="7800">
+              <a:rPr lang="en-US" sz="7800" b="1">
                 <a:solidFill>
                   <a:srgbClr val="38B6FF"/>
                 </a:solidFill>
@@ -10994,12 +7268,12 @@
       </p:sp>
       <p:sp>
         <p:nvSpPr>
-          <p:cNvPr name="TextBox 6" id="6"/>
-          <p:cNvSpPr txBox="true"/>
+          <p:cNvPr id="6" name="TextBox 6"/>
+          <p:cNvSpPr txBox="1"/>
           <p:nvPr/>
         </p:nvSpPr>
         <p:spPr>
-          <a:xfrm rot="0">
+          <a:xfrm>
             <a:off x="735561" y="3023516"/>
             <a:ext cx="4998196" cy="6660642"/>
           </a:xfrm>
@@ -11008,12 +7282,12 @@
           </a:prstGeom>
         </p:spPr>
         <p:txBody>
-          <a:bodyPr anchor="t" rtlCol="false" tIns="0" lIns="0" bIns="0" rIns="0">
+          <a:bodyPr lIns="0" tIns="0" rIns="0" bIns="0" rtlCol="0" anchor="t">
             <a:spAutoFit/>
           </a:bodyPr>
           <a:lstStyle/>
           <a:p>
-            <a:pPr algn="l" marL="669285" indent="-334642" lvl="1">
+            <a:pPr marL="669285" lvl="1" indent="-334642" algn="l">
               <a:lnSpc>
                 <a:spcPts val="3998"/>
               </a:lnSpc>
@@ -11021,7 +7295,7 @@
               <a:buChar char="•"/>
             </a:pPr>
             <a:r>
-              <a:rPr lang="en-US" b="true" sz="3099">
+              <a:rPr lang="en-US" sz="3099" b="1">
                 <a:solidFill>
                   <a:srgbClr val="FFFFFF"/>
                 </a:solidFill>
@@ -11034,7 +7308,7 @@
             </a:r>
           </a:p>
           <a:p>
-            <a:pPr algn="l" marL="669285" indent="-334642" lvl="1">
+            <a:pPr marL="669285" lvl="1" indent="-334642" algn="l">
               <a:lnSpc>
                 <a:spcPts val="3998"/>
               </a:lnSpc>
@@ -11042,7 +7316,7 @@
               <a:buChar char="•"/>
             </a:pPr>
             <a:r>
-              <a:rPr lang="en-US" b="true" sz="3099">
+              <a:rPr lang="en-US" sz="3099" b="1">
                 <a:solidFill>
                   <a:srgbClr val="FFFFFF"/>
                 </a:solidFill>
@@ -11055,7 +7329,7 @@
             </a:r>
           </a:p>
           <a:p>
-            <a:pPr algn="l" marL="669285" indent="-334642" lvl="1">
+            <a:pPr marL="669285" lvl="1" indent="-334642" algn="l">
               <a:lnSpc>
                 <a:spcPts val="3998"/>
               </a:lnSpc>
@@ -11063,7 +7337,7 @@
               <a:buChar char="•"/>
             </a:pPr>
             <a:r>
-              <a:rPr lang="en-US" b="true" sz="3099">
+              <a:rPr lang="en-US" sz="3099" b="1">
                 <a:solidFill>
                   <a:srgbClr val="FFFFFF"/>
                 </a:solidFill>
